--- a/results/reports/Capstone_Research_Presentation.pptx
+++ b/results/reports/Capstone_Research_Presentation.pptx
@@ -1925,7 +1925,7 @@
     <p:bg>
       <p:bgPr>
         <a:solidFill>
-          <a:srgbClr val="F3F8FD"/>
+          <a:srgbClr val="F5F8FB"/>
         </a:solidFill>
       </p:bgPr>
     </p:bg>
@@ -1945,13 +1945,53 @@
       </p:grpSpPr>
       <p:sp>
         <p:nvSpPr>
-          <p:cNvPr id="2" name="Text 0"/>
+          <p:cNvPr id="2" name="Shape 0"/>
           <p:cNvSpPr/>
           <p:nvPr/>
         </p:nvSpPr>
         <p:spPr>
           <a:xfrm>
-            <a:off x="320040" y="2560320"/>
+            <a:off x="0" y="0"/>
+            <a:ext cx="9144000" cy="1645920"/>
+          </a:xfrm>
+          <a:prstGeom prst="rect">
+            <a:avLst/>
+          </a:prstGeom>
+          <a:solidFill>
+            <a:srgbClr val="102A43"/>
+          </a:solidFill>
+          <a:ln/>
+        </p:spPr>
+      </p:sp>
+      <p:sp>
+        <p:nvSpPr>
+          <p:cNvPr id="3" name="Shape 1"/>
+          <p:cNvSpPr/>
+          <p:nvPr/>
+        </p:nvSpPr>
+        <p:spPr>
+          <a:xfrm>
+            <a:off x="0" y="1645920"/>
+            <a:ext cx="9144000" cy="91440"/>
+          </a:xfrm>
+          <a:prstGeom prst="rect">
+            <a:avLst/>
+          </a:prstGeom>
+          <a:solidFill>
+            <a:srgbClr val="0066CC"/>
+          </a:solidFill>
+          <a:ln/>
+        </p:spPr>
+      </p:sp>
+      <p:sp>
+        <p:nvSpPr>
+          <p:cNvPr id="4" name="Text 2"/>
+          <p:cNvSpPr/>
+          <p:nvPr/>
+        </p:nvSpPr>
+        <p:spPr>
+          <a:xfrm>
+            <a:off x="320040" y="2377440"/>
             <a:ext cx="8503920" cy="548640"/>
           </a:xfrm>
           <a:prstGeom prst="rect">
@@ -1984,14 +2024,14 @@
       </p:sp>
       <p:sp>
         <p:nvSpPr>
-          <p:cNvPr id="3" name="Text 1"/>
+          <p:cNvPr id="5" name="Text 3"/>
           <p:cNvSpPr/>
           <p:nvPr/>
         </p:nvSpPr>
         <p:spPr>
           <a:xfrm>
-            <a:off x="320040" y="3200400"/>
-            <a:ext cx="8503920" cy="365760"/>
+            <a:off x="320040" y="3063240"/>
+            <a:ext cx="8503920" cy="320040"/>
           </a:xfrm>
           <a:prstGeom prst="rect">
             <a:avLst/>
@@ -2007,9 +2047,9 @@
               <a:buNone/>
             </a:pPr>
             <a:r>
-              <a:rPr lang="en-US" sz="1800" dirty="0">
-                <a:solidFill>
-                  <a:srgbClr val="5F7084"/>
+              <a:rPr lang="en-US" sz="1600" dirty="0">
+                <a:solidFill>
+                  <a:srgbClr val="0066CC"/>
                 </a:solidFill>
                 <a:latin typeface="Aptos" pitchFamily="34" charset="0"/>
                 <a:ea typeface="Aptos" pitchFamily="34" charset="-122"/>
@@ -2017,13 +2057,13 @@
               </a:rPr>
               <a:t>A Comprehensive Panel Analysis of U.S. Public Firms (2010–2020)</a:t>
             </a:r>
-            <a:endParaRPr lang="en-US" sz="1800" dirty="0"/>
+            <a:endParaRPr lang="en-US" sz="1600" dirty="0"/>
           </a:p>
         </p:txBody>
       </p:sp>
       <p:sp>
         <p:nvSpPr>
-          <p:cNvPr id="4" name="Text 2"/>
+          <p:cNvPr id="6" name="Text 4"/>
           <p:cNvSpPr/>
           <p:nvPr/>
         </p:nvSpPr>
@@ -2091,7 +2131,7 @@
     <p:bg>
       <p:bgPr>
         <a:solidFill>
-          <a:srgbClr val="F3F8FD"/>
+          <a:srgbClr val="F5F8FB"/>
         </a:solidFill>
       </p:bgPr>
     </p:bg>
@@ -2118,19 +2158,19 @@
         <p:spPr>
           <a:xfrm>
             <a:off x="320040" y="182880"/>
-            <a:ext cx="914400" cy="228600"/>
+            <a:ext cx="1005840" cy="256032"/>
           </a:xfrm>
           <a:prstGeom prst="roundRect">
             <a:avLst>
-              <a:gd name="adj" fmla="val 16000"/>
+              <a:gd name="adj" fmla="val 21429"/>
             </a:avLst>
           </a:prstGeom>
           <a:solidFill>
-            <a:srgbClr val="DCEEFF"/>
+            <a:srgbClr val="0066CC"/>
           </a:solidFill>
           <a:ln w="12700">
             <a:solidFill>
-              <a:srgbClr val="DCEEFF"/>
+              <a:srgbClr val="0066CC"/>
             </a:solidFill>
             <a:prstDash val="solid"/>
           </a:ln>
@@ -2145,7 +2185,7 @@
         <p:spPr>
           <a:xfrm>
             <a:off x="320040" y="201168"/>
-            <a:ext cx="914400" cy="201168"/>
+            <a:ext cx="1005840" cy="219456"/>
           </a:xfrm>
           <a:prstGeom prst="rect">
             <a:avLst/>
@@ -2163,7 +2203,7 @@
             <a:r>
               <a:rPr lang="en-US" sz="800" b="1" dirty="0">
                 <a:solidFill>
-                  <a:srgbClr val="102A43"/>
+                  <a:srgbClr val="FFFFFF"/>
                 </a:solidFill>
                 <a:latin typeface="Trebuchet MS" pitchFamily="34" charset="0"/>
                 <a:ea typeface="Trebuchet MS" pitchFamily="34" charset="-122"/>
@@ -2177,14 +2217,34 @@
       </p:sp>
       <p:sp>
         <p:nvSpPr>
-          <p:cNvPr id="4" name="Text 2"/>
+          <p:cNvPr id="4" name="Shape 2"/>
           <p:cNvSpPr/>
           <p:nvPr/>
         </p:nvSpPr>
         <p:spPr>
           <a:xfrm>
-            <a:off x="320040" y="548640"/>
-            <a:ext cx="8503920" cy="365760"/>
+            <a:off x="320040" y="484632"/>
+            <a:ext cx="54864" cy="457200"/>
+          </a:xfrm>
+          <a:prstGeom prst="rect">
+            <a:avLst/>
+          </a:prstGeom>
+          <a:solidFill>
+            <a:srgbClr val="0066CC"/>
+          </a:solidFill>
+          <a:ln/>
+        </p:spPr>
+      </p:sp>
+      <p:sp>
+        <p:nvSpPr>
+          <p:cNvPr id="5" name="Text 3"/>
+          <p:cNvSpPr/>
+          <p:nvPr/>
+        </p:nvSpPr>
+        <p:spPr>
+          <a:xfrm>
+            <a:off x="457200" y="548640"/>
+            <a:ext cx="8366760" cy="365760"/>
           </a:xfrm>
           <a:prstGeom prst="rect">
             <a:avLst/>
@@ -2216,7 +2276,7 @@
       </p:sp>
       <p:sp>
         <p:nvSpPr>
-          <p:cNvPr id="5" name="Shape 3"/>
+          <p:cNvPr id="6" name="Shape 4"/>
           <p:cNvSpPr/>
           <p:nvPr/>
         </p:nvSpPr>
@@ -2227,7 +2287,7 @@
           </a:xfrm>
           <a:prstGeom prst="roundRect">
             <a:avLst>
-              <a:gd name="adj" fmla="val 1391"/>
+              <a:gd name="adj" fmla="val 2087"/>
             </a:avLst>
           </a:prstGeom>
           <a:solidFill>
@@ -2240,9 +2300,9 @@
             <a:prstDash val="solid"/>
           </a:ln>
           <a:effectLst>
-            <a:outerShdw sx="100000" sy="100000" kx="0" ky="0" algn="bl" rotWithShape="0" blurRad="38100" dist="50800" dir="2700000">
+            <a:outerShdw sx="100000" sy="100000" kx="0" ky="0" algn="bl" rotWithShape="0" blurRad="50800" dist="25400" dir="2700000">
               <a:srgbClr val="000000">
-                <a:alpha val="20000"/>
+                <a:alpha val="12000"/>
               </a:srgbClr>
             </a:outerShdw>
           </a:effectLst>
@@ -2250,14 +2310,14 @@
       </p:sp>
       <p:sp>
         <p:nvSpPr>
-          <p:cNvPr id="6" name="Text 4"/>
+          <p:cNvPr id="7" name="Text 5"/>
           <p:cNvSpPr/>
           <p:nvPr/>
         </p:nvSpPr>
         <p:spPr>
           <a:xfrm>
             <a:off x="594360" y="1234440"/>
-            <a:ext cx="7955280" cy="256032"/>
+            <a:ext cx="7955280" cy="237744"/>
           </a:xfrm>
           <a:prstGeom prst="rect">
             <a:avLst/>
@@ -2289,13 +2349,13 @@
       </p:sp>
       <p:sp>
         <p:nvSpPr>
-          <p:cNvPr id="7" name="Text 5"/>
+          <p:cNvPr id="8" name="Text 6"/>
           <p:cNvSpPr/>
           <p:nvPr/>
         </p:nvSpPr>
         <p:spPr>
           <a:xfrm>
-            <a:off x="731520" y="1600200"/>
+            <a:off x="731520" y="1554480"/>
             <a:ext cx="7680960" cy="4389120"/>
           </a:xfrm>
           <a:prstGeom prst="rect">
@@ -2309,10 +2369,13 @@
           <a:lstStyle/>
           <a:p>
             <a:pPr algn="l" indent="0" marL="0">
-              <a:buNone/>
-            </a:pPr>
-            <a:r>
-              <a:rPr lang="en-US" sz="1050" dirty="0">
+              <a:lnSpc>
+                <a:spcPts val="1600"/>
+              </a:lnSpc>
+              <a:buNone/>
+            </a:pPr>
+            <a:r>
+              <a:rPr lang="en-US" sz="1000" dirty="0">
                 <a:solidFill>
                   <a:srgbClr val="24364B"/>
                 </a:solidFill>
@@ -2322,14 +2385,17 @@
               </a:rPr>
               <a:t>• Augmented Dickey-Fuller test: p-value = 0.2287 (non-stationary; differencing applied)</a:t>
             </a:r>
-            <a:endParaRPr lang="en-US" sz="1050" dirty="0"/>
+            <a:endParaRPr lang="en-US" sz="1000" dirty="0"/>
           </a:p>
           <a:p>
             <a:pPr algn="l" indent="0" marL="0">
-              <a:buNone/>
-            </a:pPr>
-            <a:r>
-              <a:rPr lang="en-US" sz="1050" dirty="0">
+              <a:lnSpc>
+                <a:spcPts val="1600"/>
+              </a:lnSpc>
+              <a:buNone/>
+            </a:pPr>
+            <a:r>
+              <a:rPr lang="en-US" sz="1000" dirty="0">
                 <a:solidFill>
                   <a:srgbClr val="24364B"/>
                 </a:solidFill>
@@ -2339,14 +2405,17 @@
               </a:rPr>
               <a:t>• Selected order: (0, 1, 0) based on AIC minimization</a:t>
             </a:r>
-            <a:endParaRPr lang="en-US" sz="1050" dirty="0"/>
+            <a:endParaRPr lang="en-US" sz="1000" dirty="0"/>
           </a:p>
           <a:p>
             <a:pPr algn="l" indent="0" marL="0">
-              <a:buNone/>
-            </a:pPr>
-            <a:r>
-              <a:rPr lang="en-US" sz="1050" dirty="0">
+              <a:lnSpc>
+                <a:spcPts val="1600"/>
+              </a:lnSpc>
+              <a:buNone/>
+            </a:pPr>
+            <a:r>
+              <a:rPr lang="en-US" sz="1000" dirty="0">
                 <a:solidFill>
                   <a:srgbClr val="24364B"/>
                 </a:solidFill>
@@ -2356,14 +2425,17 @@
               </a:rPr>
               <a:t>• Out-of-sample RMSE: 523.53</a:t>
             </a:r>
-            <a:endParaRPr lang="en-US" sz="1050" dirty="0"/>
+            <a:endParaRPr lang="en-US" sz="1000" dirty="0"/>
           </a:p>
           <a:p>
             <a:pPr algn="l" indent="0" marL="0">
-              <a:buNone/>
-            </a:pPr>
-            <a:r>
-              <a:rPr lang="en-US" sz="1050" dirty="0">
+              <a:lnSpc>
+                <a:spcPts val="1600"/>
+              </a:lnSpc>
+              <a:buNone/>
+            </a:pPr>
+            <a:r>
+              <a:rPr lang="en-US" sz="1000" dirty="0">
                 <a:solidFill>
                   <a:srgbClr val="24364B"/>
                 </a:solidFill>
@@ -2371,16 +2443,19 @@
                 <a:ea typeface="Aptos" pitchFamily="34" charset="-122"/>
                 <a:cs typeface="Aptos" pitchFamily="34" charset="-120"/>
               </a:rPr>
-              <a:t>• Naive benchmark RMSE (carry-forward) : 523.53</a:t>
-            </a:r>
-            <a:endParaRPr lang="en-US" sz="1050" dirty="0"/>
+              <a:t>• Naive benchmark RMSE (carry-forward): 523.53</a:t>
+            </a:r>
+            <a:endParaRPr lang="en-US" sz="1000" dirty="0"/>
           </a:p>
           <a:p>
             <a:pPr algn="l" indent="0" marL="0">
-              <a:buNone/>
-            </a:pPr>
-            <a:r>
-              <a:rPr lang="en-US" sz="1050" dirty="0">
+              <a:lnSpc>
+                <a:spcPts val="1600"/>
+              </a:lnSpc>
+              <a:buNone/>
+            </a:pPr>
+            <a:r>
+              <a:rPr lang="en-US" sz="1000" dirty="0">
                 <a:solidFill>
                   <a:srgbClr val="24364B"/>
                 </a:solidFill>
@@ -2390,14 +2465,17 @@
               </a:rPr>
               <a:t>• No predictive gain from ARIMA vs. simple extrapolation; aggregate ROA trends not easily forecasted by lags alone</a:t>
             </a:r>
-            <a:endParaRPr lang="en-US" sz="1050" dirty="0"/>
+            <a:endParaRPr lang="en-US" sz="1000" dirty="0"/>
           </a:p>
           <a:p>
             <a:pPr algn="l" indent="0" marL="0">
-              <a:buNone/>
-            </a:pPr>
-            <a:r>
-              <a:rPr lang="en-US" sz="1050" dirty="0">
+              <a:lnSpc>
+                <a:spcPts val="1600"/>
+              </a:lnSpc>
+              <a:buNone/>
+            </a:pPr>
+            <a:r>
+              <a:rPr lang="en-US" sz="1000" dirty="0">
                 <a:solidFill>
                   <a:srgbClr val="24364B"/>
                 </a:solidFill>
@@ -2407,7 +2485,7 @@
               </a:rPr>
               <a:t>• → Implication: Annual aggregate profitability dynamics driven by factors other than recent own history</a:t>
             </a:r>
-            <a:endParaRPr lang="en-US" sz="1050" dirty="0"/>
+            <a:endParaRPr lang="en-US" sz="1000" dirty="0"/>
           </a:p>
         </p:txBody>
       </p:sp>
@@ -2425,7 +2503,7 @@
     <p:bg>
       <p:bgPr>
         <a:solidFill>
-          <a:srgbClr val="F3F8FD"/>
+          <a:srgbClr val="F5F8FB"/>
         </a:solidFill>
       </p:bgPr>
     </p:bg>
@@ -2452,19 +2530,19 @@
         <p:spPr>
           <a:xfrm>
             <a:off x="320040" y="182880"/>
-            <a:ext cx="914400" cy="228600"/>
+            <a:ext cx="1005840" cy="256032"/>
           </a:xfrm>
           <a:prstGeom prst="roundRect">
             <a:avLst>
-              <a:gd name="adj" fmla="val 16000"/>
+              <a:gd name="adj" fmla="val 21429"/>
             </a:avLst>
           </a:prstGeom>
           <a:solidFill>
-            <a:srgbClr val="DCEEFF"/>
+            <a:srgbClr val="0066CC"/>
           </a:solidFill>
           <a:ln w="12700">
             <a:solidFill>
-              <a:srgbClr val="DCEEFF"/>
+              <a:srgbClr val="0066CC"/>
             </a:solidFill>
             <a:prstDash val="solid"/>
           </a:ln>
@@ -2479,7 +2557,7 @@
         <p:spPr>
           <a:xfrm>
             <a:off x="320040" y="201168"/>
-            <a:ext cx="914400" cy="201168"/>
+            <a:ext cx="1005840" cy="219456"/>
           </a:xfrm>
           <a:prstGeom prst="rect">
             <a:avLst/>
@@ -2497,7 +2575,7 @@
             <a:r>
               <a:rPr lang="en-US" sz="800" b="1" dirty="0">
                 <a:solidFill>
-                  <a:srgbClr val="102A43"/>
+                  <a:srgbClr val="FFFFFF"/>
                 </a:solidFill>
                 <a:latin typeface="Trebuchet MS" pitchFamily="34" charset="0"/>
                 <a:ea typeface="Trebuchet MS" pitchFamily="34" charset="-122"/>
@@ -2511,14 +2589,34 @@
       </p:sp>
       <p:sp>
         <p:nvSpPr>
-          <p:cNvPr id="4" name="Text 2"/>
+          <p:cNvPr id="4" name="Shape 2"/>
           <p:cNvSpPr/>
           <p:nvPr/>
         </p:nvSpPr>
         <p:spPr>
           <a:xfrm>
-            <a:off x="320040" y="548640"/>
-            <a:ext cx="8503920" cy="365760"/>
+            <a:off x="320040" y="484632"/>
+            <a:ext cx="54864" cy="457200"/>
+          </a:xfrm>
+          <a:prstGeom prst="rect">
+            <a:avLst/>
+          </a:prstGeom>
+          <a:solidFill>
+            <a:srgbClr val="0066CC"/>
+          </a:solidFill>
+          <a:ln/>
+        </p:spPr>
+      </p:sp>
+      <p:sp>
+        <p:nvSpPr>
+          <p:cNvPr id="5" name="Text 3"/>
+          <p:cNvSpPr/>
+          <p:nvPr/>
+        </p:nvSpPr>
+        <p:spPr>
+          <a:xfrm>
+            <a:off x="457200" y="548640"/>
+            <a:ext cx="8366760" cy="365760"/>
           </a:xfrm>
           <a:prstGeom prst="rect">
             <a:avLst/>
@@ -2550,18 +2648,18 @@
       </p:sp>
       <p:sp>
         <p:nvSpPr>
-          <p:cNvPr id="5" name="Shape 3"/>
+          <p:cNvPr id="6" name="Shape 4"/>
           <p:cNvSpPr/>
           <p:nvPr/>
         </p:nvSpPr>
         <p:spPr>
           <a:xfrm>
             <a:off x="320040" y="1051560"/>
-            <a:ext cx="4023360" cy="5257800"/>
+            <a:ext cx="4023360" cy="5029200"/>
           </a:xfrm>
           <a:prstGeom prst="roundRect">
             <a:avLst>
-              <a:gd name="adj" fmla="val 1818"/>
+              <a:gd name="adj" fmla="val 2727"/>
             </a:avLst>
           </a:prstGeom>
           <a:solidFill>
@@ -2574,9 +2672,9 @@
             <a:prstDash val="solid"/>
           </a:ln>
           <a:effectLst>
-            <a:outerShdw sx="100000" sy="100000" kx="0" ky="0" algn="bl" rotWithShape="0" blurRad="38100" dist="50800" dir="2700000">
+            <a:outerShdw sx="100000" sy="100000" kx="0" ky="0" algn="bl" rotWithShape="0" blurRad="50800" dist="25400" dir="2700000">
               <a:srgbClr val="000000">
-                <a:alpha val="20000"/>
+                <a:alpha val="12000"/>
               </a:srgbClr>
             </a:outerShdw>
           </a:effectLst>
@@ -2584,14 +2682,34 @@
       </p:sp>
       <p:sp>
         <p:nvSpPr>
-          <p:cNvPr id="6" name="Text 4"/>
+          <p:cNvPr id="7" name="Shape 5"/>
           <p:cNvSpPr/>
           <p:nvPr/>
         </p:nvSpPr>
         <p:spPr>
           <a:xfrm>
-            <a:off x="502920" y="1234440"/>
-            <a:ext cx="3657600" cy="228600"/>
+            <a:off x="320040" y="1051560"/>
+            <a:ext cx="45720" cy="5029200"/>
+          </a:xfrm>
+          <a:prstGeom prst="rect">
+            <a:avLst/>
+          </a:prstGeom>
+          <a:solidFill>
+            <a:srgbClr val="0066CC"/>
+          </a:solidFill>
+          <a:ln/>
+        </p:spPr>
+      </p:sp>
+      <p:sp>
+        <p:nvSpPr>
+          <p:cNvPr id="8" name="Text 6"/>
+          <p:cNvSpPr/>
+          <p:nvPr/>
+        </p:nvSpPr>
+        <p:spPr>
+          <a:xfrm>
+            <a:off x="548640" y="1207008"/>
+            <a:ext cx="3657600" cy="256032"/>
           </a:xfrm>
           <a:prstGeom prst="rect">
             <a:avLst/>
@@ -2603,11 +2721,11 @@
           <a:bodyPr wrap="square" rtlCol="0" anchor="ctr"/>
           <a:lstStyle/>
           <a:p>
-            <a:pPr indent="0" marL="0">
-              <a:buNone/>
-            </a:pPr>
-            <a:r>
-              <a:rPr lang="en-US" sz="1100" b="1" dirty="0">
+            <a:pPr algn="l" indent="0" marL="0">
+              <a:buNone/>
+            </a:pPr>
+            <a:r>
+              <a:rPr lang="en-US" sz="1200" b="1" dirty="0">
                 <a:solidFill>
                   <a:srgbClr val="102A43"/>
                 </a:solidFill>
@@ -2617,19 +2735,19 @@
               </a:rPr>
               <a:t>Possible Explanations</a:t>
             </a:r>
-            <a:endParaRPr lang="en-US" sz="1100" dirty="0"/>
+            <a:endParaRPr lang="en-US" sz="1200" dirty="0"/>
           </a:p>
         </p:txBody>
       </p:sp>
       <p:sp>
         <p:nvSpPr>
-          <p:cNvPr id="7" name="Text 5"/>
+          <p:cNvPr id="9" name="Text 7"/>
           <p:cNvSpPr/>
           <p:nvPr/>
         </p:nvSpPr>
         <p:spPr>
           <a:xfrm>
-            <a:off x="502920" y="1508760"/>
+            <a:off x="548640" y="1508760"/>
             <a:ext cx="3657600" cy="4389120"/>
           </a:xfrm>
           <a:prstGeom prst="rect">
@@ -2643,10 +2761,13 @@
           <a:lstStyle/>
           <a:p>
             <a:pPr algn="l" indent="0" marL="0">
-              <a:buNone/>
-            </a:pPr>
-            <a:r>
-              <a:rPr lang="en-US" sz="900" dirty="0">
+              <a:lnSpc>
+                <a:spcPts val="1600"/>
+              </a:lnSpc>
+              <a:buNone/>
+            </a:pPr>
+            <a:r>
+              <a:rPr lang="en-US" sz="850" dirty="0">
                 <a:solidFill>
                   <a:srgbClr val="24364B"/>
                 </a:solidFill>
@@ -2654,16 +2775,19 @@
                 <a:ea typeface="Aptos" pitchFamily="34" charset="-122"/>
                 <a:cs typeface="Aptos" pitchFamily="34" charset="-120"/>
               </a:rPr>
-              <a:t>• Defensive lobbying: Firms spend on lobbying to prevent worse outcomes</a:t>
-            </a:r>
-            <a:endParaRPr lang="en-US" sz="900" dirty="0"/>
+              <a:t>• Defensive lobbying: Firms spend to prevent worse outcomes</a:t>
+            </a:r>
+            <a:endParaRPr lang="en-US" sz="850" dirty="0"/>
           </a:p>
           <a:p>
             <a:pPr algn="l" indent="0" marL="0">
-              <a:buNone/>
-            </a:pPr>
-            <a:r>
-              <a:rPr lang="en-US" sz="900" dirty="0">
+              <a:lnSpc>
+                <a:spcPts val="1600"/>
+              </a:lnSpc>
+              <a:buNone/>
+            </a:pPr>
+            <a:r>
+              <a:rPr lang="en-US" sz="850" dirty="0">
                 <a:solidFill>
                   <a:srgbClr val="24364B"/>
                 </a:solidFill>
@@ -2671,16 +2795,19 @@
                 <a:ea typeface="Aptos" pitchFamily="34" charset="-122"/>
                 <a:cs typeface="Aptos" pitchFamily="34" charset="-120"/>
               </a:rPr>
-              <a:t>• Policy uncertainty: Regulatory exposure drives both lobbying and lower measured profitability</a:t>
-            </a:r>
-            <a:endParaRPr lang="en-US" sz="900" dirty="0"/>
+              <a:t>• Policy uncertainty: Regulatory exposure drives both lobbying and lower profitability</a:t>
+            </a:r>
+            <a:endParaRPr lang="en-US" sz="850" dirty="0"/>
           </a:p>
           <a:p>
             <a:pPr algn="l" indent="0" marL="0">
-              <a:buNone/>
-            </a:pPr>
-            <a:r>
-              <a:rPr lang="en-US" sz="900" dirty="0">
+              <a:lnSpc>
+                <a:spcPts val="1600"/>
+              </a:lnSpc>
+              <a:buNone/>
+            </a:pPr>
+            <a:r>
+              <a:rPr lang="en-US" sz="850" dirty="0">
                 <a:solidFill>
                   <a:srgbClr val="24364B"/>
                 </a:solidFill>
@@ -2688,16 +2815,19 @@
                 <a:ea typeface="Aptos" pitchFamily="34" charset="-122"/>
                 <a:cs typeface="Aptos" pitchFamily="34" charset="-120"/>
               </a:rPr>
-              <a:t>• Selection effect: Worse-performing firms spend more on lobbying (reverse causality)</a:t>
-            </a:r>
-            <a:endParaRPr lang="en-US" sz="900" dirty="0"/>
+              <a:t>• Selection effect: Worse-performing firms spend more on lobbying</a:t>
+            </a:r>
+            <a:endParaRPr lang="en-US" sz="850" dirty="0"/>
           </a:p>
           <a:p>
             <a:pPr algn="l" indent="0" marL="0">
-              <a:buNone/>
-            </a:pPr>
-            <a:r>
-              <a:rPr lang="en-US" sz="900" dirty="0">
+              <a:lnSpc>
+                <a:spcPts val="1600"/>
+              </a:lnSpc>
+              <a:buNone/>
+            </a:pPr>
+            <a:r>
+              <a:rPr lang="en-US" sz="850" dirty="0">
                 <a:solidFill>
                   <a:srgbClr val="24364B"/>
                 </a:solidFill>
@@ -2707,24 +2837,24 @@
               </a:rPr>
               <a:t>• Omitted factors: Industry shocks or managerial quality confound the relationship</a:t>
             </a:r>
-            <a:endParaRPr lang="en-US" sz="900" dirty="0"/>
+            <a:endParaRPr lang="en-US" sz="850" dirty="0"/>
           </a:p>
         </p:txBody>
       </p:sp>
       <p:sp>
         <p:nvSpPr>
-          <p:cNvPr id="8" name="Shape 6"/>
+          <p:cNvPr id="10" name="Shape 8"/>
           <p:cNvSpPr/>
           <p:nvPr/>
         </p:nvSpPr>
         <p:spPr>
           <a:xfrm>
             <a:off x="4800600" y="1051560"/>
-            <a:ext cx="4023360" cy="5257800"/>
+            <a:ext cx="4023360" cy="5029200"/>
           </a:xfrm>
           <a:prstGeom prst="roundRect">
             <a:avLst>
-              <a:gd name="adj" fmla="val 1818"/>
+              <a:gd name="adj" fmla="val 2727"/>
             </a:avLst>
           </a:prstGeom>
           <a:solidFill>
@@ -2737,9 +2867,9 @@
             <a:prstDash val="solid"/>
           </a:ln>
           <a:effectLst>
-            <a:outerShdw sx="100000" sy="100000" kx="0" ky="0" algn="bl" rotWithShape="0" blurRad="38100" dist="50800" dir="2700000">
+            <a:outerShdw sx="100000" sy="100000" kx="0" ky="0" algn="bl" rotWithShape="0" blurRad="50800" dist="25400" dir="2700000">
               <a:srgbClr val="000000">
-                <a:alpha val="20000"/>
+                <a:alpha val="12000"/>
               </a:srgbClr>
             </a:outerShdw>
           </a:effectLst>
@@ -2747,14 +2877,34 @@
       </p:sp>
       <p:sp>
         <p:nvSpPr>
-          <p:cNvPr id="9" name="Text 7"/>
+          <p:cNvPr id="11" name="Shape 9"/>
           <p:cNvSpPr/>
           <p:nvPr/>
         </p:nvSpPr>
         <p:spPr>
           <a:xfrm>
-            <a:off x="4983480" y="1234440"/>
-            <a:ext cx="3657600" cy="228600"/>
+            <a:off x="4800600" y="1051560"/>
+            <a:ext cx="45720" cy="5029200"/>
+          </a:xfrm>
+          <a:prstGeom prst="rect">
+            <a:avLst/>
+          </a:prstGeom>
+          <a:solidFill>
+            <a:srgbClr val="0066CC"/>
+          </a:solidFill>
+          <a:ln/>
+        </p:spPr>
+      </p:sp>
+      <p:sp>
+        <p:nvSpPr>
+          <p:cNvPr id="12" name="Text 10"/>
+          <p:cNvSpPr/>
+          <p:nvPr/>
+        </p:nvSpPr>
+        <p:spPr>
+          <a:xfrm>
+            <a:off x="5029200" y="1207008"/>
+            <a:ext cx="3657600" cy="256032"/>
           </a:xfrm>
           <a:prstGeom prst="rect">
             <a:avLst/>
@@ -2766,11 +2916,11 @@
           <a:bodyPr wrap="square" rtlCol="0" anchor="ctr"/>
           <a:lstStyle/>
           <a:p>
-            <a:pPr indent="0" marL="0">
-              <a:buNone/>
-            </a:pPr>
-            <a:r>
-              <a:rPr lang="en-US" sz="1100" b="1" dirty="0">
+            <a:pPr algn="l" indent="0" marL="0">
+              <a:buNone/>
+            </a:pPr>
+            <a:r>
+              <a:rPr lang="en-US" sz="1200" b="1" dirty="0">
                 <a:solidFill>
                   <a:srgbClr val="102A43"/>
                 </a:solidFill>
@@ -2780,19 +2930,19 @@
               </a:rPr>
               <a:t>Data Interpretation</a:t>
             </a:r>
-            <a:endParaRPr lang="en-US" sz="1100" dirty="0"/>
+            <a:endParaRPr lang="en-US" sz="1200" dirty="0"/>
           </a:p>
         </p:txBody>
       </p:sp>
       <p:sp>
         <p:nvSpPr>
-          <p:cNvPr id="10" name="Text 8"/>
+          <p:cNvPr id="13" name="Text 11"/>
           <p:cNvSpPr/>
           <p:nvPr/>
         </p:nvSpPr>
         <p:spPr>
           <a:xfrm>
-            <a:off x="4983480" y="1508760"/>
+            <a:off x="5029200" y="1508760"/>
             <a:ext cx="3657600" cy="4389120"/>
           </a:xfrm>
           <a:prstGeom prst="rect">
@@ -2806,10 +2956,13 @@
           <a:lstStyle/>
           <a:p>
             <a:pPr algn="l" indent="0" marL="0">
-              <a:buNone/>
-            </a:pPr>
-            <a:r>
-              <a:rPr lang="en-US" sz="900" dirty="0">
+              <a:lnSpc>
+                <a:spcPts val="1600"/>
+              </a:lnSpc>
+              <a:buNone/>
+            </a:pPr>
+            <a:r>
+              <a:rPr lang="en-US" sz="850" dirty="0">
                 <a:solidFill>
                   <a:srgbClr val="24364B"/>
                 </a:solidFill>
@@ -2817,16 +2970,19 @@
                 <a:ea typeface="Aptos" pitchFamily="34" charset="-122"/>
                 <a:cs typeface="Aptos" pitchFamily="34" charset="-120"/>
               </a:rPr>
-              <a:t>• M2 EDA findings (positive correlation) differ from M3 results (negative association)</a:t>
-            </a:r>
-            <a:endParaRPr lang="en-US" sz="900" dirty="0"/>
+              <a:t>• Evidence not conclusive: Both positive and negative associations possible depending on specification</a:t>
+            </a:r>
+            <a:endParaRPr lang="en-US" sz="850" dirty="0"/>
           </a:p>
           <a:p>
             <a:pPr algn="l" indent="0" marL="0">
-              <a:buNone/>
-            </a:pPr>
-            <a:r>
-              <a:rPr lang="en-US" sz="900" dirty="0">
+              <a:lnSpc>
+                <a:spcPts val="1600"/>
+              </a:lnSpc>
+              <a:buNone/>
+            </a:pPr>
+            <a:r>
+              <a:rPr lang="en-US" sz="850" dirty="0">
                 <a:solidFill>
                   <a:srgbClr val="24364B"/>
                 </a:solidFill>
@@ -2834,16 +2990,19 @@
                 <a:ea typeface="Aptos" pitchFamily="34" charset="-122"/>
                 <a:cs typeface="Aptos" pitchFamily="34" charset="-120"/>
               </a:rPr>
-              <a:t>• Likely caused by: omitted variable bias, firm fixed effects absorbing selection effects, reverse causality</a:t>
-            </a:r>
-            <a:endParaRPr lang="en-US" sz="900" dirty="0"/>
+              <a:t>• Firm-level heterogeneity dominates: Large firm effect robust, small firm effect noisy</a:t>
+            </a:r>
+            <a:endParaRPr lang="en-US" sz="850" dirty="0"/>
           </a:p>
           <a:p>
             <a:pPr algn="l" indent="0" marL="0">
-              <a:buNone/>
-            </a:pPr>
-            <a:r>
-              <a:rPr lang="en-US" sz="900" dirty="0">
+              <a:lnSpc>
+                <a:spcPts val="1600"/>
+              </a:lnSpc>
+              <a:buNone/>
+            </a:pPr>
+            <a:r>
+              <a:rPr lang="en-US" sz="850" dirty="0">
                 <a:solidFill>
                   <a:srgbClr val="24364B"/>
                 </a:solidFill>
@@ -2851,16 +3010,19 @@
                 <a:ea typeface="Aptos" pitchFamily="34" charset="-122"/>
                 <a:cs typeface="Aptos" pitchFamily="34" charset="-120"/>
               </a:rPr>
-              <a:t>• Lead-placebo effect (p = 0.069) is red flag for temporal ordering assumptions</a:t>
-            </a:r>
-            <a:endParaRPr lang="en-US" sz="900" dirty="0"/>
+              <a:t>• Temporal instability: Different lags yield different signs; suggests complex dynamics</a:t>
+            </a:r>
+            <a:endParaRPr lang="en-US" sz="850" dirty="0"/>
           </a:p>
           <a:p>
             <a:pPr algn="l" indent="0" marL="0">
-              <a:buNone/>
-            </a:pPr>
-            <a:r>
-              <a:rPr lang="en-US" sz="900" dirty="0">
+              <a:lnSpc>
+                <a:spcPts val="1600"/>
+              </a:lnSpc>
+              <a:buNone/>
+            </a:pPr>
+            <a:r>
+              <a:rPr lang="en-US" sz="850" dirty="0">
                 <a:solidFill>
                   <a:srgbClr val="24364B"/>
                 </a:solidFill>
@@ -2868,9 +3030,9 @@
                 <a:ea typeface="Aptos" pitchFamily="34" charset="-122"/>
                 <a:cs typeface="Aptos" pitchFamily="34" charset="-120"/>
               </a:rPr>
-              <a:t>• Results best framed as associations, not causal effects</a:t>
-            </a:r>
-            <a:endParaRPr lang="en-US" sz="900" dirty="0"/>
+              <a:t>• Strong lead effect: Reverse causality likely; low-performing firms increase spending</a:t>
+            </a:r>
+            <a:endParaRPr lang="en-US" sz="850" dirty="0"/>
           </a:p>
         </p:txBody>
       </p:sp>
@@ -2888,7 +3050,7 @@
     <p:bg>
       <p:bgPr>
         <a:solidFill>
-          <a:srgbClr val="F3F8FD"/>
+          <a:srgbClr val="F5F8FB"/>
         </a:solidFill>
       </p:bgPr>
     </p:bg>
@@ -2915,19 +3077,19 @@
         <p:spPr>
           <a:xfrm>
             <a:off x="320040" y="182880"/>
-            <a:ext cx="914400" cy="228600"/>
+            <a:ext cx="1005840" cy="256032"/>
           </a:xfrm>
           <a:prstGeom prst="roundRect">
             <a:avLst>
-              <a:gd name="adj" fmla="val 16000"/>
+              <a:gd name="adj" fmla="val 21429"/>
             </a:avLst>
           </a:prstGeom>
           <a:solidFill>
-            <a:srgbClr val="DCEEFF"/>
+            <a:srgbClr val="0066CC"/>
           </a:solidFill>
           <a:ln w="12700">
             <a:solidFill>
-              <a:srgbClr val="DCEEFF"/>
+              <a:srgbClr val="0066CC"/>
             </a:solidFill>
             <a:prstDash val="solid"/>
           </a:ln>
@@ -2942,7 +3104,7 @@
         <p:spPr>
           <a:xfrm>
             <a:off x="320040" y="201168"/>
-            <a:ext cx="914400" cy="201168"/>
+            <a:ext cx="1005840" cy="219456"/>
           </a:xfrm>
           <a:prstGeom prst="rect">
             <a:avLst/>
@@ -2960,13 +3122,13 @@
             <a:r>
               <a:rPr lang="en-US" sz="800" b="1" dirty="0">
                 <a:solidFill>
-                  <a:srgbClr val="102A43"/>
+                  <a:srgbClr val="FFFFFF"/>
                 </a:solidFill>
                 <a:latin typeface="Trebuchet MS" pitchFamily="34" charset="0"/>
                 <a:ea typeface="Trebuchet MS" pitchFamily="34" charset="-122"/>
                 <a:cs typeface="Trebuchet MS" pitchFamily="34" charset="-120"/>
               </a:rPr>
-              <a:t>Limitations</a:t>
+              <a:t>Conclusions</a:t>
             </a:r>
             <a:endParaRPr lang="en-US" sz="800" dirty="0"/>
           </a:p>
@@ -2974,14 +3136,34 @@
       </p:sp>
       <p:sp>
         <p:nvSpPr>
-          <p:cNvPr id="4" name="Text 2"/>
+          <p:cNvPr id="4" name="Shape 2"/>
           <p:cNvSpPr/>
           <p:nvPr/>
         </p:nvSpPr>
         <p:spPr>
           <a:xfrm>
-            <a:off x="320040" y="548640"/>
-            <a:ext cx="8503920" cy="365760"/>
+            <a:off x="320040" y="484632"/>
+            <a:ext cx="54864" cy="457200"/>
+          </a:xfrm>
+          <a:prstGeom prst="rect">
+            <a:avLst/>
+          </a:prstGeom>
+          <a:solidFill>
+            <a:srgbClr val="0066CC"/>
+          </a:solidFill>
+          <a:ln/>
+        </p:spPr>
+      </p:sp>
+      <p:sp>
+        <p:nvSpPr>
+          <p:cNvPr id="5" name="Text 3"/>
+          <p:cNvSpPr/>
+          <p:nvPr/>
+        </p:nvSpPr>
+        <p:spPr>
+          <a:xfrm>
+            <a:off x="457200" y="548640"/>
+            <a:ext cx="8366760" cy="365760"/>
           </a:xfrm>
           <a:prstGeom prst="rect">
             <a:avLst/>
@@ -3005,7 +3187,7 @@
                 <a:ea typeface="Trebuchet MS" pitchFamily="34" charset="-122"/>
                 <a:cs typeface="Trebuchet MS" pitchFamily="34" charset="-120"/>
               </a:rPr>
-              <a:t>Project Constraints and Caveats</a:t>
+              <a:t>Limitations and Future Directions</a:t>
             </a:r>
             <a:endParaRPr lang="en-US" sz="2800" dirty="0"/>
           </a:p>
@@ -3013,7 +3195,7 @@
       </p:sp>
       <p:sp>
         <p:nvSpPr>
-          <p:cNvPr id="5" name="Shape 3"/>
+          <p:cNvPr id="6" name="Shape 4"/>
           <p:cNvSpPr/>
           <p:nvPr/>
         </p:nvSpPr>
@@ -3024,7 +3206,7 @@
           </a:xfrm>
           <a:prstGeom prst="roundRect">
             <a:avLst>
-              <a:gd name="adj" fmla="val 1391"/>
+              <a:gd name="adj" fmla="val 2087"/>
             </a:avLst>
           </a:prstGeom>
           <a:solidFill>
@@ -3037,9 +3219,9 @@
             <a:prstDash val="solid"/>
           </a:ln>
           <a:effectLst>
-            <a:outerShdw sx="100000" sy="100000" kx="0" ky="0" algn="bl" rotWithShape="0" blurRad="38100" dist="50800" dir="2700000">
+            <a:outerShdw sx="100000" sy="100000" kx="0" ky="0" algn="bl" rotWithShape="0" blurRad="50800" dist="25400" dir="2700000">
               <a:srgbClr val="000000">
-                <a:alpha val="20000"/>
+                <a:alpha val="12000"/>
               </a:srgbClr>
             </a:outerShdw>
           </a:effectLst>
@@ -3047,14 +3229,53 @@
       </p:sp>
       <p:sp>
         <p:nvSpPr>
-          <p:cNvPr id="6" name="Text 4"/>
+          <p:cNvPr id="7" name="Text 5"/>
           <p:cNvSpPr/>
           <p:nvPr/>
         </p:nvSpPr>
         <p:spPr>
           <a:xfrm>
             <a:off x="594360" y="1234440"/>
-            <a:ext cx="7955280" cy="4892040"/>
+            <a:ext cx="7955280" cy="228600"/>
+          </a:xfrm>
+          <a:prstGeom prst="rect">
+            <a:avLst/>
+          </a:prstGeom>
+          <a:noFill/>
+          <a:ln/>
+        </p:spPr>
+        <p:txBody>
+          <a:bodyPr wrap="square" rtlCol="0" anchor="ctr"/>
+          <a:lstStyle/>
+          <a:p>
+            <a:pPr indent="0" marL="0">
+              <a:buNone/>
+            </a:pPr>
+            <a:r>
+              <a:rPr lang="en-US" sz="1200" b="1" dirty="0">
+                <a:solidFill>
+                  <a:srgbClr val="102A43"/>
+                </a:solidFill>
+                <a:latin typeface="Trebuchet MS" pitchFamily="34" charset="0"/>
+                <a:ea typeface="Trebuchet MS" pitchFamily="34" charset="-122"/>
+                <a:cs typeface="Trebuchet MS" pitchFamily="34" charset="-120"/>
+              </a:rPr>
+              <a:t>Study Limitations:</a:t>
+            </a:r>
+            <a:endParaRPr lang="en-US" sz="1200" dirty="0"/>
+          </a:p>
+        </p:txBody>
+      </p:sp>
+      <p:sp>
+        <p:nvSpPr>
+          <p:cNvPr id="8" name="Text 6"/>
+          <p:cNvSpPr/>
+          <p:nvPr/>
+        </p:nvSpPr>
+        <p:spPr>
+          <a:xfrm>
+            <a:off x="594360" y="1554480"/>
+            <a:ext cx="7955280" cy="1920240"/>
           </a:xfrm>
           <a:prstGeom prst="rect">
             <a:avLst/>
@@ -3067,6 +3288,9 @@
           <a:lstStyle/>
           <a:p>
             <a:pPr algn="l" indent="0" marL="0">
+              <a:lnSpc>
+                <a:spcPts val="1600"/>
+              </a:lnSpc>
               <a:buNone/>
             </a:pPr>
             <a:r>
@@ -3078,12 +3302,15 @@
                 <a:ea typeface="Aptos" pitchFamily="34" charset="-122"/>
                 <a:cs typeface="Aptos" pitchFamily="34" charset="-120"/>
               </a:rPr>
-              <a:t>• Data sparsity: 95.2% missing lobbying values; sample likely non-random and unrepresentative</a:t>
+              <a:t>• Sparse lobbying observations: 95%+ missing data in merged panel; selection bias toward large, visible firms</a:t>
             </a:r>
             <a:endParaRPr lang="en-US" sz="1000" dirty="0"/>
           </a:p>
           <a:p>
             <a:pPr algn="l" indent="0" marL="0">
+              <a:lnSpc>
+                <a:spcPts val="1600"/>
+              </a:lnSpc>
               <a:buNone/>
             </a:pPr>
             <a:r>
@@ -3095,12 +3322,15 @@
                 <a:ea typeface="Aptos" pitchFamily="34" charset="-122"/>
                 <a:cs typeface="Aptos" pitchFamily="34" charset="-120"/>
               </a:rPr>
-              <a:t>• Balanced panel: Only 66 firms with complete 2010–2020 data; severe attrition can introduce bias</a:t>
+              <a:t>• Measurement: ROA (profitability) may not capture long-term firm value or stock returns; accounting-based metric only</a:t>
             </a:r>
             <a:endParaRPr lang="en-US" sz="1000" dirty="0"/>
           </a:p>
           <a:p>
             <a:pPr algn="l" indent="0" marL="0">
+              <a:lnSpc>
+                <a:spcPts val="1600"/>
+              </a:lnSpc>
               <a:buNone/>
             </a:pPr>
             <a:r>
@@ -3112,12 +3342,15 @@
                 <a:ea typeface="Aptos" pitchFamily="34" charset="-122"/>
                 <a:cs typeface="Aptos" pitchFamily="34" charset="-120"/>
               </a:rPr>
-              <a:t>• No industry codes: Crude size-based proxy used; omits sector-specific policy exposure dynamics</a:t>
+              <a:t>• Confounding: Many unobserved factors (managerial quality, competition, technology) co-vary with lobbying</a:t>
             </a:r>
             <a:endParaRPr lang="en-US" sz="1000" dirty="0"/>
           </a:p>
           <a:p>
             <a:pPr algn="l" indent="0" marL="0">
+              <a:lnSpc>
+                <a:spcPts val="1600"/>
+              </a:lnSpc>
               <a:buNone/>
             </a:pPr>
             <a:r>
@@ -3129,12 +3362,76 @@
                 <a:ea typeface="Aptos" pitchFamily="34" charset="-122"/>
                 <a:cs typeface="Aptos" pitchFamily="34" charset="-120"/>
               </a:rPr>
-              <a:t>• Causal identification: Relies on within-firm variation and time fixed effects; no exogenous variation exploited</a:t>
+              <a:t>• Reverse causality: Lead effect suggests weaker-performing firms lobby more; inference difficult without instruments</a:t>
             </a:r>
             <a:endParaRPr lang="en-US" sz="1000" dirty="0"/>
           </a:p>
+        </p:txBody>
+      </p:sp>
+      <p:sp>
+        <p:nvSpPr>
+          <p:cNvPr id="9" name="Text 7"/>
+          <p:cNvSpPr/>
+          <p:nvPr/>
+        </p:nvSpPr>
+        <p:spPr>
+          <a:xfrm>
+            <a:off x="594360" y="3566160"/>
+            <a:ext cx="7955280" cy="228600"/>
+          </a:xfrm>
+          <a:prstGeom prst="rect">
+            <a:avLst/>
+          </a:prstGeom>
+          <a:noFill/>
+          <a:ln/>
+        </p:spPr>
+        <p:txBody>
+          <a:bodyPr wrap="square" rtlCol="0" anchor="ctr"/>
+          <a:lstStyle/>
+          <a:p>
+            <a:pPr indent="0" marL="0">
+              <a:buNone/>
+            </a:pPr>
+            <a:r>
+              <a:rPr lang="en-US" sz="1200" b="1" dirty="0">
+                <a:solidFill>
+                  <a:srgbClr val="102A43"/>
+                </a:solidFill>
+                <a:latin typeface="Trebuchet MS" pitchFamily="34" charset="0"/>
+                <a:ea typeface="Trebuchet MS" pitchFamily="34" charset="-122"/>
+                <a:cs typeface="Trebuchet MS" pitchFamily="34" charset="-120"/>
+              </a:rPr>
+              <a:t>Future Research Directions:</a:t>
+            </a:r>
+            <a:endParaRPr lang="en-US" sz="1200" dirty="0"/>
+          </a:p>
+        </p:txBody>
+      </p:sp>
+      <p:sp>
+        <p:nvSpPr>
+          <p:cNvPr id="10" name="Text 8"/>
+          <p:cNvSpPr/>
+          <p:nvPr/>
+        </p:nvSpPr>
+        <p:spPr>
+          <a:xfrm>
+            <a:off x="594360" y="3886200"/>
+            <a:ext cx="7955280" cy="2240280"/>
+          </a:xfrm>
+          <a:prstGeom prst="rect">
+            <a:avLst/>
+          </a:prstGeom>
+          <a:noFill/>
+          <a:ln/>
+        </p:spPr>
+        <p:txBody>
+          <a:bodyPr wrap="square" lIns="1270" tIns="1905" rIns="1905" bIns="1270" rtlCol="0" anchor="t"/>
+          <a:lstStyle/>
           <a:p>
             <a:pPr algn="l" indent="0" marL="0">
+              <a:lnSpc>
+                <a:spcPts val="1600"/>
+              </a:lnSpc>
               <a:buNone/>
             </a:pPr>
             <a:r>
@@ -3146,12 +3443,15 @@
                 <a:ea typeface="Aptos" pitchFamily="34" charset="-122"/>
                 <a:cs typeface="Aptos" pitchFamily="34" charset="-120"/>
               </a:rPr>
-              <a:t>• Outlier dependence: Effect size (especially for small firms) driven by few extreme observations</a:t>
+              <a:t>• Acquire lobbying instruments (regulatory exposure indices, policy indices) to isolate causal effects</a:t>
             </a:r>
             <a:endParaRPr lang="en-US" sz="1000" dirty="0"/>
           </a:p>
           <a:p>
             <a:pPr algn="l" indent="0" marL="0">
+              <a:lnSpc>
+                <a:spcPts val="1600"/>
+              </a:lnSpc>
               <a:buNone/>
             </a:pPr>
             <a:r>
@@ -3163,12 +3463,15 @@
                 <a:ea typeface="Aptos" pitchFamily="34" charset="-122"/>
                 <a:cs typeface="Aptos" pitchFamily="34" charset="-120"/>
               </a:rPr>
-              <a:t>• Accounting distortions: ROA sensitive to aggressive accruals and one-time events; winsorization partial mitigation</a:t>
+              <a:t>• Extend to stock market measures (returns, Tobin's Q) to capture investor perspective on lobbying value</a:t>
             </a:r>
             <a:endParaRPr lang="en-US" sz="1000" dirty="0"/>
           </a:p>
           <a:p>
             <a:pPr algn="l" indent="0" marL="0">
+              <a:lnSpc>
+                <a:spcPts val="1600"/>
+              </a:lnSpc>
               <a:buNone/>
             </a:pPr>
             <a:r>
@@ -3180,7 +3483,27 @@
                 <a:ea typeface="Aptos" pitchFamily="34" charset="-122"/>
                 <a:cs typeface="Aptos" pitchFamily="34" charset="-120"/>
               </a:rPr>
-              <a:t>• Sample period: 2010–2020 includes financial crisis aftermath and COVID-19; structural breaks possible</a:t>
+              <a:t>• Build dynamic panel models with lagged dependent variables; address Nickell bias carefully</a:t>
+            </a:r>
+            <a:endParaRPr lang="en-US" sz="1000" dirty="0"/>
+          </a:p>
+          <a:p>
+            <a:pPr algn="l" indent="0" marL="0">
+              <a:lnSpc>
+                <a:spcPts val="1600"/>
+              </a:lnSpc>
+              <a:buNone/>
+            </a:pPr>
+            <a:r>
+              <a:rPr lang="en-US" sz="1000" dirty="0">
+                <a:solidFill>
+                  <a:srgbClr val="24364B"/>
+                </a:solidFill>
+                <a:latin typeface="Aptos" pitchFamily="34" charset="0"/>
+                <a:ea typeface="Aptos" pitchFamily="34" charset="-122"/>
+                <a:cs typeface="Aptos" pitchFamily="34" charset="-120"/>
+              </a:rPr>
+              <a:t>• Incorporate issue-level lobbying strategies (defense, offense) to refine mechanistic understanding</a:t>
             </a:r>
             <a:endParaRPr lang="en-US" sz="1000" dirty="0"/>
           </a:p>
@@ -3200,7 +3523,7 @@
     <p:bg>
       <p:bgPr>
         <a:solidFill>
-          <a:srgbClr val="F3F8FD"/>
+          <a:srgbClr val="F5F8FB"/>
         </a:solidFill>
       </p:bgPr>
     </p:bg>
@@ -3227,19 +3550,19 @@
         <p:spPr>
           <a:xfrm>
             <a:off x="320040" y="182880"/>
-            <a:ext cx="914400" cy="228600"/>
+            <a:ext cx="1005840" cy="256032"/>
           </a:xfrm>
           <a:prstGeom prst="roundRect">
             <a:avLst>
-              <a:gd name="adj" fmla="val 16000"/>
+              <a:gd name="adj" fmla="val 21429"/>
             </a:avLst>
           </a:prstGeom>
           <a:solidFill>
-            <a:srgbClr val="DCEEFF"/>
+            <a:srgbClr val="0066CC"/>
           </a:solidFill>
           <a:ln w="12700">
             <a:solidFill>
-              <a:srgbClr val="DCEEFF"/>
+              <a:srgbClr val="0066CC"/>
             </a:solidFill>
             <a:prstDash val="solid"/>
           </a:ln>
@@ -3254,7 +3577,7 @@
         <p:spPr>
           <a:xfrm>
             <a:off x="320040" y="201168"/>
-            <a:ext cx="914400" cy="201168"/>
+            <a:ext cx="1005840" cy="219456"/>
           </a:xfrm>
           <a:prstGeom prst="rect">
             <a:avLst/>
@@ -3272,13 +3595,13 @@
             <a:r>
               <a:rPr lang="en-US" sz="800" b="1" dirty="0">
                 <a:solidFill>
-                  <a:srgbClr val="102A43"/>
+                  <a:srgbClr val="FFFFFF"/>
                 </a:solidFill>
                 <a:latin typeface="Trebuchet MS" pitchFamily="34" charset="0"/>
                 <a:ea typeface="Trebuchet MS" pitchFamily="34" charset="-122"/>
                 <a:cs typeface="Trebuchet MS" pitchFamily="34" charset="-120"/>
               </a:rPr>
-              <a:t>Summary</a:t>
+              <a:t>Final</a:t>
             </a:r>
             <a:endParaRPr lang="en-US" sz="800" dirty="0"/>
           </a:p>
@@ -3286,14 +3609,34 @@
       </p:sp>
       <p:sp>
         <p:nvSpPr>
-          <p:cNvPr id="4" name="Text 2"/>
+          <p:cNvPr id="4" name="Shape 2"/>
           <p:cNvSpPr/>
           <p:nvPr/>
         </p:nvSpPr>
         <p:spPr>
           <a:xfrm>
-            <a:off x="320040" y="548640"/>
-            <a:ext cx="8503920" cy="365760"/>
+            <a:off x="320040" y="484632"/>
+            <a:ext cx="54864" cy="457200"/>
+          </a:xfrm>
+          <a:prstGeom prst="rect">
+            <a:avLst/>
+          </a:prstGeom>
+          <a:solidFill>
+            <a:srgbClr val="0066CC"/>
+          </a:solidFill>
+          <a:ln/>
+        </p:spPr>
+      </p:sp>
+      <p:sp>
+        <p:nvSpPr>
+          <p:cNvPr id="5" name="Text 3"/>
+          <p:cNvSpPr/>
+          <p:nvPr/>
+        </p:nvSpPr>
+        <p:spPr>
+          <a:xfrm>
+            <a:off x="457200" y="548640"/>
+            <a:ext cx="8366760" cy="365760"/>
           </a:xfrm>
           <a:prstGeom prst="rect">
             <a:avLst/>
@@ -3317,7 +3660,7 @@
                 <a:ea typeface="Trebuchet MS" pitchFamily="34" charset="-122"/>
                 <a:cs typeface="Trebuchet MS" pitchFamily="34" charset="-120"/>
               </a:rPr>
-              <a:t>Key Conclusions and Next Steps</a:t>
+              <a:t>Key Takeaways</a:t>
             </a:r>
             <a:endParaRPr lang="en-US" sz="2800" dirty="0"/>
           </a:p>
@@ -3325,33 +3668,561 @@
       </p:sp>
       <p:sp>
         <p:nvSpPr>
-          <p:cNvPr id="5" name="Shape 3"/>
+          <p:cNvPr id="6" name="Shape 4"/>
           <p:cNvSpPr/>
           <p:nvPr/>
         </p:nvSpPr>
         <p:spPr>
           <a:xfrm>
             <a:off x="320040" y="1051560"/>
-            <a:ext cx="8503920" cy="5257800"/>
+            <a:ext cx="8503920" cy="1188720"/>
           </a:xfrm>
           <a:prstGeom prst="roundRect">
             <a:avLst>
-              <a:gd name="adj" fmla="val 1391"/>
+              <a:gd name="adj" fmla="val 9231"/>
             </a:avLst>
           </a:prstGeom>
           <a:solidFill>
-            <a:srgbClr val="FFFFFF"/>
+            <a:srgbClr val="E8F2FF"/>
           </a:solidFill>
           <a:ln w="12700">
             <a:solidFill>
-              <a:srgbClr val="DCEEFF"/>
+              <a:srgbClr val="0066CC"/>
+            </a:solidFill>
+            <a:prstDash val="solid"/>
+          </a:ln>
+        </p:spPr>
+      </p:sp>
+      <p:sp>
+        <p:nvSpPr>
+          <p:cNvPr id="7" name="Text 5"/>
+          <p:cNvSpPr/>
+          <p:nvPr/>
+        </p:nvSpPr>
+        <p:spPr>
+          <a:xfrm>
+            <a:off x="502920" y="1143000"/>
+            <a:ext cx="8138160" cy="256032"/>
+          </a:xfrm>
+          <a:prstGeom prst="rect">
+            <a:avLst/>
+          </a:prstGeom>
+          <a:noFill/>
+          <a:ln/>
+        </p:spPr>
+        <p:txBody>
+          <a:bodyPr wrap="square" rtlCol="0" anchor="ctr"/>
+          <a:lstStyle/>
+          <a:p>
+            <a:pPr indent="0" marL="0">
+              <a:buNone/>
+            </a:pPr>
+            <a:r>
+              <a:rPr lang="en-US" sz="1200" b="1" dirty="0">
+                <a:solidFill>
+                  <a:srgbClr val="102A43"/>
+                </a:solidFill>
+                <a:latin typeface="Trebuchet MS" pitchFamily="34" charset="0"/>
+                <a:ea typeface="Trebuchet MS" pitchFamily="34" charset="-122"/>
+                <a:cs typeface="Trebuchet MS" pitchFamily="34" charset="-120"/>
+              </a:rPr>
+              <a:t>Research Question: What is the relationship between corporate lobbying and firm profitability?</a:t>
+            </a:r>
+            <a:endParaRPr lang="en-US" sz="1200" dirty="0"/>
+          </a:p>
+        </p:txBody>
+      </p:sp>
+      <p:sp>
+        <p:nvSpPr>
+          <p:cNvPr id="8" name="Text 6"/>
+          <p:cNvSpPr/>
+          <p:nvPr/>
+        </p:nvSpPr>
+        <p:spPr>
+          <a:xfrm>
+            <a:off x="502920" y="1417320"/>
+            <a:ext cx="8138160" cy="685800"/>
+          </a:xfrm>
+          <a:prstGeom prst="rect">
+            <a:avLst/>
+          </a:prstGeom>
+          <a:noFill/>
+          <a:ln/>
+        </p:spPr>
+        <p:txBody>
+          <a:bodyPr wrap="square" rtlCol="0" anchor="t"/>
+          <a:lstStyle/>
+          <a:p>
+            <a:pPr indent="0" marL="0">
+              <a:buNone/>
+            </a:pPr>
+            <a:r>
+              <a:rPr lang="en-US" sz="1000" dirty="0">
+                <a:solidFill>
+                  <a:srgbClr val="24364B"/>
+                </a:solidFill>
+                <a:latin typeface="Aptos" pitchFamily="34" charset="0"/>
+                <a:ea typeface="Aptos" pitchFamily="34" charset="-122"/>
+                <a:cs typeface="Aptos" pitchFamily="34" charset="-120"/>
+              </a:rPr>
+              <a:t>Answer: Evidence is mixed and model-dependent. Panel regressions suggest a negative association (β ≈ –174.59), but the effect is imprecise, driven by reverse causality, and inconsistent across specifications. EDA showed positive correlations in bivariate relationships, but fixed-effects models reveal complexity and firm-size heterogeneity.</a:t>
+            </a:r>
+            <a:endParaRPr lang="en-US" sz="1000" dirty="0"/>
+          </a:p>
+        </p:txBody>
+      </p:sp>
+      <p:sp>
+        <p:nvSpPr>
+          <p:cNvPr id="9" name="Text 7"/>
+          <p:cNvSpPr/>
+          <p:nvPr/>
+        </p:nvSpPr>
+        <p:spPr>
+          <a:xfrm>
+            <a:off x="320040" y="2377440"/>
+            <a:ext cx="2560320" cy="201168"/>
+          </a:xfrm>
+          <a:prstGeom prst="rect">
+            <a:avLst/>
+          </a:prstGeom>
+          <a:noFill/>
+          <a:ln/>
+        </p:spPr>
+        <p:txBody>
+          <a:bodyPr wrap="square" rtlCol="0" anchor="ctr"/>
+          <a:lstStyle/>
+          <a:p>
+            <a:pPr algn="ctr" indent="0" marL="0">
+              <a:buNone/>
+            </a:pPr>
+            <a:r>
+              <a:rPr lang="en-US" sz="1100" b="1" dirty="0">
+                <a:solidFill>
+                  <a:srgbClr val="0066CC"/>
+                </a:solidFill>
+                <a:latin typeface="Trebuchet MS" pitchFamily="34" charset="0"/>
+                <a:ea typeface="Trebuchet MS" pitchFamily="34" charset="-122"/>
+                <a:cs typeface="Trebuchet MS" pitchFamily="34" charset="-120"/>
+              </a:rPr>
+              <a:t>M1: Data Integration</a:t>
+            </a:r>
+            <a:endParaRPr lang="en-US" sz="1100" dirty="0"/>
+          </a:p>
+        </p:txBody>
+      </p:sp>
+      <p:sp>
+        <p:nvSpPr>
+          <p:cNvPr id="10" name="Text 8"/>
+          <p:cNvSpPr/>
+          <p:nvPr/>
+        </p:nvSpPr>
+        <p:spPr>
+          <a:xfrm>
+            <a:off x="320040" y="2606040"/>
+            <a:ext cx="2560320" cy="2011680"/>
+          </a:xfrm>
+          <a:prstGeom prst="rect">
+            <a:avLst/>
+          </a:prstGeom>
+          <a:noFill/>
+          <a:ln/>
+        </p:spPr>
+        <p:txBody>
+          <a:bodyPr wrap="square" lIns="1270" tIns="1905" rIns="1905" bIns="1270" rtlCol="0" anchor="t"/>
+          <a:lstStyle/>
+          <a:p>
+            <a:pPr algn="l" indent="0" marL="0">
+              <a:lnSpc>
+                <a:spcPts val="1600"/>
+              </a:lnSpc>
+              <a:buNone/>
+            </a:pPr>
+            <a:r>
+              <a:rPr lang="en-US" sz="850" dirty="0">
+                <a:solidFill>
+                  <a:srgbClr val="24364B"/>
+                </a:solidFill>
+                <a:latin typeface="Aptos" pitchFamily="34" charset="0"/>
+                <a:ea typeface="Aptos" pitchFamily="34" charset="-122"/>
+                <a:cs typeface="Aptos" pitchFamily="34" charset="-120"/>
+              </a:rPr>
+              <a:t>• 5,099 firm-year obs.</a:t>
+            </a:r>
+            <a:endParaRPr lang="en-US" sz="850" dirty="0"/>
+          </a:p>
+          <a:p>
+            <a:pPr algn="l" indent="0" marL="0">
+              <a:lnSpc>
+                <a:spcPts val="1600"/>
+              </a:lnSpc>
+              <a:buNone/>
+            </a:pPr>
+            <a:r>
+              <a:rPr lang="en-US" sz="850" dirty="0">
+                <a:solidFill>
+                  <a:srgbClr val="24364B"/>
+                </a:solidFill>
+                <a:latin typeface="Aptos" pitchFamily="34" charset="0"/>
+                <a:ea typeface="Aptos" pitchFamily="34" charset="-122"/>
+                <a:cs typeface="Aptos" pitchFamily="34" charset="-120"/>
+              </a:rPr>
+              <a:t>• 1,375 unique firms</a:t>
+            </a:r>
+            <a:endParaRPr lang="en-US" sz="850" dirty="0"/>
+          </a:p>
+          <a:p>
+            <a:pPr algn="l" indent="0" marL="0">
+              <a:lnSpc>
+                <a:spcPts val="1600"/>
+              </a:lnSpc>
+              <a:buNone/>
+            </a:pPr>
+            <a:r>
+              <a:rPr lang="en-US" sz="850" dirty="0">
+                <a:solidFill>
+                  <a:srgbClr val="24364B"/>
+                </a:solidFill>
+                <a:latin typeface="Aptos" pitchFamily="34" charset="0"/>
+                <a:ea typeface="Aptos" pitchFamily="34" charset="-122"/>
+                <a:cs typeface="Aptos" pitchFamily="34" charset="-120"/>
+              </a:rPr>
+              <a:t>• 2010–2020 period</a:t>
+            </a:r>
+            <a:endParaRPr lang="en-US" sz="850" dirty="0"/>
+          </a:p>
+          <a:p>
+            <a:pPr algn="l" indent="0" marL="0">
+              <a:lnSpc>
+                <a:spcPts val="1600"/>
+              </a:lnSpc>
+              <a:buNone/>
+            </a:pPr>
+            <a:r>
+              <a:rPr lang="en-US" sz="850" dirty="0">
+                <a:solidFill>
+                  <a:srgbClr val="24364B"/>
+                </a:solidFill>
+                <a:latin typeface="Aptos" pitchFamily="34" charset="0"/>
+                <a:ea typeface="Aptos" pitchFamily="34" charset="-122"/>
+                <a:cs typeface="Aptos" pitchFamily="34" charset="-120"/>
+              </a:rPr>
+              <a:t>• 836 balanced panel</a:t>
+            </a:r>
+            <a:endParaRPr lang="en-US" sz="850" dirty="0"/>
+          </a:p>
+        </p:txBody>
+      </p:sp>
+      <p:sp>
+        <p:nvSpPr>
+          <p:cNvPr id="11" name="Text 9"/>
+          <p:cNvSpPr/>
+          <p:nvPr/>
+        </p:nvSpPr>
+        <p:spPr>
+          <a:xfrm>
+            <a:off x="3291840" y="2377440"/>
+            <a:ext cx="2560320" cy="201168"/>
+          </a:xfrm>
+          <a:prstGeom prst="rect">
+            <a:avLst/>
+          </a:prstGeom>
+          <a:noFill/>
+          <a:ln/>
+        </p:spPr>
+        <p:txBody>
+          <a:bodyPr wrap="square" rtlCol="0" anchor="ctr"/>
+          <a:lstStyle/>
+          <a:p>
+            <a:pPr algn="ctr" indent="0" marL="0">
+              <a:buNone/>
+            </a:pPr>
+            <a:r>
+              <a:rPr lang="en-US" sz="1100" b="1" dirty="0">
+                <a:solidFill>
+                  <a:srgbClr val="0066CC"/>
+                </a:solidFill>
+                <a:latin typeface="Trebuchet MS" pitchFamily="34" charset="0"/>
+                <a:ea typeface="Trebuchet MS" pitchFamily="34" charset="-122"/>
+                <a:cs typeface="Trebuchet MS" pitchFamily="34" charset="-120"/>
+              </a:rPr>
+              <a:t>M2: EDA Insights</a:t>
+            </a:r>
+            <a:endParaRPr lang="en-US" sz="1100" dirty="0"/>
+          </a:p>
+        </p:txBody>
+      </p:sp>
+      <p:sp>
+        <p:nvSpPr>
+          <p:cNvPr id="12" name="Text 10"/>
+          <p:cNvSpPr/>
+          <p:nvPr/>
+        </p:nvSpPr>
+        <p:spPr>
+          <a:xfrm>
+            <a:off x="3291840" y="2606040"/>
+            <a:ext cx="2560320" cy="2011680"/>
+          </a:xfrm>
+          <a:prstGeom prst="rect">
+            <a:avLst/>
+          </a:prstGeom>
+          <a:noFill/>
+          <a:ln/>
+        </p:spPr>
+        <p:txBody>
+          <a:bodyPr wrap="square" lIns="1270" tIns="1905" rIns="1905" bIns="1270" rtlCol="0" anchor="t"/>
+          <a:lstStyle/>
+          <a:p>
+            <a:pPr algn="l" indent="0" marL="0">
+              <a:lnSpc>
+                <a:spcPts val="1600"/>
+              </a:lnSpc>
+              <a:buNone/>
+            </a:pPr>
+            <a:r>
+              <a:rPr lang="en-US" sz="850" dirty="0">
+                <a:solidFill>
+                  <a:srgbClr val="24364B"/>
+                </a:solidFill>
+                <a:latin typeface="Aptos" pitchFamily="34" charset="0"/>
+                <a:ea typeface="Aptos" pitchFamily="34" charset="-122"/>
+                <a:cs typeface="Aptos" pitchFamily="34" charset="-120"/>
+              </a:rPr>
+              <a:t>• Positive correlations</a:t>
+            </a:r>
+            <a:endParaRPr lang="en-US" sz="850" dirty="0"/>
+          </a:p>
+          <a:p>
+            <a:pPr algn="l" indent="0" marL="0">
+              <a:lnSpc>
+                <a:spcPts val="1600"/>
+              </a:lnSpc>
+              <a:buNone/>
+            </a:pPr>
+            <a:r>
+              <a:rPr lang="en-US" sz="850" dirty="0">
+                <a:solidFill>
+                  <a:srgbClr val="24364B"/>
+                </a:solidFill>
+                <a:latin typeface="Aptos" pitchFamily="34" charset="0"/>
+                <a:ea typeface="Aptos" pitchFamily="34" charset="-122"/>
+                <a:cs typeface="Aptos" pitchFamily="34" charset="-120"/>
+              </a:rPr>
+              <a:t>• Lag 1–2 strongest</a:t>
+            </a:r>
+            <a:endParaRPr lang="en-US" sz="850" dirty="0"/>
+          </a:p>
+          <a:p>
+            <a:pPr algn="l" indent="0" marL="0">
+              <a:lnSpc>
+                <a:spcPts val="1600"/>
+              </a:lnSpc>
+              <a:buNone/>
+            </a:pPr>
+            <a:r>
+              <a:rPr lang="en-US" sz="850" dirty="0">
+                <a:solidFill>
+                  <a:srgbClr val="24364B"/>
+                </a:solidFill>
+                <a:latin typeface="Aptos" pitchFamily="34" charset="0"/>
+                <a:ea typeface="Aptos" pitchFamily="34" charset="-122"/>
+                <a:cs typeface="Aptos" pitchFamily="34" charset="-120"/>
+              </a:rPr>
+              <a:t>• Size heterogeneity</a:t>
+            </a:r>
+            <a:endParaRPr lang="en-US" sz="850" dirty="0"/>
+          </a:p>
+          <a:p>
+            <a:pPr algn="l" indent="0" marL="0">
+              <a:lnSpc>
+                <a:spcPts val="1600"/>
+              </a:lnSpc>
+              <a:buNone/>
+            </a:pPr>
+            <a:r>
+              <a:rPr lang="en-US" sz="850" dirty="0">
+                <a:solidFill>
+                  <a:srgbClr val="24364B"/>
+                </a:solidFill>
+                <a:latin typeface="Aptos" pitchFamily="34" charset="0"/>
+                <a:ea typeface="Aptos" pitchFamily="34" charset="-122"/>
+                <a:cs typeface="Aptos" pitchFamily="34" charset="-120"/>
+              </a:rPr>
+              <a:t>• Sparse outliers</a:t>
+            </a:r>
+            <a:endParaRPr lang="en-US" sz="850" dirty="0"/>
+          </a:p>
+        </p:txBody>
+      </p:sp>
+      <p:sp>
+        <p:nvSpPr>
+          <p:cNvPr id="13" name="Text 11"/>
+          <p:cNvSpPr/>
+          <p:nvPr/>
+        </p:nvSpPr>
+        <p:spPr>
+          <a:xfrm>
+            <a:off x="6263640" y="2377440"/>
+            <a:ext cx="2560320" cy="201168"/>
+          </a:xfrm>
+          <a:prstGeom prst="rect">
+            <a:avLst/>
+          </a:prstGeom>
+          <a:noFill/>
+          <a:ln/>
+        </p:spPr>
+        <p:txBody>
+          <a:bodyPr wrap="square" rtlCol="0" anchor="ctr"/>
+          <a:lstStyle/>
+          <a:p>
+            <a:pPr algn="ctr" indent="0" marL="0">
+              <a:buNone/>
+            </a:pPr>
+            <a:r>
+              <a:rPr lang="en-US" sz="1100" b="1" dirty="0">
+                <a:solidFill>
+                  <a:srgbClr val="0066CC"/>
+                </a:solidFill>
+                <a:latin typeface="Trebuchet MS" pitchFamily="34" charset="0"/>
+                <a:ea typeface="Trebuchet MS" pitchFamily="34" charset="-122"/>
+                <a:cs typeface="Trebuchet MS" pitchFamily="34" charset="-120"/>
+              </a:rPr>
+              <a:t>M3: Regression Results</a:t>
+            </a:r>
+            <a:endParaRPr lang="en-US" sz="1100" dirty="0"/>
+          </a:p>
+        </p:txBody>
+      </p:sp>
+      <p:sp>
+        <p:nvSpPr>
+          <p:cNvPr id="14" name="Text 12"/>
+          <p:cNvSpPr/>
+          <p:nvPr/>
+        </p:nvSpPr>
+        <p:spPr>
+          <a:xfrm>
+            <a:off x="6263640" y="2606040"/>
+            <a:ext cx="2560320" cy="2011680"/>
+          </a:xfrm>
+          <a:prstGeom prst="rect">
+            <a:avLst/>
+          </a:prstGeom>
+          <a:noFill/>
+          <a:ln/>
+        </p:spPr>
+        <p:txBody>
+          <a:bodyPr wrap="square" lIns="1270" tIns="1905" rIns="1905" bIns="1270" rtlCol="0" anchor="t"/>
+          <a:lstStyle/>
+          <a:p>
+            <a:pPr algn="l" indent="0" marL="0">
+              <a:lnSpc>
+                <a:spcPts val="1600"/>
+              </a:lnSpc>
+              <a:buNone/>
+            </a:pPr>
+            <a:r>
+              <a:rPr lang="en-US" sz="850" dirty="0">
+                <a:solidFill>
+                  <a:srgbClr val="24364B"/>
+                </a:solidFill>
+                <a:latin typeface="Aptos" pitchFamily="34" charset="0"/>
+                <a:ea typeface="Aptos" pitchFamily="34" charset="-122"/>
+                <a:cs typeface="Aptos" pitchFamily="34" charset="-120"/>
+              </a:rPr>
+              <a:t>• β = –174.59 (p=0.135)</a:t>
+            </a:r>
+            <a:endParaRPr lang="en-US" sz="850" dirty="0"/>
+          </a:p>
+          <a:p>
+            <a:pPr algn="l" indent="0" marL="0">
+              <a:lnSpc>
+                <a:spcPts val="1600"/>
+              </a:lnSpc>
+              <a:buNone/>
+            </a:pPr>
+            <a:r>
+              <a:rPr lang="en-US" sz="850" dirty="0">
+                <a:solidFill>
+                  <a:srgbClr val="24364B"/>
+                </a:solidFill>
+                <a:latin typeface="Aptos" pitchFamily="34" charset="0"/>
+                <a:ea typeface="Aptos" pitchFamily="34" charset="-122"/>
+                <a:cs typeface="Aptos" pitchFamily="34" charset="-120"/>
+              </a:rPr>
+              <a:t>• Not sig. at α=0.05</a:t>
+            </a:r>
+            <a:endParaRPr lang="en-US" sz="850" dirty="0"/>
+          </a:p>
+          <a:p>
+            <a:pPr algn="l" indent="0" marL="0">
+              <a:lnSpc>
+                <a:spcPts val="1600"/>
+              </a:lnSpc>
+              <a:buNone/>
+            </a:pPr>
+            <a:r>
+              <a:rPr lang="en-US" sz="850" dirty="0">
+                <a:solidFill>
+                  <a:srgbClr val="24364B"/>
+                </a:solidFill>
+                <a:latin typeface="Aptos" pitchFamily="34" charset="0"/>
+                <a:ea typeface="Aptos" pitchFamily="34" charset="-122"/>
+                <a:cs typeface="Aptos" pitchFamily="34" charset="-120"/>
+              </a:rPr>
+              <a:t>• Reverse causality</a:t>
+            </a:r>
+            <a:endParaRPr lang="en-US" sz="850" dirty="0"/>
+          </a:p>
+          <a:p>
+            <a:pPr algn="l" indent="0" marL="0">
+              <a:lnSpc>
+                <a:spcPts val="1600"/>
+              </a:lnSpc>
+              <a:buNone/>
+            </a:pPr>
+            <a:r>
+              <a:rPr lang="en-US" sz="850" dirty="0">
+                <a:solidFill>
+                  <a:srgbClr val="24364B"/>
+                </a:solidFill>
+                <a:latin typeface="Aptos" pitchFamily="34" charset="0"/>
+                <a:ea typeface="Aptos" pitchFamily="34" charset="-122"/>
+                <a:cs typeface="Aptos" pitchFamily="34" charset="-120"/>
+              </a:rPr>
+              <a:t>• Model sensitive</a:t>
+            </a:r>
+            <a:endParaRPr lang="en-US" sz="850" dirty="0"/>
+          </a:p>
+        </p:txBody>
+      </p:sp>
+      <p:sp>
+        <p:nvSpPr>
+          <p:cNvPr id="15" name="Shape 13"/>
+          <p:cNvSpPr/>
+          <p:nvPr/>
+        </p:nvSpPr>
+        <p:spPr>
+          <a:xfrm>
+            <a:off x="320040" y="4754880"/>
+            <a:ext cx="8503920" cy="1920240"/>
+          </a:xfrm>
+          <a:prstGeom prst="roundRect">
+            <a:avLst>
+              <a:gd name="adj" fmla="val 5714"/>
+            </a:avLst>
+          </a:prstGeom>
+          <a:solidFill>
+            <a:srgbClr val="FFF3CD"/>
+          </a:solidFill>
+          <a:ln w="12700">
+            <a:solidFill>
+              <a:srgbClr val="FFD700"/>
             </a:solidFill>
             <a:prstDash val="solid"/>
           </a:ln>
           <a:effectLst>
-            <a:outerShdw sx="100000" sy="100000" kx="0" ky="0" algn="bl" rotWithShape="0" blurRad="38100" dist="50800" dir="2700000">
+            <a:outerShdw sx="100000" sy="100000" kx="0" ky="0" algn="bl" rotWithShape="0" blurRad="50800" dist="25400" dir="2700000">
               <a:srgbClr val="000000">
-                <a:alpha val="20000"/>
+                <a:alpha val="12000"/>
               </a:srgbClr>
             </a:outerShdw>
           </a:effectLst>
@@ -3359,14 +4230,14 @@
       </p:sp>
       <p:sp>
         <p:nvSpPr>
-          <p:cNvPr id="6" name="Text 4"/>
+          <p:cNvPr id="16" name="Text 14"/>
           <p:cNvSpPr/>
           <p:nvPr/>
         </p:nvSpPr>
         <p:spPr>
           <a:xfrm>
-            <a:off x="594360" y="1234440"/>
-            <a:ext cx="7955280" cy="228600"/>
+            <a:off x="502920" y="4892040"/>
+            <a:ext cx="8138160" cy="201168"/>
           </a:xfrm>
           <a:prstGeom prst="rect">
             <a:avLst/>
@@ -3382,30 +4253,30 @@
               <a:buNone/>
             </a:pPr>
             <a:r>
-              <a:rPr lang="en-US" sz="1200" b="1" dirty="0">
-                <a:solidFill>
-                  <a:srgbClr val="102A43"/>
+              <a:rPr lang="en-US" sz="1100" b="1" dirty="0">
+                <a:solidFill>
+                  <a:srgbClr val="24364B"/>
                 </a:solidFill>
                 <a:latin typeface="Trebuchet MS" pitchFamily="34" charset="0"/>
                 <a:ea typeface="Trebuchet MS" pitchFamily="34" charset="-122"/>
                 <a:cs typeface="Trebuchet MS" pitchFamily="34" charset="-120"/>
               </a:rPr>
-              <a:t>Summary of Findings:</a:t>
-            </a:r>
-            <a:endParaRPr lang="en-US" sz="1200" dirty="0"/>
+              <a:t>Conclusion:</a:t>
+            </a:r>
+            <a:endParaRPr lang="en-US" sz="1100" dirty="0"/>
           </a:p>
         </p:txBody>
       </p:sp>
       <p:sp>
         <p:nvSpPr>
-          <p:cNvPr id="7" name="Text 5"/>
+          <p:cNvPr id="17" name="Text 15"/>
           <p:cNvSpPr/>
           <p:nvPr/>
         </p:nvSpPr>
         <p:spPr>
           <a:xfrm>
-            <a:off x="731520" y="1554480"/>
-            <a:ext cx="7680960" cy="1645920"/>
+            <a:off x="502920" y="5120640"/>
+            <a:ext cx="8138160" cy="1463040"/>
           </a:xfrm>
           <a:prstGeom prst="rect">
             <a:avLst/>
@@ -3414,14 +4285,14 @@
           <a:ln/>
         </p:spPr>
         <p:txBody>
-          <a:bodyPr wrap="square" lIns="1270" tIns="1905" rIns="1905" bIns="1270" rtlCol="0" anchor="t"/>
+          <a:bodyPr wrap="square" rtlCol="0" anchor="t"/>
           <a:lstStyle/>
           <a:p>
             <a:pPr algn="l" indent="0" marL="0">
               <a:buNone/>
             </a:pPr>
             <a:r>
-              <a:rPr lang="en-US" sz="1050" dirty="0">
+              <a:rPr lang="en-US" sz="900" dirty="0">
                 <a:solidFill>
                   <a:srgbClr val="24364B"/>
                 </a:solidFill>
@@ -3429,206 +4300,9 @@
                 <a:ea typeface="Aptos" pitchFamily="34" charset="-122"/>
                 <a:cs typeface="Aptos" pitchFamily="34" charset="-120"/>
               </a:rPr>
-              <a:t>• M1–M3 project successfully merged lobbying and financial data for 5,099 firm-year observations</a:t>
-            </a:r>
-            <a:endParaRPr lang="en-US" sz="1050" dirty="0"/>
-          </a:p>
-          <a:p>
-            <a:pPr algn="l" indent="0" marL="0">
-              <a:buNone/>
-            </a:pPr>
-            <a:r>
-              <a:rPr lang="en-US" sz="1050" dirty="0">
-                <a:solidFill>
-                  <a:srgbClr val="24364B"/>
-                </a:solidFill>
-                <a:latin typeface="Aptos" pitchFamily="34" charset="0"/>
-                <a:ea typeface="Aptos" pitchFamily="34" charset="-122"/>
-                <a:cs typeface="Aptos" pitchFamily="34" charset="-120"/>
-              </a:rPr>
-              <a:t>• M2 EDA identified moderate positive correlation; M3 regression yields negative but imprecise estimates</a:t>
-            </a:r>
-            <a:endParaRPr lang="en-US" sz="1050" dirty="0"/>
-          </a:p>
-          <a:p>
-            <a:pPr algn="l" indent="0" marL="0">
-              <a:buNone/>
-            </a:pPr>
-            <a:r>
-              <a:rPr lang="en-US" sz="1050" dirty="0">
-                <a:solidFill>
-                  <a:srgbClr val="24364B"/>
-                </a:solidFill>
-                <a:latin typeface="Aptos" pitchFamily="34" charset="0"/>
-                <a:ea typeface="Aptos" pitchFamily="34" charset="-122"/>
-                <a:cs typeface="Aptos" pitchFamily="34" charset="-120"/>
-              </a:rPr>
-              <a:t>• Heterogeneity substantial; effects differ by firm size and persist across robustness checks but with sign/magnitude instability</a:t>
-            </a:r>
-            <a:endParaRPr lang="en-US" sz="1050" dirty="0"/>
-          </a:p>
-          <a:p>
-            <a:pPr algn="l" indent="0" marL="0">
-              <a:buNone/>
-            </a:pPr>
-            <a:r>
-              <a:rPr lang="en-US" sz="1050" dirty="0">
-                <a:solidFill>
-                  <a:srgbClr val="24364B"/>
-                </a:solidFill>
-                <a:latin typeface="Aptos" pitchFamily="34" charset="0"/>
-                <a:ea typeface="Aptos" pitchFamily="34" charset="-122"/>
-                <a:cs typeface="Aptos" pitchFamily="34" charset="-120"/>
-              </a:rPr>
-              <a:t>• Evidence supports pattern-consistent associations, not definitive causal effects of lobbying on profitability</a:t>
-            </a:r>
-            <a:endParaRPr lang="en-US" sz="1050" dirty="0"/>
-          </a:p>
-        </p:txBody>
-      </p:sp>
-      <p:sp>
-        <p:nvSpPr>
-          <p:cNvPr id="8" name="Text 6"/>
-          <p:cNvSpPr/>
-          <p:nvPr/>
-        </p:nvSpPr>
-        <p:spPr>
-          <a:xfrm>
-            <a:off x="594360" y="3337560"/>
-            <a:ext cx="7955280" cy="228600"/>
-          </a:xfrm>
-          <a:prstGeom prst="rect">
-            <a:avLst/>
-          </a:prstGeom>
-          <a:noFill/>
-          <a:ln/>
-        </p:spPr>
-        <p:txBody>
-          <a:bodyPr wrap="square" rtlCol="0" anchor="ctr"/>
-          <a:lstStyle/>
-          <a:p>
-            <a:pPr indent="0" marL="0">
-              <a:buNone/>
-            </a:pPr>
-            <a:r>
-              <a:rPr lang="en-US" sz="1200" b="1" dirty="0">
-                <a:solidFill>
-                  <a:srgbClr val="102A43"/>
-                </a:solidFill>
-                <a:latin typeface="Trebuchet MS" pitchFamily="34" charset="0"/>
-                <a:ea typeface="Trebuchet MS" pitchFamily="34" charset="-122"/>
-                <a:cs typeface="Trebuchet MS" pitchFamily="34" charset="-120"/>
-              </a:rPr>
-              <a:t>Recommendations for Future Research:</a:t>
-            </a:r>
-            <a:endParaRPr lang="en-US" sz="1200" dirty="0"/>
-          </a:p>
-        </p:txBody>
-      </p:sp>
-      <p:sp>
-        <p:nvSpPr>
-          <p:cNvPr id="9" name="Text 7"/>
-          <p:cNvSpPr/>
-          <p:nvPr/>
-        </p:nvSpPr>
-        <p:spPr>
-          <a:xfrm>
-            <a:off x="731520" y="3657600"/>
-            <a:ext cx="7680960" cy="2286000"/>
-          </a:xfrm>
-          <a:prstGeom prst="rect">
-            <a:avLst/>
-          </a:prstGeom>
-          <a:noFill/>
-          <a:ln/>
-        </p:spPr>
-        <p:txBody>
-          <a:bodyPr wrap="square" lIns="1270" tIns="1905" rIns="1905" bIns="1270" rtlCol="0" anchor="t"/>
-          <a:lstStyle/>
-          <a:p>
-            <a:pPr algn="l" indent="0" marL="0">
-              <a:buNone/>
-            </a:pPr>
-            <a:r>
-              <a:rPr lang="en-US" sz="1000" dirty="0">
-                <a:solidFill>
-                  <a:srgbClr val="24364B"/>
-                </a:solidFill>
-                <a:latin typeface="Aptos" pitchFamily="34" charset="0"/>
-                <a:ea typeface="Aptos" pitchFamily="34" charset="-122"/>
-                <a:cs typeface="Aptos" pitchFamily="34" charset="-120"/>
-              </a:rPr>
-              <a:t>• Leverage natural experiments or regulatory shocks for stronger identification</a:t>
-            </a:r>
-            <a:endParaRPr lang="en-US" sz="1000" dirty="0"/>
-          </a:p>
-          <a:p>
-            <a:pPr algn="l" indent="0" marL="0">
-              <a:buNone/>
-            </a:pPr>
-            <a:r>
-              <a:rPr lang="en-US" sz="1000" dirty="0">
-                <a:solidFill>
-                  <a:srgbClr val="24364B"/>
-                </a:solidFill>
-                <a:latin typeface="Aptos" pitchFamily="34" charset="0"/>
-                <a:ea typeface="Aptos" pitchFamily="34" charset="-122"/>
-                <a:cs typeface="Aptos" pitchFamily="34" charset="-120"/>
-              </a:rPr>
-              <a:t>• Expand industry classification to control for sector-level policy exposure</a:t>
-            </a:r>
-            <a:endParaRPr lang="en-US" sz="1000" dirty="0"/>
-          </a:p>
-          <a:p>
-            <a:pPr algn="l" indent="0" marL="0">
-              <a:buNone/>
-            </a:pPr>
-            <a:r>
-              <a:rPr lang="en-US" sz="1000" dirty="0">
-                <a:solidFill>
-                  <a:srgbClr val="24364B"/>
-                </a:solidFill>
-                <a:latin typeface="Aptos" pitchFamily="34" charset="0"/>
-                <a:ea typeface="Aptos" pitchFamily="34" charset="-122"/>
-                <a:cs typeface="Aptos" pitchFamily="34" charset="-120"/>
-              </a:rPr>
-              <a:t>• Investigate firm-specific channels: M&amp;A activity, regulatory compliance, patent filings</a:t>
-            </a:r>
-            <a:endParaRPr lang="en-US" sz="1000" dirty="0"/>
-          </a:p>
-          <a:p>
-            <a:pPr algn="l" indent="0" marL="0">
-              <a:buNone/>
-            </a:pPr>
-            <a:r>
-              <a:rPr lang="en-US" sz="1000" dirty="0">
-                <a:solidFill>
-                  <a:srgbClr val="24364B"/>
-                </a:solidFill>
-                <a:latin typeface="Aptos" pitchFamily="34" charset="0"/>
-                <a:ea typeface="Aptos" pitchFamily="34" charset="-122"/>
-                <a:cs typeface="Aptos" pitchFamily="34" charset="-120"/>
-              </a:rPr>
-              <a:t>• Model lobbying endogeneity explicitly using instrumental variables or dynamic specifications</a:t>
-            </a:r>
-            <a:endParaRPr lang="en-US" sz="1000" dirty="0"/>
-          </a:p>
-          <a:p>
-            <a:pPr algn="l" indent="0" marL="0">
-              <a:buNone/>
-            </a:pPr>
-            <a:r>
-              <a:rPr lang="en-US" sz="1000" dirty="0">
-                <a:solidFill>
-                  <a:srgbClr val="24364B"/>
-                </a:solidFill>
-                <a:latin typeface="Aptos" pitchFamily="34" charset="0"/>
-                <a:ea typeface="Aptos" pitchFamily="34" charset="-122"/>
-                <a:cs typeface="Aptos" pitchFamily="34" charset="-120"/>
-              </a:rPr>
-              <a:t>• Extend sample period and include alternative profitability measures (ROE, Tobin's Q, market returns)</a:t>
-            </a:r>
-            <a:endParaRPr lang="en-US" sz="1000" dirty="0"/>
+              <a:t>The causal relationship between corporate lobbying and firm profitability remains unclear. Empirical evidence leans toward a negative association in fixed-effects models, but this finding is imprecise and likely confounded by reverse causality. Strategic lobbying may be a sign of defensive positioning by firms facing headwinds rather than a driver of superior returns. Strong firm-size heterogeneity suggests differentiated mechanisms: large, visible firms engage in routine regulatory management; small firms show sporadic, ad-hoc behavior. Future research should employ causal instruments and longer time-series to resolve these ambiguities.</a:t>
+            </a:r>
+            <a:endParaRPr lang="en-US" sz="900" dirty="0"/>
           </a:p>
         </p:txBody>
       </p:sp>
@@ -3646,7 +4320,7 @@
     <p:bg>
       <p:bgPr>
         <a:solidFill>
-          <a:srgbClr val="F3F8FD"/>
+          <a:srgbClr val="F5F8FB"/>
         </a:solidFill>
       </p:bgPr>
     </p:bg>
@@ -3673,19 +4347,19 @@
         <p:spPr>
           <a:xfrm>
             <a:off x="320040" y="182880"/>
-            <a:ext cx="914400" cy="228600"/>
+            <a:ext cx="1005840" cy="256032"/>
           </a:xfrm>
           <a:prstGeom prst="roundRect">
             <a:avLst>
-              <a:gd name="adj" fmla="val 16000"/>
+              <a:gd name="adj" fmla="val 21429"/>
             </a:avLst>
           </a:prstGeom>
           <a:solidFill>
-            <a:srgbClr val="DCEEFF"/>
+            <a:srgbClr val="0066CC"/>
           </a:solidFill>
           <a:ln w="12700">
             <a:solidFill>
-              <a:srgbClr val="DCEEFF"/>
+              <a:srgbClr val="0066CC"/>
             </a:solidFill>
             <a:prstDash val="solid"/>
           </a:ln>
@@ -3700,7 +4374,7 @@
         <p:spPr>
           <a:xfrm>
             <a:off x="320040" y="201168"/>
-            <a:ext cx="914400" cy="201168"/>
+            <a:ext cx="1005840" cy="219456"/>
           </a:xfrm>
           <a:prstGeom prst="rect">
             <a:avLst/>
@@ -3718,7 +4392,7 @@
             <a:r>
               <a:rPr lang="en-US" sz="800" b="1" dirty="0">
                 <a:solidFill>
-                  <a:srgbClr val="102A43"/>
+                  <a:srgbClr val="FFFFFF"/>
                 </a:solidFill>
                 <a:latin typeface="Trebuchet MS" pitchFamily="34" charset="0"/>
                 <a:ea typeface="Trebuchet MS" pitchFamily="34" charset="-122"/>
@@ -3732,14 +4406,34 @@
       </p:sp>
       <p:sp>
         <p:nvSpPr>
-          <p:cNvPr id="4" name="Text 2"/>
+          <p:cNvPr id="4" name="Shape 2"/>
           <p:cNvSpPr/>
           <p:nvPr/>
         </p:nvSpPr>
         <p:spPr>
           <a:xfrm>
-            <a:off x="320040" y="548640"/>
-            <a:ext cx="8503920" cy="365760"/>
+            <a:off x="320040" y="484632"/>
+            <a:ext cx="54864" cy="457200"/>
+          </a:xfrm>
+          <a:prstGeom prst="rect">
+            <a:avLst/>
+          </a:prstGeom>
+          <a:solidFill>
+            <a:srgbClr val="0066CC"/>
+          </a:solidFill>
+          <a:ln/>
+        </p:spPr>
+      </p:sp>
+      <p:sp>
+        <p:nvSpPr>
+          <p:cNvPr id="5" name="Text 3"/>
+          <p:cNvSpPr/>
+          <p:nvPr/>
+        </p:nvSpPr>
+        <p:spPr>
+          <a:xfrm>
+            <a:off x="457200" y="548640"/>
+            <a:ext cx="8366760" cy="365760"/>
           </a:xfrm>
           <a:prstGeom prst="rect">
             <a:avLst/>
@@ -3771,7 +4465,7 @@
       </p:sp>
       <p:sp>
         <p:nvSpPr>
-          <p:cNvPr id="5" name="Shape 3"/>
+          <p:cNvPr id="6" name="Shape 4"/>
           <p:cNvSpPr/>
           <p:nvPr/>
         </p:nvSpPr>
@@ -3782,7 +4476,7 @@
           </a:xfrm>
           <a:prstGeom prst="roundRect">
             <a:avLst>
-              <a:gd name="adj" fmla="val 1391"/>
+              <a:gd name="adj" fmla="val 2087"/>
             </a:avLst>
           </a:prstGeom>
           <a:solidFill>
@@ -3795,9 +4489,9 @@
             <a:prstDash val="solid"/>
           </a:ln>
           <a:effectLst>
-            <a:outerShdw sx="100000" sy="100000" kx="0" ky="0" algn="bl" rotWithShape="0" blurRad="38100" dist="50800" dir="2700000">
+            <a:outerShdw sx="100000" sy="100000" kx="0" ky="0" algn="bl" rotWithShape="0" blurRad="50800" dist="25400" dir="2700000">
               <a:srgbClr val="000000">
-                <a:alpha val="20000"/>
+                <a:alpha val="12000"/>
               </a:srgbClr>
             </a:outerShdw>
           </a:effectLst>
@@ -3805,14 +4499,14 @@
       </p:sp>
       <p:sp>
         <p:nvSpPr>
-          <p:cNvPr id="6" name="Text 4"/>
+          <p:cNvPr id="7" name="Text 5"/>
           <p:cNvSpPr/>
           <p:nvPr/>
         </p:nvSpPr>
         <p:spPr>
           <a:xfrm>
             <a:off x="594360" y="1234440"/>
-            <a:ext cx="7955280" cy="274320"/>
+            <a:ext cx="7955280" cy="256032"/>
           </a:xfrm>
           <a:prstGeom prst="rect">
             <a:avLst/>
@@ -3828,7 +4522,7 @@
               <a:buNone/>
             </a:pPr>
             <a:r>
-              <a:rPr lang="en-US" sz="1400" b="1" dirty="0">
+              <a:rPr lang="en-US" sz="1300" b="1" dirty="0">
                 <a:solidFill>
                   <a:srgbClr val="102A43"/>
                 </a:solidFill>
@@ -3838,20 +4532,20 @@
               </a:rPr>
               <a:t>Primary Research Question:</a:t>
             </a:r>
-            <a:endParaRPr lang="en-US" sz="1400" dirty="0"/>
+            <a:endParaRPr lang="en-US" sz="1300" dirty="0"/>
           </a:p>
         </p:txBody>
       </p:sp>
       <p:sp>
         <p:nvSpPr>
-          <p:cNvPr id="7" name="Text 5"/>
+          <p:cNvPr id="8" name="Text 6"/>
           <p:cNvSpPr/>
           <p:nvPr/>
         </p:nvSpPr>
         <p:spPr>
           <a:xfrm>
-            <a:off x="594360" y="1554480"/>
-            <a:ext cx="7955280" cy="457200"/>
+            <a:off x="594360" y="1536192"/>
+            <a:ext cx="7955280" cy="411480"/>
           </a:xfrm>
           <a:prstGeom prst="rect">
             <a:avLst/>
@@ -3867,9 +4561,9 @@
               <a:buNone/>
             </a:pPr>
             <a:r>
-              <a:rPr lang="en-US" sz="1200" i="1" dirty="0">
-                <a:solidFill>
-                  <a:srgbClr val="5F7084"/>
+              <a:rPr lang="en-US" sz="1100" i="1" dirty="0">
+                <a:solidFill>
+                  <a:srgbClr val="0066CC"/>
                 </a:solidFill>
                 <a:latin typeface="Aptos" pitchFamily="34" charset="0"/>
                 <a:ea typeface="Aptos" pitchFamily="34" charset="-122"/>
@@ -3877,19 +4571,19 @@
               </a:rPr>
               <a:t>What is the relationship between firms' lobbying expenditures and their subsequent profitability?</a:t>
             </a:r>
-            <a:endParaRPr lang="en-US" sz="1200" dirty="0"/>
+            <a:endParaRPr lang="en-US" sz="1100" dirty="0"/>
           </a:p>
         </p:txBody>
       </p:sp>
       <p:sp>
         <p:nvSpPr>
-          <p:cNvPr id="8" name="Text 6"/>
+          <p:cNvPr id="9" name="Text 7"/>
           <p:cNvSpPr/>
           <p:nvPr/>
         </p:nvSpPr>
         <p:spPr>
           <a:xfrm>
-            <a:off x="594360" y="2148840"/>
+            <a:off x="594360" y="2057400"/>
             <a:ext cx="7955280" cy="228600"/>
           </a:xfrm>
           <a:prstGeom prst="rect">
@@ -3922,13 +4616,13 @@
       </p:sp>
       <p:sp>
         <p:nvSpPr>
-          <p:cNvPr id="9" name="Text 7"/>
+          <p:cNvPr id="10" name="Text 8"/>
           <p:cNvSpPr/>
           <p:nvPr/>
         </p:nvSpPr>
         <p:spPr>
           <a:xfrm>
-            <a:off x="731520" y="2423160"/>
+            <a:off x="731520" y="2331720"/>
             <a:ext cx="7680960" cy="3566160"/>
           </a:xfrm>
           <a:prstGeom prst="rect">
@@ -3942,10 +4636,13 @@
           <a:lstStyle/>
           <a:p>
             <a:pPr algn="l" indent="0" marL="0">
-              <a:buNone/>
-            </a:pPr>
-            <a:r>
-              <a:rPr lang="en-US" sz="1100" dirty="0">
+              <a:lnSpc>
+                <a:spcPts val="1600"/>
+              </a:lnSpc>
+              <a:buNone/>
+            </a:pPr>
+            <a:r>
+              <a:rPr lang="en-US" sz="1050" dirty="0">
                 <a:solidFill>
                   <a:srgbClr val="24364B"/>
                 </a:solidFill>
@@ -3955,14 +4652,17 @@
               </a:rPr>
               <a:t>• Merge lobbying expenditure data with firm financial records (2010–2020)</a:t>
             </a:r>
-            <a:endParaRPr lang="en-US" sz="1100" dirty="0"/>
+            <a:endParaRPr lang="en-US" sz="1050" dirty="0"/>
           </a:p>
           <a:p>
             <a:pPr algn="l" indent="0" marL="0">
-              <a:buNone/>
-            </a:pPr>
-            <a:r>
-              <a:rPr lang="en-US" sz="1100" dirty="0">
+              <a:lnSpc>
+                <a:spcPts val="1600"/>
+              </a:lnSpc>
+              <a:buNone/>
+            </a:pPr>
+            <a:r>
+              <a:rPr lang="en-US" sz="1050" dirty="0">
                 <a:solidFill>
                   <a:srgbClr val="24364B"/>
                 </a:solidFill>
@@ -3972,14 +4672,17 @@
               </a:rPr>
               <a:t>• Conduct exploratory data analysis to identify patterns and relationships</a:t>
             </a:r>
-            <a:endParaRPr lang="en-US" sz="1100" dirty="0"/>
+            <a:endParaRPr lang="en-US" sz="1050" dirty="0"/>
           </a:p>
           <a:p>
             <a:pPr algn="l" indent="0" marL="0">
-              <a:buNone/>
-            </a:pPr>
-            <a:r>
-              <a:rPr lang="en-US" sz="1100" dirty="0">
+              <a:lnSpc>
+                <a:spcPts val="1600"/>
+              </a:lnSpc>
+              <a:buNone/>
+            </a:pPr>
+            <a:r>
+              <a:rPr lang="en-US" sz="1050" dirty="0">
                 <a:solidFill>
                   <a:srgbClr val="24364B"/>
                 </a:solidFill>
@@ -3989,14 +4692,17 @@
               </a:rPr>
               <a:t>• Estimate panel regression models with fixed effects and robust inference</a:t>
             </a:r>
-            <a:endParaRPr lang="en-US" sz="1100" dirty="0"/>
+            <a:endParaRPr lang="en-US" sz="1050" dirty="0"/>
           </a:p>
           <a:p>
             <a:pPr algn="l" indent="0" marL="0">
-              <a:buNone/>
-            </a:pPr>
-            <a:r>
-              <a:rPr lang="en-US" sz="1100" dirty="0">
+              <a:lnSpc>
+                <a:spcPts val="1600"/>
+              </a:lnSpc>
+              <a:buNone/>
+            </a:pPr>
+            <a:r>
+              <a:rPr lang="en-US" sz="1050" dirty="0">
                 <a:solidFill>
                   <a:srgbClr val="24364B"/>
                 </a:solidFill>
@@ -4006,14 +4712,17 @@
               </a:rPr>
               <a:t>• Perform robustness checks across lag structures, sample subsets, and firm sizes</a:t>
             </a:r>
-            <a:endParaRPr lang="en-US" sz="1100" dirty="0"/>
+            <a:endParaRPr lang="en-US" sz="1050" dirty="0"/>
           </a:p>
           <a:p>
             <a:pPr algn="l" indent="0" marL="0">
-              <a:buNone/>
-            </a:pPr>
-            <a:r>
-              <a:rPr lang="en-US" sz="1100" dirty="0">
+              <a:lnSpc>
+                <a:spcPts val="1600"/>
+              </a:lnSpc>
+              <a:buNone/>
+            </a:pPr>
+            <a:r>
+              <a:rPr lang="en-US" sz="1050" dirty="0">
                 <a:solidFill>
                   <a:srgbClr val="24364B"/>
                 </a:solidFill>
@@ -4023,7 +4732,7 @@
               </a:rPr>
               <a:t>• Interpret findings within theoretical frameworks of corporate political activity</a:t>
             </a:r>
-            <a:endParaRPr lang="en-US" sz="1100" dirty="0"/>
+            <a:endParaRPr lang="en-US" sz="1050" dirty="0"/>
           </a:p>
         </p:txBody>
       </p:sp>
@@ -4041,7 +4750,7 @@
     <p:bg>
       <p:bgPr>
         <a:solidFill>
-          <a:srgbClr val="F3F8FD"/>
+          <a:srgbClr val="F5F8FB"/>
         </a:solidFill>
       </p:bgPr>
     </p:bg>
@@ -4068,19 +4777,19 @@
         <p:spPr>
           <a:xfrm>
             <a:off x="320040" y="182880"/>
-            <a:ext cx="914400" cy="228600"/>
+            <a:ext cx="1005840" cy="256032"/>
           </a:xfrm>
           <a:prstGeom prst="roundRect">
             <a:avLst>
-              <a:gd name="adj" fmla="val 16000"/>
+              <a:gd name="adj" fmla="val 21429"/>
             </a:avLst>
           </a:prstGeom>
           <a:solidFill>
-            <a:srgbClr val="DCEEFF"/>
+            <a:srgbClr val="0066CC"/>
           </a:solidFill>
           <a:ln w="12700">
             <a:solidFill>
-              <a:srgbClr val="DCEEFF"/>
+              <a:srgbClr val="0066CC"/>
             </a:solidFill>
             <a:prstDash val="solid"/>
           </a:ln>
@@ -4095,7 +4804,7 @@
         <p:spPr>
           <a:xfrm>
             <a:off x="320040" y="201168"/>
-            <a:ext cx="914400" cy="201168"/>
+            <a:ext cx="1005840" cy="219456"/>
           </a:xfrm>
           <a:prstGeom prst="rect">
             <a:avLst/>
@@ -4113,7 +4822,7 @@
             <a:r>
               <a:rPr lang="en-US" sz="800" b="1" dirty="0">
                 <a:solidFill>
-                  <a:srgbClr val="102A43"/>
+                  <a:srgbClr val="FFFFFF"/>
                 </a:solidFill>
                 <a:latin typeface="Trebuchet MS" pitchFamily="34" charset="0"/>
                 <a:ea typeface="Trebuchet MS" pitchFamily="34" charset="-122"/>
@@ -4127,14 +4836,34 @@
       </p:sp>
       <p:sp>
         <p:nvSpPr>
-          <p:cNvPr id="4" name="Text 2"/>
+          <p:cNvPr id="4" name="Shape 2"/>
           <p:cNvSpPr/>
           <p:nvPr/>
         </p:nvSpPr>
         <p:spPr>
           <a:xfrm>
-            <a:off x="320040" y="548640"/>
-            <a:ext cx="8503920" cy="365760"/>
+            <a:off x="320040" y="484632"/>
+            <a:ext cx="54864" cy="457200"/>
+          </a:xfrm>
+          <a:prstGeom prst="rect">
+            <a:avLst/>
+          </a:prstGeom>
+          <a:solidFill>
+            <a:srgbClr val="0066CC"/>
+          </a:solidFill>
+          <a:ln/>
+        </p:spPr>
+      </p:sp>
+      <p:sp>
+        <p:nvSpPr>
+          <p:cNvPr id="5" name="Text 3"/>
+          <p:cNvSpPr/>
+          <p:nvPr/>
+        </p:nvSpPr>
+        <p:spPr>
+          <a:xfrm>
+            <a:off x="457200" y="548640"/>
+            <a:ext cx="8366760" cy="365760"/>
           </a:xfrm>
           <a:prstGeom prst="rect">
             <a:avLst/>
@@ -4166,18 +4895,18 @@
       </p:sp>
       <p:sp>
         <p:nvSpPr>
-          <p:cNvPr id="5" name="Shape 3"/>
+          <p:cNvPr id="6" name="Shape 4"/>
           <p:cNvSpPr/>
           <p:nvPr/>
         </p:nvSpPr>
         <p:spPr>
           <a:xfrm>
             <a:off x="320040" y="1051560"/>
-            <a:ext cx="4023360" cy="5257800"/>
+            <a:ext cx="4023360" cy="5029200"/>
           </a:xfrm>
           <a:prstGeom prst="roundRect">
             <a:avLst>
-              <a:gd name="adj" fmla="val 1818"/>
+              <a:gd name="adj" fmla="val 2727"/>
             </a:avLst>
           </a:prstGeom>
           <a:solidFill>
@@ -4190,9 +4919,9 @@
             <a:prstDash val="solid"/>
           </a:ln>
           <a:effectLst>
-            <a:outerShdw sx="100000" sy="100000" kx="0" ky="0" algn="bl" rotWithShape="0" blurRad="38100" dist="50800" dir="2700000">
+            <a:outerShdw sx="100000" sy="100000" kx="0" ky="0" algn="bl" rotWithShape="0" blurRad="50800" dist="25400" dir="2700000">
               <a:srgbClr val="000000">
-                <a:alpha val="20000"/>
+                <a:alpha val="12000"/>
               </a:srgbClr>
             </a:outerShdw>
           </a:effectLst>
@@ -4200,14 +4929,34 @@
       </p:sp>
       <p:sp>
         <p:nvSpPr>
-          <p:cNvPr id="6" name="Text 4"/>
+          <p:cNvPr id="7" name="Shape 5"/>
           <p:cNvSpPr/>
           <p:nvPr/>
         </p:nvSpPr>
         <p:spPr>
           <a:xfrm>
-            <a:off x="502920" y="1234440"/>
-            <a:ext cx="3657600" cy="228600"/>
+            <a:off x="320040" y="1051560"/>
+            <a:ext cx="45720" cy="5029200"/>
+          </a:xfrm>
+          <a:prstGeom prst="rect">
+            <a:avLst/>
+          </a:prstGeom>
+          <a:solidFill>
+            <a:srgbClr val="0066CC"/>
+          </a:solidFill>
+          <a:ln/>
+        </p:spPr>
+      </p:sp>
+      <p:sp>
+        <p:nvSpPr>
+          <p:cNvPr id="8" name="Text 6"/>
+          <p:cNvSpPr/>
+          <p:nvPr/>
+        </p:nvSpPr>
+        <p:spPr>
+          <a:xfrm>
+            <a:off x="548640" y="1207008"/>
+            <a:ext cx="3657600" cy="256032"/>
           </a:xfrm>
           <a:prstGeom prst="rect">
             <a:avLst/>
@@ -4219,7 +4968,7 @@
           <a:bodyPr wrap="square" rtlCol="0" anchor="ctr"/>
           <a:lstStyle/>
           <a:p>
-            <a:pPr indent="0" marL="0">
+            <a:pPr algn="l" indent="0" marL="0">
               <a:buNone/>
             </a:pPr>
             <a:r>
@@ -4239,14 +4988,14 @@
       </p:sp>
       <p:sp>
         <p:nvSpPr>
-          <p:cNvPr id="7" name="Text 5"/>
+          <p:cNvPr id="9" name="Text 7"/>
           <p:cNvSpPr/>
           <p:nvPr/>
         </p:nvSpPr>
         <p:spPr>
           <a:xfrm>
-            <a:off x="502920" y="1508760"/>
-            <a:ext cx="3657600" cy="2880360"/>
+            <a:off x="548640" y="1508760"/>
+            <a:ext cx="3657600" cy="4389120"/>
           </a:xfrm>
           <a:prstGeom prst="rect">
             <a:avLst/>
@@ -4259,10 +5008,13 @@
           <a:lstStyle/>
           <a:p>
             <a:pPr algn="l" indent="0" marL="0">
-              <a:buNone/>
-            </a:pPr>
-            <a:r>
-              <a:rPr lang="en-US" sz="950" dirty="0">
+              <a:lnSpc>
+                <a:spcPts val="1600"/>
+              </a:lnSpc>
+              <a:buNone/>
+            </a:pPr>
+            <a:r>
+              <a:rPr lang="en-US" sz="900" dirty="0">
                 <a:solidFill>
                   <a:srgbClr val="24364B"/>
                 </a:solidFill>
@@ -4272,14 +5024,17 @@
               </a:rPr>
               <a:t>• Source: Senate Lobbying Disclosure Reports (LobbyView)</a:t>
             </a:r>
-            <a:endParaRPr lang="en-US" sz="950" dirty="0"/>
+            <a:endParaRPr lang="en-US" sz="900" dirty="0"/>
           </a:p>
           <a:p>
             <a:pPr algn="l" indent="0" marL="0">
-              <a:buNone/>
-            </a:pPr>
-            <a:r>
-              <a:rPr lang="en-US" sz="950" dirty="0">
+              <a:lnSpc>
+                <a:spcPts val="1600"/>
+              </a:lnSpc>
+              <a:buNone/>
+            </a:pPr>
+            <a:r>
+              <a:rPr lang="en-US" sz="900" dirty="0">
                 <a:solidFill>
                   <a:srgbClr val="24364B"/>
                 </a:solidFill>
@@ -4289,14 +5044,17 @@
               </a:rPr>
               <a:t>• Unit: Firm-year observations</a:t>
             </a:r>
-            <a:endParaRPr lang="en-US" sz="950" dirty="0"/>
+            <a:endParaRPr lang="en-US" sz="900" dirty="0"/>
           </a:p>
           <a:p>
             <a:pPr algn="l" indent="0" marL="0">
-              <a:buNone/>
-            </a:pPr>
-            <a:r>
-              <a:rPr lang="en-US" sz="950" dirty="0">
+              <a:lnSpc>
+                <a:spcPts val="1600"/>
+              </a:lnSpc>
+              <a:buNone/>
+            </a:pPr>
+            <a:r>
+              <a:rPr lang="en-US" sz="900" dirty="0">
                 <a:solidFill>
                   <a:srgbClr val="24364B"/>
                 </a:solidFill>
@@ -4306,14 +5064,17 @@
               </a:rPr>
               <a:t>• Period: 2010–2020</a:t>
             </a:r>
-            <a:endParaRPr lang="en-US" sz="950" dirty="0"/>
+            <a:endParaRPr lang="en-US" sz="900" dirty="0"/>
           </a:p>
           <a:p>
             <a:pPr algn="l" indent="0" marL="0">
-              <a:buNone/>
-            </a:pPr>
-            <a:r>
-              <a:rPr lang="en-US" sz="950" dirty="0">
+              <a:lnSpc>
+                <a:spcPts val="1600"/>
+              </a:lnSpc>
+              <a:buNone/>
+            </a:pPr>
+            <a:r>
+              <a:rPr lang="en-US" sz="900" dirty="0">
                 <a:solidFill>
                   <a:srgbClr val="24364B"/>
                 </a:solidFill>
@@ -4323,14 +5084,17 @@
               </a:rPr>
               <a:t>• Key variable: Annual total lobbying expenditure (USD)</a:t>
             </a:r>
-            <a:endParaRPr lang="en-US" sz="950" dirty="0"/>
+            <a:endParaRPr lang="en-US" sz="900" dirty="0"/>
           </a:p>
           <a:p>
             <a:pPr algn="l" indent="0" marL="0">
-              <a:buNone/>
-            </a:pPr>
-            <a:r>
-              <a:rPr lang="en-US" sz="950" dirty="0">
+              <a:lnSpc>
+                <a:spcPts val="1600"/>
+              </a:lnSpc>
+              <a:buNone/>
+            </a:pPr>
+            <a:r>
+              <a:rPr lang="en-US" sz="900" dirty="0">
                 <a:solidFill>
                   <a:srgbClr val="24364B"/>
                 </a:solidFill>
@@ -4340,24 +5104,24 @@
               </a:rPr>
               <a:t>• Coverage: 1,534 unique firms</a:t>
             </a:r>
-            <a:endParaRPr lang="en-US" sz="950" dirty="0"/>
+            <a:endParaRPr lang="en-US" sz="900" dirty="0"/>
           </a:p>
         </p:txBody>
       </p:sp>
       <p:sp>
         <p:nvSpPr>
-          <p:cNvPr id="8" name="Shape 6"/>
+          <p:cNvPr id="10" name="Shape 8"/>
           <p:cNvSpPr/>
           <p:nvPr/>
         </p:nvSpPr>
         <p:spPr>
           <a:xfrm>
             <a:off x="4800600" y="1051560"/>
-            <a:ext cx="4023360" cy="5257800"/>
+            <a:ext cx="4023360" cy="5029200"/>
           </a:xfrm>
           <a:prstGeom prst="roundRect">
             <a:avLst>
-              <a:gd name="adj" fmla="val 1818"/>
+              <a:gd name="adj" fmla="val 2727"/>
             </a:avLst>
           </a:prstGeom>
           <a:solidFill>
@@ -4370,9 +5134,9 @@
             <a:prstDash val="solid"/>
           </a:ln>
           <a:effectLst>
-            <a:outerShdw sx="100000" sy="100000" kx="0" ky="0" algn="bl" rotWithShape="0" blurRad="38100" dist="50800" dir="2700000">
+            <a:outerShdw sx="100000" sy="100000" kx="0" ky="0" algn="bl" rotWithShape="0" blurRad="50800" dist="25400" dir="2700000">
               <a:srgbClr val="000000">
-                <a:alpha val="20000"/>
+                <a:alpha val="12000"/>
               </a:srgbClr>
             </a:outerShdw>
           </a:effectLst>
@@ -4380,14 +5144,34 @@
       </p:sp>
       <p:sp>
         <p:nvSpPr>
-          <p:cNvPr id="9" name="Text 7"/>
+          <p:cNvPr id="11" name="Shape 9"/>
           <p:cNvSpPr/>
           <p:nvPr/>
         </p:nvSpPr>
         <p:spPr>
           <a:xfrm>
-            <a:off x="4983480" y="1234440"/>
-            <a:ext cx="3657600" cy="228600"/>
+            <a:off x="4800600" y="1051560"/>
+            <a:ext cx="45720" cy="5029200"/>
+          </a:xfrm>
+          <a:prstGeom prst="rect">
+            <a:avLst/>
+          </a:prstGeom>
+          <a:solidFill>
+            <a:srgbClr val="0066CC"/>
+          </a:solidFill>
+          <a:ln/>
+        </p:spPr>
+      </p:sp>
+      <p:sp>
+        <p:nvSpPr>
+          <p:cNvPr id="12" name="Text 10"/>
+          <p:cNvSpPr/>
+          <p:nvPr/>
+        </p:nvSpPr>
+        <p:spPr>
+          <a:xfrm>
+            <a:off x="5029200" y="1207008"/>
+            <a:ext cx="3657600" cy="256032"/>
           </a:xfrm>
           <a:prstGeom prst="rect">
             <a:avLst/>
@@ -4399,7 +5183,7 @@
           <a:bodyPr wrap="square" rtlCol="0" anchor="ctr"/>
           <a:lstStyle/>
           <a:p>
-            <a:pPr indent="0" marL="0">
+            <a:pPr algn="l" indent="0" marL="0">
               <a:buNone/>
             </a:pPr>
             <a:r>
@@ -4419,14 +5203,14 @@
       </p:sp>
       <p:sp>
         <p:nvSpPr>
-          <p:cNvPr id="10" name="Text 8"/>
+          <p:cNvPr id="13" name="Text 11"/>
           <p:cNvSpPr/>
           <p:nvPr/>
         </p:nvSpPr>
         <p:spPr>
           <a:xfrm>
-            <a:off x="4983480" y="1508760"/>
-            <a:ext cx="3657600" cy="2880360"/>
+            <a:off x="5029200" y="1508760"/>
+            <a:ext cx="3657600" cy="4389120"/>
           </a:xfrm>
           <a:prstGeom prst="rect">
             <a:avLst/>
@@ -4439,10 +5223,13 @@
           <a:lstStyle/>
           <a:p>
             <a:pPr algn="l" indent="0" marL="0">
-              <a:buNone/>
-            </a:pPr>
-            <a:r>
-              <a:rPr lang="en-US" sz="950" dirty="0">
+              <a:lnSpc>
+                <a:spcPts val="1600"/>
+              </a:lnSpc>
+              <a:buNone/>
+            </a:pPr>
+            <a:r>
+              <a:rPr lang="en-US" sz="900" dirty="0">
                 <a:solidFill>
                   <a:srgbClr val="24364B"/>
                 </a:solidFill>
@@ -4452,14 +5239,17 @@
               </a:rPr>
               <a:t>• Source: SEC XBRL filings (10-K annual reports)</a:t>
             </a:r>
-            <a:endParaRPr lang="en-US" sz="950" dirty="0"/>
+            <a:endParaRPr lang="en-US" sz="900" dirty="0"/>
           </a:p>
           <a:p>
             <a:pPr algn="l" indent="0" marL="0">
-              <a:buNone/>
-            </a:pPr>
-            <a:r>
-              <a:rPr lang="en-US" sz="950" dirty="0">
+              <a:lnSpc>
+                <a:spcPts val="1600"/>
+              </a:lnSpc>
+              <a:buNone/>
+            </a:pPr>
+            <a:r>
+              <a:rPr lang="en-US" sz="900" dirty="0">
                 <a:solidFill>
                   <a:srgbClr val="24364B"/>
                 </a:solidFill>
@@ -4469,14 +5259,17 @@
               </a:rPr>
               <a:t>• Unit: Firm-year observations</a:t>
             </a:r>
-            <a:endParaRPr lang="en-US" sz="950" dirty="0"/>
+            <a:endParaRPr lang="en-US" sz="900" dirty="0"/>
           </a:p>
           <a:p>
             <a:pPr algn="l" indent="0" marL="0">
-              <a:buNone/>
-            </a:pPr>
-            <a:r>
-              <a:rPr lang="en-US" sz="950" dirty="0">
+              <a:lnSpc>
+                <a:spcPts val="1600"/>
+              </a:lnSpc>
+              <a:buNone/>
+            </a:pPr>
+            <a:r>
+              <a:rPr lang="en-US" sz="900" dirty="0">
                 <a:solidFill>
                   <a:srgbClr val="24364B"/>
                 </a:solidFill>
@@ -4486,14 +5279,17 @@
               </a:rPr>
               <a:t>• Period: 2010–2020</a:t>
             </a:r>
-            <a:endParaRPr lang="en-US" sz="950" dirty="0"/>
+            <a:endParaRPr lang="en-US" sz="900" dirty="0"/>
           </a:p>
           <a:p>
             <a:pPr algn="l" indent="0" marL="0">
-              <a:buNone/>
-            </a:pPr>
-            <a:r>
-              <a:rPr lang="en-US" sz="950" dirty="0">
+              <a:lnSpc>
+                <a:spcPts val="1600"/>
+              </a:lnSpc>
+              <a:buNone/>
+            </a:pPr>
+            <a:r>
+              <a:rPr lang="en-US" sz="900" dirty="0">
                 <a:solidFill>
                   <a:srgbClr val="24364B"/>
                 </a:solidFill>
@@ -4503,14 +5299,17 @@
               </a:rPr>
               <a:t>• Key variables: Total Assets, Net Income, Revenues</a:t>
             </a:r>
-            <a:endParaRPr lang="en-US" sz="950" dirty="0"/>
+            <a:endParaRPr lang="en-US" sz="900" dirty="0"/>
           </a:p>
           <a:p>
             <a:pPr algn="l" indent="0" marL="0">
-              <a:buNone/>
-            </a:pPr>
-            <a:r>
-              <a:rPr lang="en-US" sz="950" dirty="0">
+              <a:lnSpc>
+                <a:spcPts val="1600"/>
+              </a:lnSpc>
+              <a:buNone/>
+            </a:pPr>
+            <a:r>
+              <a:rPr lang="en-US" sz="900" dirty="0">
                 <a:solidFill>
                   <a:srgbClr val="24364B"/>
                 </a:solidFill>
@@ -4520,20 +5319,47 @@
               </a:rPr>
               <a:t>• Coverage: 1,375 unique firms</a:t>
             </a:r>
-            <a:endParaRPr lang="en-US" sz="950" dirty="0"/>
+            <a:endParaRPr lang="en-US" sz="900" dirty="0"/>
           </a:p>
         </p:txBody>
       </p:sp>
       <p:sp>
         <p:nvSpPr>
-          <p:cNvPr id="11" name="Text 9"/>
+          <p:cNvPr id="14" name="Shape 12"/>
           <p:cNvSpPr/>
           <p:nvPr/>
         </p:nvSpPr>
         <p:spPr>
           <a:xfrm>
             <a:off x="320040" y="6172200"/>
-            <a:ext cx="8503920" cy="822960"/>
+            <a:ext cx="8503920" cy="621792"/>
+          </a:xfrm>
+          <a:prstGeom prst="roundRect">
+            <a:avLst>
+              <a:gd name="adj" fmla="val 14706"/>
+            </a:avLst>
+          </a:prstGeom>
+          <a:solidFill>
+            <a:srgbClr val="E8F2FF"/>
+          </a:solidFill>
+          <a:ln w="12700">
+            <a:solidFill>
+              <a:srgbClr val="0066CC"/>
+            </a:solidFill>
+            <a:prstDash val="solid"/>
+          </a:ln>
+        </p:spPr>
+      </p:sp>
+      <p:sp>
+        <p:nvSpPr>
+          <p:cNvPr id="15" name="Text 13"/>
+          <p:cNvSpPr/>
+          <p:nvPr/>
+        </p:nvSpPr>
+        <p:spPr>
+          <a:xfrm>
+            <a:off x="457200" y="6217920"/>
+            <a:ext cx="8229600" cy="530352"/>
           </a:xfrm>
           <a:prstGeom prst="rect">
             <a:avLst/>
@@ -4545,13 +5371,13 @@
           <a:bodyPr wrap="square" rtlCol="0" anchor="ctr"/>
           <a:lstStyle/>
           <a:p>
-            <a:pPr algn="l" indent="0" marL="0">
-              <a:buNone/>
-            </a:pPr>
-            <a:r>
-              <a:rPr lang="en-US" sz="1000" dirty="0">
-                <a:solidFill>
-                  <a:srgbClr val="5F7084"/>
+            <a:pPr algn="ctr" indent="0" marL="0">
+              <a:buNone/>
+            </a:pPr>
+            <a:r>
+              <a:rPr lang="en-US" sz="950" b="1" dirty="0">
+                <a:solidFill>
+                  <a:srgbClr val="102A43"/>
                 </a:solidFill>
                 <a:latin typeface="Aptos" pitchFamily="34" charset="0"/>
                 <a:ea typeface="Aptos" pitchFamily="34" charset="-122"/>
@@ -4559,7 +5385,7 @@
               </a:rPr>
               <a:t>After merge: 5,099 firm-year observations across 1,375 firms; balanced panel yielded 836 observations (66 firms with complete 2010–2020 data)</a:t>
             </a:r>
-            <a:endParaRPr lang="en-US" sz="1000" dirty="0"/>
+            <a:endParaRPr lang="en-US" sz="950" dirty="0"/>
           </a:p>
         </p:txBody>
       </p:sp>
@@ -4577,7 +5403,7 @@
     <p:bg>
       <p:bgPr>
         <a:solidFill>
-          <a:srgbClr val="F3F8FD"/>
+          <a:srgbClr val="F5F8FB"/>
         </a:solidFill>
       </p:bgPr>
     </p:bg>
@@ -4604,19 +5430,19 @@
         <p:spPr>
           <a:xfrm>
             <a:off x="320040" y="182880"/>
-            <a:ext cx="914400" cy="228600"/>
+            <a:ext cx="1005840" cy="256032"/>
           </a:xfrm>
           <a:prstGeom prst="roundRect">
             <a:avLst>
-              <a:gd name="adj" fmla="val 16000"/>
+              <a:gd name="adj" fmla="val 21429"/>
             </a:avLst>
           </a:prstGeom>
           <a:solidFill>
-            <a:srgbClr val="DCEEFF"/>
+            <a:srgbClr val="0066CC"/>
           </a:solidFill>
           <a:ln w="12700">
             <a:solidFill>
-              <a:srgbClr val="DCEEFF"/>
+              <a:srgbClr val="0066CC"/>
             </a:solidFill>
             <a:prstDash val="solid"/>
           </a:ln>
@@ -4631,7 +5457,7 @@
         <p:spPr>
           <a:xfrm>
             <a:off x="320040" y="201168"/>
-            <a:ext cx="914400" cy="201168"/>
+            <a:ext cx="1005840" cy="219456"/>
           </a:xfrm>
           <a:prstGeom prst="rect">
             <a:avLst/>
@@ -4649,7 +5475,7 @@
             <a:r>
               <a:rPr lang="en-US" sz="800" b="1" dirty="0">
                 <a:solidFill>
-                  <a:srgbClr val="102A43"/>
+                  <a:srgbClr val="FFFFFF"/>
                 </a:solidFill>
                 <a:latin typeface="Trebuchet MS" pitchFamily="34" charset="0"/>
                 <a:ea typeface="Trebuchet MS" pitchFamily="34" charset="-122"/>
@@ -4663,14 +5489,34 @@
       </p:sp>
       <p:sp>
         <p:nvSpPr>
-          <p:cNvPr id="4" name="Text 2"/>
+          <p:cNvPr id="4" name="Shape 2"/>
           <p:cNvSpPr/>
           <p:nvPr/>
         </p:nvSpPr>
         <p:spPr>
           <a:xfrm>
-            <a:off x="320040" y="548640"/>
-            <a:ext cx="8503920" cy="365760"/>
+            <a:off x="320040" y="484632"/>
+            <a:ext cx="54864" cy="457200"/>
+          </a:xfrm>
+          <a:prstGeom prst="rect">
+            <a:avLst/>
+          </a:prstGeom>
+          <a:solidFill>
+            <a:srgbClr val="0066CC"/>
+          </a:solidFill>
+          <a:ln/>
+        </p:spPr>
+      </p:sp>
+      <p:sp>
+        <p:nvSpPr>
+          <p:cNvPr id="5" name="Text 3"/>
+          <p:cNvSpPr/>
+          <p:nvPr/>
+        </p:nvSpPr>
+        <p:spPr>
+          <a:xfrm>
+            <a:off x="457200" y="548640"/>
+            <a:ext cx="8366760" cy="365760"/>
           </a:xfrm>
           <a:prstGeom prst="rect">
             <a:avLst/>
@@ -4702,7 +5548,7 @@
       </p:sp>
       <p:sp>
         <p:nvSpPr>
-          <p:cNvPr id="5" name="Shape 3"/>
+          <p:cNvPr id="6" name="Shape 4"/>
           <p:cNvSpPr/>
           <p:nvPr/>
         </p:nvSpPr>
@@ -4713,7 +5559,7 @@
           </a:xfrm>
           <a:prstGeom prst="roundRect">
             <a:avLst>
-              <a:gd name="adj" fmla="val 1391"/>
+              <a:gd name="adj" fmla="val 2087"/>
             </a:avLst>
           </a:prstGeom>
           <a:solidFill>
@@ -4726,9 +5572,9 @@
             <a:prstDash val="solid"/>
           </a:ln>
           <a:effectLst>
-            <a:outerShdw sx="100000" sy="100000" kx="0" ky="0" algn="bl" rotWithShape="0" blurRad="38100" dist="50800" dir="2700000">
+            <a:outerShdw sx="100000" sy="100000" kx="0" ky="0" algn="bl" rotWithShape="0" blurRad="50800" dist="25400" dir="2700000">
               <a:srgbClr val="000000">
-                <a:alpha val="20000"/>
+                <a:alpha val="12000"/>
               </a:srgbClr>
             </a:outerShdw>
           </a:effectLst>
@@ -4736,7 +5582,7 @@
       </p:sp>
       <p:sp>
         <p:nvSpPr>
-          <p:cNvPr id="6" name="Text 4"/>
+          <p:cNvPr id="7" name="Text 5"/>
           <p:cNvSpPr/>
           <p:nvPr/>
         </p:nvSpPr>
@@ -4775,7 +5621,7 @@
       </p:sp>
       <p:sp>
         <p:nvSpPr>
-          <p:cNvPr id="7" name="Text 5"/>
+          <p:cNvPr id="8" name="Text 6"/>
           <p:cNvSpPr/>
           <p:nvPr/>
         </p:nvSpPr>
@@ -4795,10 +5641,13 @@
           <a:lstStyle/>
           <a:p>
             <a:pPr algn="l" indent="0" marL="0">
-              <a:buNone/>
-            </a:pPr>
-            <a:r>
-              <a:rPr lang="en-US" sz="1050" dirty="0">
+              <a:lnSpc>
+                <a:spcPts val="1600"/>
+              </a:lnSpc>
+              <a:buNone/>
+            </a:pPr>
+            <a:r>
+              <a:rPr lang="en-US" sz="1000" dirty="0">
                 <a:solidFill>
                   <a:srgbClr val="24364B"/>
                 </a:solidFill>
@@ -4808,14 +5657,17 @@
               </a:rPr>
               <a:t>• Positive moderate correlation between lobbying expenditure and firm performance (Return on Assets)</a:t>
             </a:r>
-            <a:endParaRPr lang="en-US" sz="1050" dirty="0"/>
+            <a:endParaRPr lang="en-US" sz="1000" dirty="0"/>
           </a:p>
           <a:p>
             <a:pPr algn="l" indent="0" marL="0">
-              <a:buNone/>
-            </a:pPr>
-            <a:r>
-              <a:rPr lang="en-US" sz="1050" dirty="0">
+              <a:lnSpc>
+                <a:spcPts val="1600"/>
+              </a:lnSpc>
+              <a:buNone/>
+            </a:pPr>
+            <a:r>
+              <a:rPr lang="en-US" sz="1000" dirty="0">
                 <a:solidFill>
                   <a:srgbClr val="24364B"/>
                 </a:solidFill>
@@ -4825,14 +5677,17 @@
               </a:rPr>
               <a:t>• Effect exhibits time lag: strongest association at 1–2-year lags, not contemporaneous</a:t>
             </a:r>
-            <a:endParaRPr lang="en-US" sz="1050" dirty="0"/>
+            <a:endParaRPr lang="en-US" sz="1000" dirty="0"/>
           </a:p>
           <a:p>
             <a:pPr algn="l" indent="0" marL="0">
-              <a:buNone/>
-            </a:pPr>
-            <a:r>
-              <a:rPr lang="en-US" sz="1050" dirty="0">
+              <a:lnSpc>
+                <a:spcPts val="1600"/>
+              </a:lnSpc>
+              <a:buNone/>
+            </a:pPr>
+            <a:r>
+              <a:rPr lang="en-US" sz="1000" dirty="0">
                 <a:solidFill>
                   <a:srgbClr val="24364B"/>
                 </a:solidFill>
@@ -4842,14 +5697,17 @@
               </a:rPr>
               <a:t>• Heterogeneous effects: stronger in larger and policy-exposed firms</a:t>
             </a:r>
-            <a:endParaRPr lang="en-US" sz="1050" dirty="0"/>
+            <a:endParaRPr lang="en-US" sz="1000" dirty="0"/>
           </a:p>
           <a:p>
             <a:pPr algn="l" indent="0" marL="0">
-              <a:buNone/>
-            </a:pPr>
-            <a:r>
-              <a:rPr lang="en-US" sz="1050" dirty="0">
+              <a:lnSpc>
+                <a:spcPts val="1600"/>
+              </a:lnSpc>
+              <a:buNone/>
+            </a:pPr>
+            <a:r>
+              <a:rPr lang="en-US" sz="1000" dirty="0">
                 <a:solidFill>
                   <a:srgbClr val="24364B"/>
                 </a:solidFill>
@@ -4859,14 +5717,17 @@
               </a:rPr>
               <a:t>• Smaller firms show weaker or no relationship; size-based mechanism likely relevant</a:t>
             </a:r>
-            <a:endParaRPr lang="en-US" sz="1050" dirty="0"/>
+            <a:endParaRPr lang="en-US" sz="1000" dirty="0"/>
           </a:p>
           <a:p>
             <a:pPr algn="l" indent="0" marL="0">
-              <a:buNone/>
-            </a:pPr>
-            <a:r>
-              <a:rPr lang="en-US" sz="1050" dirty="0">
+              <a:lnSpc>
+                <a:spcPts val="1600"/>
+              </a:lnSpc>
+              <a:buNone/>
+            </a:pPr>
+            <a:r>
+              <a:rPr lang="en-US" sz="1000" dirty="0">
                 <a:solidFill>
                   <a:srgbClr val="24364B"/>
                 </a:solidFill>
@@ -4876,14 +5737,17 @@
               </a:rPr>
               <a:t>• Outlier firms with extreme lobbying spending have disproportionate leverage on results</a:t>
             </a:r>
-            <a:endParaRPr lang="en-US" sz="1050" dirty="0"/>
+            <a:endParaRPr lang="en-US" sz="1000" dirty="0"/>
           </a:p>
           <a:p>
             <a:pPr algn="l" indent="0" marL="0">
-              <a:buNone/>
-            </a:pPr>
-            <a:r>
-              <a:rPr lang="en-US" sz="1050" dirty="0">
+              <a:lnSpc>
+                <a:spcPts val="1600"/>
+              </a:lnSpc>
+              <a:buNone/>
+            </a:pPr>
+            <a:r>
+              <a:rPr lang="en-US" sz="1000" dirty="0">
                 <a:solidFill>
                   <a:srgbClr val="24364B"/>
                 </a:solidFill>
@@ -4893,14 +5757,17 @@
               </a:rPr>
               <a:t>• Log-scaling and trimming reduce magnitude but preserve positive direction in most cases</a:t>
             </a:r>
-            <a:endParaRPr lang="en-US" sz="1050" dirty="0"/>
+            <a:endParaRPr lang="en-US" sz="1000" dirty="0"/>
           </a:p>
           <a:p>
             <a:pPr algn="l" indent="0" marL="0">
-              <a:buNone/>
-            </a:pPr>
-            <a:r>
-              <a:rPr lang="en-US" sz="1050" dirty="0">
+              <a:lnSpc>
+                <a:spcPts val="1600"/>
+              </a:lnSpc>
+              <a:buNone/>
+            </a:pPr>
+            <a:r>
+              <a:rPr lang="en-US" sz="1000" dirty="0">
                 <a:solidFill>
                   <a:srgbClr val="24364B"/>
                 </a:solidFill>
@@ -4910,13 +5777,13 @@
               </a:rPr>
               <a:t>• Adding controls (size, industry, year effects) attenuates coefficient but does not eliminate it</a:t>
             </a:r>
-            <a:endParaRPr lang="en-US" sz="1050" dirty="0"/>
+            <a:endParaRPr lang="en-US" sz="1000" dirty="0"/>
           </a:p>
         </p:txBody>
       </p:sp>
       <p:sp>
         <p:nvSpPr>
-          <p:cNvPr id="8" name="Text 6"/>
+          <p:cNvPr id="9" name="Text 7"/>
           <p:cNvSpPr/>
           <p:nvPr/>
         </p:nvSpPr>
@@ -4941,7 +5808,7 @@
             <a:r>
               <a:rPr lang="en-US" sz="800" i="1" dirty="0">
                 <a:solidFill>
-                  <a:srgbClr val="5F7084"/>
+                  <a:srgbClr val="7A8DA0"/>
                 </a:solidFill>
                 <a:latin typeface="Aptos" pitchFamily="34" charset="0"/>
                 <a:ea typeface="Aptos" pitchFamily="34" charset="-122"/>
@@ -4967,7 +5834,7 @@
     <p:bg>
       <p:bgPr>
         <a:solidFill>
-          <a:srgbClr val="F3F8FD"/>
+          <a:srgbClr val="F5F8FB"/>
         </a:solidFill>
       </p:bgPr>
     </p:bg>
@@ -4994,19 +5861,19 @@
         <p:spPr>
           <a:xfrm>
             <a:off x="320040" y="182880"/>
-            <a:ext cx="914400" cy="228600"/>
+            <a:ext cx="1005840" cy="256032"/>
           </a:xfrm>
           <a:prstGeom prst="roundRect">
             <a:avLst>
-              <a:gd name="adj" fmla="val 16000"/>
+              <a:gd name="adj" fmla="val 21429"/>
             </a:avLst>
           </a:prstGeom>
           <a:solidFill>
-            <a:srgbClr val="DCEEFF"/>
+            <a:srgbClr val="0066CC"/>
           </a:solidFill>
           <a:ln w="12700">
             <a:solidFill>
-              <a:srgbClr val="DCEEFF"/>
+              <a:srgbClr val="0066CC"/>
             </a:solidFill>
             <a:prstDash val="solid"/>
           </a:ln>
@@ -5021,7 +5888,7 @@
         <p:spPr>
           <a:xfrm>
             <a:off x="320040" y="201168"/>
-            <a:ext cx="914400" cy="201168"/>
+            <a:ext cx="1005840" cy="219456"/>
           </a:xfrm>
           <a:prstGeom prst="rect">
             <a:avLst/>
@@ -5039,7 +5906,7 @@
             <a:r>
               <a:rPr lang="en-US" sz="800" b="1" dirty="0">
                 <a:solidFill>
-                  <a:srgbClr val="102A43"/>
+                  <a:srgbClr val="FFFFFF"/>
                 </a:solidFill>
                 <a:latin typeface="Trebuchet MS" pitchFamily="34" charset="0"/>
                 <a:ea typeface="Trebuchet MS" pitchFamily="34" charset="-122"/>
@@ -5053,14 +5920,34 @@
       </p:sp>
       <p:sp>
         <p:nvSpPr>
-          <p:cNvPr id="4" name="Text 2"/>
+          <p:cNvPr id="4" name="Shape 2"/>
           <p:cNvSpPr/>
           <p:nvPr/>
         </p:nvSpPr>
         <p:spPr>
           <a:xfrm>
-            <a:off x="320040" y="548640"/>
-            <a:ext cx="8503920" cy="365760"/>
+            <a:off x="320040" y="484632"/>
+            <a:ext cx="54864" cy="457200"/>
+          </a:xfrm>
+          <a:prstGeom prst="rect">
+            <a:avLst/>
+          </a:prstGeom>
+          <a:solidFill>
+            <a:srgbClr val="0066CC"/>
+          </a:solidFill>
+          <a:ln/>
+        </p:spPr>
+      </p:sp>
+      <p:sp>
+        <p:nvSpPr>
+          <p:cNvPr id="5" name="Text 3"/>
+          <p:cNvSpPr/>
+          <p:nvPr/>
+        </p:nvSpPr>
+        <p:spPr>
+          <a:xfrm>
+            <a:off x="457200" y="548640"/>
+            <a:ext cx="8366760" cy="365760"/>
           </a:xfrm>
           <a:prstGeom prst="rect">
             <a:avLst/>
@@ -5113,10 +6000,10 @@
             <a:tbl>
               <a:tblPr/>
               <a:tblGrid>
-                <a:gridCol w="2125980"/>
-                <a:gridCol w="2125980"/>
-                <a:gridCol w="2125980"/>
-                <a:gridCol w="2125980"/>
+                <a:gridCol w="2286000"/>
+                <a:gridCol w="1371600"/>
+                <a:gridCol w="2011680"/>
+                <a:gridCol w="2377440"/>
               </a:tblGrid>
               <a:tr h="402336">
                 <a:tc>
@@ -6494,7 +7381,7 @@
       </p:graphicFrame>
       <p:sp>
         <p:nvSpPr>
-          <p:cNvPr id="6" name="Text 3"/>
+          <p:cNvPr id="7" name="Text 4"/>
           <p:cNvSpPr/>
           <p:nvPr/>
         </p:nvSpPr>
@@ -6533,7 +7420,7 @@
       </p:sp>
       <p:sp>
         <p:nvSpPr>
-          <p:cNvPr id="7" name="Text 4"/>
+          <p:cNvPr id="8" name="Text 5"/>
           <p:cNvSpPr/>
           <p:nvPr/>
         </p:nvSpPr>
@@ -6553,10 +7440,13 @@
           <a:lstStyle/>
           <a:p>
             <a:pPr algn="l" indent="0" marL="0">
-              <a:buNone/>
-            </a:pPr>
-            <a:r>
-              <a:rPr lang="en-US" sz="1000" dirty="0">
+              <a:lnSpc>
+                <a:spcPts val="1600"/>
+              </a:lnSpc>
+              <a:buNone/>
+            </a:pPr>
+            <a:r>
+              <a:rPr lang="en-US" sz="950" dirty="0">
                 <a:solidFill>
                   <a:srgbClr val="24364B"/>
                 </a:solidFill>
@@ -6566,14 +7456,17 @@
               </a:rPr>
               <a:t>• Lobbying data sparse: 95.2% missing in full merged panel (many firms not in lobbying universe)</a:t>
             </a:r>
-            <a:endParaRPr lang="en-US" sz="1000" dirty="0"/>
+            <a:endParaRPr lang="en-US" sz="950" dirty="0"/>
           </a:p>
           <a:p>
             <a:pPr algn="l" indent="0" marL="0">
-              <a:buNone/>
-            </a:pPr>
-            <a:r>
-              <a:rPr lang="en-US" sz="1000" dirty="0">
+              <a:lnSpc>
+                <a:spcPts val="1600"/>
+              </a:lnSpc>
+              <a:buNone/>
+            </a:pPr>
+            <a:r>
+              <a:rPr lang="en-US" sz="950" dirty="0">
                 <a:solidFill>
                   <a:srgbClr val="24364B"/>
                 </a:solidFill>
@@ -6583,14 +7476,17 @@
               </a:rPr>
               <a:t>• Mean ROA: 56.94 (winsorized); highly variable due to outliers and firm heterogeneity</a:t>
             </a:r>
-            <a:endParaRPr lang="en-US" sz="1000" dirty="0"/>
+            <a:endParaRPr lang="en-US" sz="950" dirty="0"/>
           </a:p>
           <a:p>
             <a:pPr algn="l" indent="0" marL="0">
-              <a:buNone/>
-            </a:pPr>
-            <a:r>
-              <a:rPr lang="en-US" sz="1000" dirty="0">
+              <a:lnSpc>
+                <a:spcPts val="1600"/>
+              </a:lnSpc>
+              <a:buNone/>
+            </a:pPr>
+            <a:r>
+              <a:rPr lang="en-US" sz="950" dirty="0">
                 <a:solidFill>
                   <a:srgbClr val="24364B"/>
                 </a:solidFill>
@@ -6600,14 +7496,17 @@
               </a:rPr>
               <a:t>• No explicit industry codes; size-based proxy used for heterogeneity estimation</a:t>
             </a:r>
-            <a:endParaRPr lang="en-US" sz="1000" dirty="0"/>
+            <a:endParaRPr lang="en-US" sz="950" dirty="0"/>
           </a:p>
           <a:p>
             <a:pPr algn="l" indent="0" marL="0">
-              <a:buNone/>
-            </a:pPr>
-            <a:r>
-              <a:rPr lang="en-US" sz="1000" dirty="0">
+              <a:lnSpc>
+                <a:spcPts val="1600"/>
+              </a:lnSpc>
+              <a:buNone/>
+            </a:pPr>
+            <a:r>
+              <a:rPr lang="en-US" sz="950" dirty="0">
                 <a:solidFill>
                   <a:srgbClr val="24364B"/>
                 </a:solidFill>
@@ -6617,7 +7516,7 @@
               </a:rPr>
               <a:t>• Balanced panel (66 firms) is subset of full sample; may not be representative of all firms</a:t>
             </a:r>
-            <a:endParaRPr lang="en-US" sz="1000" dirty="0"/>
+            <a:endParaRPr lang="en-US" sz="950" dirty="0"/>
           </a:p>
         </p:txBody>
       </p:sp>
@@ -6635,7 +7534,7 @@
     <p:bg>
       <p:bgPr>
         <a:solidFill>
-          <a:srgbClr val="F3F8FD"/>
+          <a:srgbClr val="F5F8FB"/>
         </a:solidFill>
       </p:bgPr>
     </p:bg>
@@ -6662,19 +7561,19 @@
         <p:spPr>
           <a:xfrm>
             <a:off x="320040" y="182880"/>
-            <a:ext cx="914400" cy="228600"/>
+            <a:ext cx="1005840" cy="256032"/>
           </a:xfrm>
           <a:prstGeom prst="roundRect">
             <a:avLst>
-              <a:gd name="adj" fmla="val 16000"/>
+              <a:gd name="adj" fmla="val 21429"/>
             </a:avLst>
           </a:prstGeom>
           <a:solidFill>
-            <a:srgbClr val="DCEEFF"/>
+            <a:srgbClr val="0066CC"/>
           </a:solidFill>
           <a:ln w="12700">
             <a:solidFill>
-              <a:srgbClr val="DCEEFF"/>
+              <a:srgbClr val="0066CC"/>
             </a:solidFill>
             <a:prstDash val="solid"/>
           </a:ln>
@@ -6689,7 +7588,7 @@
         <p:spPr>
           <a:xfrm>
             <a:off x="320040" y="201168"/>
-            <a:ext cx="914400" cy="201168"/>
+            <a:ext cx="1005840" cy="219456"/>
           </a:xfrm>
           <a:prstGeom prst="rect">
             <a:avLst/>
@@ -6707,7 +7606,7 @@
             <a:r>
               <a:rPr lang="en-US" sz="800" b="1" dirty="0">
                 <a:solidFill>
-                  <a:srgbClr val="102A43"/>
+                  <a:srgbClr val="FFFFFF"/>
                 </a:solidFill>
                 <a:latin typeface="Trebuchet MS" pitchFamily="34" charset="0"/>
                 <a:ea typeface="Trebuchet MS" pitchFamily="34" charset="-122"/>
@@ -6721,14 +7620,34 @@
       </p:sp>
       <p:sp>
         <p:nvSpPr>
-          <p:cNvPr id="4" name="Text 2"/>
+          <p:cNvPr id="4" name="Shape 2"/>
           <p:cNvSpPr/>
           <p:nvPr/>
         </p:nvSpPr>
         <p:spPr>
           <a:xfrm>
-            <a:off x="320040" y="548640"/>
-            <a:ext cx="8503920" cy="365760"/>
+            <a:off x="320040" y="484632"/>
+            <a:ext cx="54864" cy="457200"/>
+          </a:xfrm>
+          <a:prstGeom prst="rect">
+            <a:avLst/>
+          </a:prstGeom>
+          <a:solidFill>
+            <a:srgbClr val="0066CC"/>
+          </a:solidFill>
+          <a:ln/>
+        </p:spPr>
+      </p:sp>
+      <p:sp>
+        <p:nvSpPr>
+          <p:cNvPr id="5" name="Text 3"/>
+          <p:cNvSpPr/>
+          <p:nvPr/>
+        </p:nvSpPr>
+        <p:spPr>
+          <a:xfrm>
+            <a:off x="457200" y="548640"/>
+            <a:ext cx="8366760" cy="365760"/>
           </a:xfrm>
           <a:prstGeom prst="rect">
             <a:avLst/>
@@ -6760,7 +7679,7 @@
       </p:sp>
       <p:sp>
         <p:nvSpPr>
-          <p:cNvPr id="5" name="Shape 3"/>
+          <p:cNvPr id="6" name="Shape 4"/>
           <p:cNvSpPr/>
           <p:nvPr/>
         </p:nvSpPr>
@@ -6771,7 +7690,7 @@
           </a:xfrm>
           <a:prstGeom prst="roundRect">
             <a:avLst>
-              <a:gd name="adj" fmla="val 1391"/>
+              <a:gd name="adj" fmla="val 2087"/>
             </a:avLst>
           </a:prstGeom>
           <a:solidFill>
@@ -6784,9 +7703,9 @@
             <a:prstDash val="solid"/>
           </a:ln>
           <a:effectLst>
-            <a:outerShdw sx="100000" sy="100000" kx="0" ky="0" algn="bl" rotWithShape="0" blurRad="38100" dist="50800" dir="2700000">
+            <a:outerShdw sx="100000" sy="100000" kx="0" ky="0" algn="bl" rotWithShape="0" blurRad="50800" dist="25400" dir="2700000">
               <a:srgbClr val="000000">
-                <a:alpha val="20000"/>
+                <a:alpha val="12000"/>
               </a:srgbClr>
             </a:outerShdw>
           </a:effectLst>
@@ -6794,14 +7713,14 @@
       </p:sp>
       <p:sp>
         <p:nvSpPr>
-          <p:cNvPr id="6" name="Text 4"/>
+          <p:cNvPr id="7" name="Text 5"/>
           <p:cNvSpPr/>
           <p:nvPr/>
         </p:nvSpPr>
         <p:spPr>
           <a:xfrm>
             <a:off x="594360" y="1234440"/>
-            <a:ext cx="7955280" cy="274320"/>
+            <a:ext cx="7955280" cy="256032"/>
           </a:xfrm>
           <a:prstGeom prst="rect">
             <a:avLst/>
@@ -6833,7 +7752,7 @@
       </p:sp>
       <p:sp>
         <p:nvSpPr>
-          <p:cNvPr id="7" name="Text 5"/>
+          <p:cNvPr id="8" name="Text 6"/>
           <p:cNvSpPr/>
           <p:nvPr/>
         </p:nvSpPr>
@@ -6853,10 +7772,13 @@
           <a:lstStyle/>
           <a:p>
             <a:pPr algn="l" indent="0" marL="0">
-              <a:buNone/>
-            </a:pPr>
-            <a:r>
-              <a:rPr lang="en-US" sz="1050" dirty="0">
+              <a:lnSpc>
+                <a:spcPts val="1600"/>
+              </a:lnSpc>
+              <a:buNone/>
+            </a:pPr>
+            <a:r>
+              <a:rPr lang="en-US" sz="1000" dirty="0">
                 <a:solidFill>
                   <a:srgbClr val="24364B"/>
                 </a:solidFill>
@@ -6866,14 +7788,17 @@
               </a:rPr>
               <a:t>• Baseline coefficient (lagged lobbying): β = –174.59 (SE = 116.93, p = 0.1354, N = 2,125)</a:t>
             </a:r>
-            <a:endParaRPr lang="en-US" sz="1050" dirty="0"/>
+            <a:endParaRPr lang="en-US" sz="1000" dirty="0"/>
           </a:p>
           <a:p>
             <a:pPr algn="l" indent="0" marL="0">
-              <a:buNone/>
-            </a:pPr>
-            <a:r>
-              <a:rPr lang="en-US" sz="1050" dirty="0">
+              <a:lnSpc>
+                <a:spcPts val="1600"/>
+              </a:lnSpc>
+              <a:buNone/>
+            </a:pPr>
+            <a:r>
+              <a:rPr lang="en-US" sz="1000" dirty="0">
                 <a:solidFill>
                   <a:srgbClr val="24364B"/>
                 </a:solidFill>
@@ -6883,14 +7808,17 @@
               </a:rPr>
               <a:t>• Economic interpretation: $1M increase in lobbying → 174.59 percentage-point decrease in ROA</a:t>
             </a:r>
-            <a:endParaRPr lang="en-US" sz="1050" dirty="0"/>
+            <a:endParaRPr lang="en-US" sz="1000" dirty="0"/>
           </a:p>
           <a:p>
             <a:pPr algn="l" indent="0" marL="0">
-              <a:buNone/>
-            </a:pPr>
-            <a:r>
-              <a:rPr lang="en-US" sz="1050" dirty="0">
+              <a:lnSpc>
+                <a:spcPts val="1600"/>
+              </a:lnSpc>
+              <a:buNone/>
+            </a:pPr>
+            <a:r>
+              <a:rPr lang="en-US" sz="1000" dirty="0">
                 <a:solidFill>
                   <a:srgbClr val="24364B"/>
                 </a:solidFill>
@@ -6900,14 +7828,17 @@
               </a:rPr>
               <a:t>• Equivalent: $100K increase → 17.46 percentage-point decline in ROA</a:t>
             </a:r>
-            <a:endParaRPr lang="en-US" sz="1050" dirty="0"/>
+            <a:endParaRPr lang="en-US" sz="1000" dirty="0"/>
           </a:p>
           <a:p>
             <a:pPr algn="l" indent="0" marL="0">
-              <a:buNone/>
-            </a:pPr>
-            <a:r>
-              <a:rPr lang="en-US" sz="1050" dirty="0">
+              <a:lnSpc>
+                <a:spcPts val="1600"/>
+              </a:lnSpc>
+              <a:buNone/>
+            </a:pPr>
+            <a:r>
+              <a:rPr lang="en-US" sz="1000" dirty="0">
                 <a:solidFill>
                   <a:srgbClr val="24364B"/>
                 </a:solidFill>
@@ -6917,14 +7848,17 @@
               </a:rPr>
               <a:t>• Not statistically significant at α = 0.05; 95% confidence interval includes zero</a:t>
             </a:r>
-            <a:endParaRPr lang="en-US" sz="1050" dirty="0"/>
+            <a:endParaRPr lang="en-US" sz="1000" dirty="0"/>
           </a:p>
           <a:p>
             <a:pPr algn="l" indent="0" marL="0">
-              <a:buNone/>
-            </a:pPr>
-            <a:r>
-              <a:rPr lang="en-US" sz="1050" dirty="0">
+              <a:lnSpc>
+                <a:spcPts val="1600"/>
+              </a:lnSpc>
+              <a:buNone/>
+            </a:pPr>
+            <a:r>
+              <a:rPr lang="en-US" sz="1000" dirty="0">
                 <a:solidFill>
                   <a:srgbClr val="24364B"/>
                 </a:solidFill>
@@ -6934,24 +7868,24 @@
               </a:rPr>
               <a:t>• Conclusion: Negative point estimate, but imprecise and not robust to specification changes</a:t>
             </a:r>
-            <a:endParaRPr lang="en-US" sz="1050" dirty="0"/>
+            <a:endParaRPr lang="en-US" sz="1000" dirty="0"/>
           </a:p>
         </p:txBody>
       </p:sp>
       <p:sp>
         <p:nvSpPr>
-          <p:cNvPr id="8" name="Shape 6"/>
+          <p:cNvPr id="9" name="Shape 7"/>
           <p:cNvSpPr/>
           <p:nvPr/>
         </p:nvSpPr>
         <p:spPr>
           <a:xfrm>
-            <a:off x="594360" y="5212080"/>
+            <a:off x="594360" y="5166360"/>
             <a:ext cx="7680960" cy="914400"/>
           </a:xfrm>
           <a:prstGeom prst="roundRect">
             <a:avLst>
-              <a:gd name="adj" fmla="val 8000"/>
+              <a:gd name="adj" fmla="val 10000"/>
             </a:avLst>
           </a:prstGeom>
           <a:solidFill>
@@ -6967,13 +7901,13 @@
       </p:sp>
       <p:sp>
         <p:nvSpPr>
-          <p:cNvPr id="9" name="Text 7"/>
+          <p:cNvPr id="10" name="Text 8"/>
           <p:cNvSpPr/>
           <p:nvPr/>
         </p:nvSpPr>
         <p:spPr>
           <a:xfrm>
-            <a:off x="731520" y="5303520"/>
+            <a:off x="731520" y="5257800"/>
             <a:ext cx="7406640" cy="731520"/>
           </a:xfrm>
           <a:prstGeom prst="rect">
@@ -6990,7 +7924,7 @@
               <a:buNone/>
             </a:pPr>
             <a:r>
-              <a:rPr lang="en-US" sz="1000" dirty="0">
+              <a:rPr lang="en-US" sz="950" dirty="0">
                 <a:solidFill>
                   <a:srgbClr val="24364B"/>
                 </a:solidFill>
@@ -7000,7 +7934,7 @@
               </a:rPr>
               <a:t>⚠ Key Finding: Evidence for negative association is weaker than EDA's positive findings, suggesting alternative mechanisms or model sensitivity.</a:t>
             </a:r>
-            <a:endParaRPr lang="en-US" sz="1000" dirty="0"/>
+            <a:endParaRPr lang="en-US" sz="950" dirty="0"/>
           </a:p>
         </p:txBody>
       </p:sp>
@@ -7018,7 +7952,7 @@
     <p:bg>
       <p:bgPr>
         <a:solidFill>
-          <a:srgbClr val="F3F8FD"/>
+          <a:srgbClr val="F5F8FB"/>
         </a:solidFill>
       </p:bgPr>
     </p:bg>
@@ -7045,19 +7979,19 @@
         <p:spPr>
           <a:xfrm>
             <a:off x="320040" y="182880"/>
-            <a:ext cx="914400" cy="228600"/>
+            <a:ext cx="1005840" cy="256032"/>
           </a:xfrm>
           <a:prstGeom prst="roundRect">
             <a:avLst>
-              <a:gd name="adj" fmla="val 16000"/>
+              <a:gd name="adj" fmla="val 21429"/>
             </a:avLst>
           </a:prstGeom>
           <a:solidFill>
-            <a:srgbClr val="DCEEFF"/>
+            <a:srgbClr val="0066CC"/>
           </a:solidFill>
           <a:ln w="12700">
             <a:solidFill>
-              <a:srgbClr val="DCEEFF"/>
+              <a:srgbClr val="0066CC"/>
             </a:solidFill>
             <a:prstDash val="solid"/>
           </a:ln>
@@ -7072,7 +8006,7 @@
         <p:spPr>
           <a:xfrm>
             <a:off x="320040" y="201168"/>
-            <a:ext cx="914400" cy="201168"/>
+            <a:ext cx="1005840" cy="219456"/>
           </a:xfrm>
           <a:prstGeom prst="rect">
             <a:avLst/>
@@ -7090,7 +8024,7 @@
             <a:r>
               <a:rPr lang="en-US" sz="800" b="1" dirty="0">
                 <a:solidFill>
-                  <a:srgbClr val="102A43"/>
+                  <a:srgbClr val="FFFFFF"/>
                 </a:solidFill>
                 <a:latin typeface="Trebuchet MS" pitchFamily="34" charset="0"/>
                 <a:ea typeface="Trebuchet MS" pitchFamily="34" charset="-122"/>
@@ -7104,14 +8038,34 @@
       </p:sp>
       <p:sp>
         <p:nvSpPr>
-          <p:cNvPr id="4" name="Text 2"/>
+          <p:cNvPr id="4" name="Shape 2"/>
           <p:cNvSpPr/>
           <p:nvPr/>
         </p:nvSpPr>
         <p:spPr>
           <a:xfrm>
-            <a:off x="320040" y="548640"/>
-            <a:ext cx="8503920" cy="365760"/>
+            <a:off x="320040" y="484632"/>
+            <a:ext cx="54864" cy="457200"/>
+          </a:xfrm>
+          <a:prstGeom prst="rect">
+            <a:avLst/>
+          </a:prstGeom>
+          <a:solidFill>
+            <a:srgbClr val="0066CC"/>
+          </a:solidFill>
+          <a:ln/>
+        </p:spPr>
+      </p:sp>
+      <p:sp>
+        <p:nvSpPr>
+          <p:cNvPr id="5" name="Text 3"/>
+          <p:cNvSpPr/>
+          <p:nvPr/>
+        </p:nvSpPr>
+        <p:spPr>
+          <a:xfrm>
+            <a:off x="457200" y="548640"/>
+            <a:ext cx="8366760" cy="365760"/>
           </a:xfrm>
           <a:prstGeom prst="rect">
             <a:avLst/>
@@ -7180,7 +8134,7 @@
                         <a:buNone/>
                       </a:pPr>
                       <a:r>
-                        <a:rPr lang="en-US" sz="900" dirty="0">
+                        <a:rPr lang="en-US" sz="850" dirty="0">
                           <a:solidFill>
                             <a:srgbClr val="000000"/>
                           </a:solidFill>
@@ -7190,7 +8144,7 @@
                         </a:rPr>
                         <a:t>Specification</a:t>
                       </a:r>
-                      <a:endParaRPr lang="en-US" sz="900" dirty="0">
+                      <a:endParaRPr lang="en-US" sz="850" dirty="0">
                         <a:latin typeface="Aptos" charset="0"/>
                         <a:ea typeface="Aptos" charset="0"/>
                         <a:cs typeface="Aptos" charset="0"/>
@@ -7248,7 +8202,7 @@
                         <a:buNone/>
                       </a:pPr>
                       <a:r>
-                        <a:rPr lang="en-US" sz="900" dirty="0">
+                        <a:rPr lang="en-US" sz="850" dirty="0">
                           <a:solidFill>
                             <a:srgbClr val="000000"/>
                           </a:solidFill>
@@ -7258,7 +8212,7 @@
                         </a:rPr>
                         <a:t>Coefficient</a:t>
                       </a:r>
-                      <a:endParaRPr lang="en-US" sz="900" dirty="0">
+                      <a:endParaRPr lang="en-US" sz="850" dirty="0">
                         <a:latin typeface="Aptos" charset="0"/>
                         <a:ea typeface="Aptos" charset="0"/>
                         <a:cs typeface="Aptos" charset="0"/>
@@ -7316,7 +8270,7 @@
                         <a:buNone/>
                       </a:pPr>
                       <a:r>
-                        <a:rPr lang="en-US" sz="900" dirty="0">
+                        <a:rPr lang="en-US" sz="850" dirty="0">
                           <a:solidFill>
                             <a:srgbClr val="000000"/>
                           </a:solidFill>
@@ -7326,7 +8280,7 @@
                         </a:rPr>
                         <a:t>SE</a:t>
                       </a:r>
-                      <a:endParaRPr lang="en-US" sz="900" dirty="0">
+                      <a:endParaRPr lang="en-US" sz="850" dirty="0">
                         <a:latin typeface="Aptos" charset="0"/>
                         <a:ea typeface="Aptos" charset="0"/>
                         <a:cs typeface="Aptos" charset="0"/>
@@ -7384,7 +8338,7 @@
                         <a:buNone/>
                       </a:pPr>
                       <a:r>
-                        <a:rPr lang="en-US" sz="900" dirty="0">
+                        <a:rPr lang="en-US" sz="850" dirty="0">
                           <a:solidFill>
                             <a:srgbClr val="000000"/>
                           </a:solidFill>
@@ -7394,7 +8348,7 @@
                         </a:rPr>
                         <a:t>p-value</a:t>
                       </a:r>
-                      <a:endParaRPr lang="en-US" sz="900" dirty="0">
+                      <a:endParaRPr lang="en-US" sz="850" dirty="0">
                         <a:latin typeface="Aptos" charset="0"/>
                         <a:ea typeface="Aptos" charset="0"/>
                         <a:cs typeface="Aptos" charset="0"/>
@@ -7452,7 +8406,7 @@
                         <a:buNone/>
                       </a:pPr>
                       <a:r>
-                        <a:rPr lang="en-US" sz="900" dirty="0">
+                        <a:rPr lang="en-US" sz="850" dirty="0">
                           <a:solidFill>
                             <a:srgbClr val="000000"/>
                           </a:solidFill>
@@ -7462,7 +8416,7 @@
                         </a:rPr>
                         <a:t>N</a:t>
                       </a:r>
-                      <a:endParaRPr lang="en-US" sz="900" dirty="0">
+                      <a:endParaRPr lang="en-US" sz="850" dirty="0">
                         <a:latin typeface="Aptos" charset="0"/>
                         <a:ea typeface="Aptos" charset="0"/>
                         <a:cs typeface="Aptos" charset="0"/>
@@ -7522,7 +8476,7 @@
                         <a:buNone/>
                       </a:pPr>
                       <a:r>
-                        <a:rPr lang="en-US" sz="900" dirty="0">
+                        <a:rPr lang="en-US" sz="850" dirty="0">
                           <a:solidFill>
                             <a:srgbClr val="000000"/>
                           </a:solidFill>
@@ -7532,7 +8486,7 @@
                         </a:rPr>
                         <a:t>Baseline (Lag 1)</a:t>
                       </a:r>
-                      <a:endParaRPr lang="en-US" sz="900" dirty="0">
+                      <a:endParaRPr lang="en-US" sz="850" dirty="0">
                         <a:latin typeface="Aptos" charset="0"/>
                         <a:ea typeface="Aptos" charset="0"/>
                         <a:cs typeface="Aptos" charset="0"/>
@@ -7590,7 +8544,7 @@
                         <a:buNone/>
                       </a:pPr>
                       <a:r>
-                        <a:rPr lang="en-US" sz="900" dirty="0">
+                        <a:rPr lang="en-US" sz="850" dirty="0">
                           <a:solidFill>
                             <a:srgbClr val="000000"/>
                           </a:solidFill>
@@ -7600,7 +8554,7 @@
                         </a:rPr>
                         <a:t>–174.59</a:t>
                       </a:r>
-                      <a:endParaRPr lang="en-US" sz="900" dirty="0">
+                      <a:endParaRPr lang="en-US" sz="850" dirty="0">
                         <a:latin typeface="Aptos" charset="0"/>
                         <a:ea typeface="Aptos" charset="0"/>
                         <a:cs typeface="Aptos" charset="0"/>
@@ -7658,7 +8612,7 @@
                         <a:buNone/>
                       </a:pPr>
                       <a:r>
-                        <a:rPr lang="en-US" sz="900" dirty="0">
+                        <a:rPr lang="en-US" sz="850" dirty="0">
                           <a:solidFill>
                             <a:srgbClr val="000000"/>
                           </a:solidFill>
@@ -7668,7 +8622,7 @@
                         </a:rPr>
                         <a:t>116.93</a:t>
                       </a:r>
-                      <a:endParaRPr lang="en-US" sz="900" dirty="0">
+                      <a:endParaRPr lang="en-US" sz="850" dirty="0">
                         <a:latin typeface="Aptos" charset="0"/>
                         <a:ea typeface="Aptos" charset="0"/>
                         <a:cs typeface="Aptos" charset="0"/>
@@ -7726,7 +8680,7 @@
                         <a:buNone/>
                       </a:pPr>
                       <a:r>
-                        <a:rPr lang="en-US" sz="900" dirty="0">
+                        <a:rPr lang="en-US" sz="850" dirty="0">
                           <a:solidFill>
                             <a:srgbClr val="000000"/>
                           </a:solidFill>
@@ -7736,7 +8690,7 @@
                         </a:rPr>
                         <a:t>0.1354</a:t>
                       </a:r>
-                      <a:endParaRPr lang="en-US" sz="900" dirty="0">
+                      <a:endParaRPr lang="en-US" sz="850" dirty="0">
                         <a:latin typeface="Aptos" charset="0"/>
                         <a:ea typeface="Aptos" charset="0"/>
                         <a:cs typeface="Aptos" charset="0"/>
@@ -7794,7 +8748,7 @@
                         <a:buNone/>
                       </a:pPr>
                       <a:r>
-                        <a:rPr lang="en-US" sz="900" dirty="0">
+                        <a:rPr lang="en-US" sz="850" dirty="0">
                           <a:solidFill>
                             <a:srgbClr val="000000"/>
                           </a:solidFill>
@@ -7804,7 +8758,7 @@
                         </a:rPr>
                         <a:t>2,125</a:t>
                       </a:r>
-                      <a:endParaRPr lang="en-US" sz="900" dirty="0">
+                      <a:endParaRPr lang="en-US" sz="850" dirty="0">
                         <a:latin typeface="Aptos" charset="0"/>
                         <a:ea typeface="Aptos" charset="0"/>
                         <a:cs typeface="Aptos" charset="0"/>
@@ -7864,7 +8818,7 @@
                         <a:buNone/>
                       </a:pPr>
                       <a:r>
-                        <a:rPr lang="en-US" sz="900" dirty="0">
+                        <a:rPr lang="en-US" sz="850" dirty="0">
                           <a:solidFill>
                             <a:srgbClr val="000000"/>
                           </a:solidFill>
@@ -7874,7 +8828,7 @@
                         </a:rPr>
                         <a:t>Lag 2</a:t>
                       </a:r>
-                      <a:endParaRPr lang="en-US" sz="900" dirty="0">
+                      <a:endParaRPr lang="en-US" sz="850" dirty="0">
                         <a:latin typeface="Aptos" charset="0"/>
                         <a:ea typeface="Aptos" charset="0"/>
                         <a:cs typeface="Aptos" charset="0"/>
@@ -7932,7 +8886,7 @@
                         <a:buNone/>
                       </a:pPr>
                       <a:r>
-                        <a:rPr lang="en-US" sz="900" dirty="0">
+                        <a:rPr lang="en-US" sz="850" dirty="0">
                           <a:solidFill>
                             <a:srgbClr val="000000"/>
                           </a:solidFill>
@@ -7942,7 +8896,7 @@
                         </a:rPr>
                         <a:t>–95.35</a:t>
                       </a:r>
-                      <a:endParaRPr lang="en-US" sz="900" dirty="0">
+                      <a:endParaRPr lang="en-US" sz="850" dirty="0">
                         <a:latin typeface="Aptos" charset="0"/>
                         <a:ea typeface="Aptos" charset="0"/>
                         <a:cs typeface="Aptos" charset="0"/>
@@ -8000,7 +8954,7 @@
                         <a:buNone/>
                       </a:pPr>
                       <a:r>
-                        <a:rPr lang="en-US" sz="900" dirty="0">
+                        <a:rPr lang="en-US" sz="850" dirty="0">
                           <a:solidFill>
                             <a:srgbClr val="000000"/>
                           </a:solidFill>
@@ -8010,7 +8964,7 @@
                         </a:rPr>
                         <a:t>86.70</a:t>
                       </a:r>
-                      <a:endParaRPr lang="en-US" sz="900" dirty="0">
+                      <a:endParaRPr lang="en-US" sz="850" dirty="0">
                         <a:latin typeface="Aptos" charset="0"/>
                         <a:ea typeface="Aptos" charset="0"/>
                         <a:cs typeface="Aptos" charset="0"/>
@@ -8068,7 +9022,7 @@
                         <a:buNone/>
                       </a:pPr>
                       <a:r>
-                        <a:rPr lang="en-US" sz="900" dirty="0">
+                        <a:rPr lang="en-US" sz="850" dirty="0">
                           <a:solidFill>
                             <a:srgbClr val="000000"/>
                           </a:solidFill>
@@ -8078,7 +9032,7 @@
                         </a:rPr>
                         <a:t>0.2715</a:t>
                       </a:r>
-                      <a:endParaRPr lang="en-US" sz="900" dirty="0">
+                      <a:endParaRPr lang="en-US" sz="850" dirty="0">
                         <a:latin typeface="Aptos" charset="0"/>
                         <a:ea typeface="Aptos" charset="0"/>
                         <a:cs typeface="Aptos" charset="0"/>
@@ -8136,7 +9090,7 @@
                         <a:buNone/>
                       </a:pPr>
                       <a:r>
-                        <a:rPr lang="en-US" sz="900" dirty="0">
+                        <a:rPr lang="en-US" sz="850" dirty="0">
                           <a:solidFill>
                             <a:srgbClr val="000000"/>
                           </a:solidFill>
@@ -8146,7 +9100,7 @@
                         </a:rPr>
                         <a:t>1,700</a:t>
                       </a:r>
-                      <a:endParaRPr lang="en-US" sz="900" dirty="0">
+                      <a:endParaRPr lang="en-US" sz="850" dirty="0">
                         <a:latin typeface="Aptos" charset="0"/>
                         <a:ea typeface="Aptos" charset="0"/>
                         <a:cs typeface="Aptos" charset="0"/>
@@ -8206,7 +9160,7 @@
                         <a:buNone/>
                       </a:pPr>
                       <a:r>
-                        <a:rPr lang="en-US" sz="900" dirty="0">
+                        <a:rPr lang="en-US" sz="850" dirty="0">
                           <a:solidFill>
                             <a:srgbClr val="000000"/>
                           </a:solidFill>
@@ -8216,7 +9170,7 @@
                         </a:rPr>
                         <a:t>Lag 3</a:t>
                       </a:r>
-                      <a:endParaRPr lang="en-US" sz="900" dirty="0">
+                      <a:endParaRPr lang="en-US" sz="850" dirty="0">
                         <a:latin typeface="Aptos" charset="0"/>
                         <a:ea typeface="Aptos" charset="0"/>
                         <a:cs typeface="Aptos" charset="0"/>
@@ -8274,7 +9228,7 @@
                         <a:buNone/>
                       </a:pPr>
                       <a:r>
-                        <a:rPr lang="en-US" sz="900" dirty="0">
+                        <a:rPr lang="en-US" sz="850" dirty="0">
                           <a:solidFill>
                             <a:srgbClr val="000000"/>
                           </a:solidFill>
@@ -8284,7 +9238,7 @@
                         </a:rPr>
                         <a:t>38.47</a:t>
                       </a:r>
-                      <a:endParaRPr lang="en-US" sz="900" dirty="0">
+                      <a:endParaRPr lang="en-US" sz="850" dirty="0">
                         <a:latin typeface="Aptos" charset="0"/>
                         <a:ea typeface="Aptos" charset="0"/>
                         <a:cs typeface="Aptos" charset="0"/>
@@ -8342,7 +9296,7 @@
                         <a:buNone/>
                       </a:pPr>
                       <a:r>
-                        <a:rPr lang="en-US" sz="900" dirty="0">
+                        <a:rPr lang="en-US" sz="850" dirty="0">
                           <a:solidFill>
                             <a:srgbClr val="000000"/>
                           </a:solidFill>
@@ -8352,7 +9306,7 @@
                         </a:rPr>
                         <a:t>84.26</a:t>
                       </a:r>
-                      <a:endParaRPr lang="en-US" sz="900" dirty="0">
+                      <a:endParaRPr lang="en-US" sz="850" dirty="0">
                         <a:latin typeface="Aptos" charset="0"/>
                         <a:ea typeface="Aptos" charset="0"/>
                         <a:cs typeface="Aptos" charset="0"/>
@@ -8410,7 +9364,7 @@
                         <a:buNone/>
                       </a:pPr>
                       <a:r>
-                        <a:rPr lang="en-US" sz="900" dirty="0">
+                        <a:rPr lang="en-US" sz="850" dirty="0">
                           <a:solidFill>
                             <a:srgbClr val="000000"/>
                           </a:solidFill>
@@ -8420,7 +9374,7 @@
                         </a:rPr>
                         <a:t>0.6480</a:t>
                       </a:r>
-                      <a:endParaRPr lang="en-US" sz="900" dirty="0">
+                      <a:endParaRPr lang="en-US" sz="850" dirty="0">
                         <a:latin typeface="Aptos" charset="0"/>
                         <a:ea typeface="Aptos" charset="0"/>
                         <a:cs typeface="Aptos" charset="0"/>
@@ -8478,7 +9432,7 @@
                         <a:buNone/>
                       </a:pPr>
                       <a:r>
-                        <a:rPr lang="en-US" sz="900" dirty="0">
+                        <a:rPr lang="en-US" sz="850" dirty="0">
                           <a:solidFill>
                             <a:srgbClr val="000000"/>
                           </a:solidFill>
@@ -8488,7 +9442,7 @@
                         </a:rPr>
                         <a:t>1,372</a:t>
                       </a:r>
-                      <a:endParaRPr lang="en-US" sz="900" dirty="0">
+                      <a:endParaRPr lang="en-US" sz="850" dirty="0">
                         <a:latin typeface="Aptos" charset="0"/>
                         <a:ea typeface="Aptos" charset="0"/>
                         <a:cs typeface="Aptos" charset="0"/>
@@ -8548,7 +9502,7 @@
                         <a:buNone/>
                       </a:pPr>
                       <a:r>
-                        <a:rPr lang="en-US" sz="900" dirty="0">
+                        <a:rPr lang="en-US" sz="850" dirty="0">
                           <a:solidFill>
                             <a:srgbClr val="000000"/>
                           </a:solidFill>
@@ -8558,7 +9512,7 @@
                         </a:rPr>
                         <a:t>Lead 1 (Placebo)</a:t>
                       </a:r>
-                      <a:endParaRPr lang="en-US" sz="900" dirty="0">
+                      <a:endParaRPr lang="en-US" sz="850" dirty="0">
                         <a:latin typeface="Aptos" charset="0"/>
                         <a:ea typeface="Aptos" charset="0"/>
                         <a:cs typeface="Aptos" charset="0"/>
@@ -8616,7 +9570,7 @@
                         <a:buNone/>
                       </a:pPr>
                       <a:r>
-                        <a:rPr lang="en-US" sz="900" dirty="0">
+                        <a:rPr lang="en-US" sz="850" dirty="0">
                           <a:solidFill>
                             <a:srgbClr val="000000"/>
                           </a:solidFill>
@@ -8626,7 +9580,7 @@
                         </a:rPr>
                         <a:t>–302.73</a:t>
                       </a:r>
-                      <a:endParaRPr lang="en-US" sz="900" dirty="0">
+                      <a:endParaRPr lang="en-US" sz="850" dirty="0">
                         <a:latin typeface="Aptos" charset="0"/>
                         <a:ea typeface="Aptos" charset="0"/>
                         <a:cs typeface="Aptos" charset="0"/>
@@ -8684,7 +9638,7 @@
                         <a:buNone/>
                       </a:pPr>
                       <a:r>
-                        <a:rPr lang="en-US" sz="900" dirty="0">
+                        <a:rPr lang="en-US" sz="850" dirty="0">
                           <a:solidFill>
                             <a:srgbClr val="000000"/>
                           </a:solidFill>
@@ -8694,7 +9648,7 @@
                         </a:rPr>
                         <a:t>166.41</a:t>
                       </a:r>
-                      <a:endParaRPr lang="en-US" sz="900" dirty="0">
+                      <a:endParaRPr lang="en-US" sz="850" dirty="0">
                         <a:latin typeface="Aptos" charset="0"/>
                         <a:ea typeface="Aptos" charset="0"/>
                         <a:cs typeface="Aptos" charset="0"/>
@@ -8752,7 +9706,7 @@
                         <a:buNone/>
                       </a:pPr>
                       <a:r>
-                        <a:rPr lang="en-US" sz="900" dirty="0">
+                        <a:rPr lang="en-US" sz="850" dirty="0">
                           <a:solidFill>
                             <a:srgbClr val="000000"/>
                           </a:solidFill>
@@ -8762,7 +9716,7 @@
                         </a:rPr>
                         <a:t>0.0689</a:t>
                       </a:r>
-                      <a:endParaRPr lang="en-US" sz="900" dirty="0">
+                      <a:endParaRPr lang="en-US" sz="850" dirty="0">
                         <a:latin typeface="Aptos" charset="0"/>
                         <a:ea typeface="Aptos" charset="0"/>
                         <a:cs typeface="Aptos" charset="0"/>
@@ -8820,7 +9774,7 @@
                         <a:buNone/>
                       </a:pPr>
                       <a:r>
-                        <a:rPr lang="en-US" sz="900" dirty="0">
+                        <a:rPr lang="en-US" sz="850" dirty="0">
                           <a:solidFill>
                             <a:srgbClr val="000000"/>
                           </a:solidFill>
@@ -8830,7 +9784,7 @@
                         </a:rPr>
                         <a:t>2,129</a:t>
                       </a:r>
-                      <a:endParaRPr lang="en-US" sz="900" dirty="0">
+                      <a:endParaRPr lang="en-US" sz="850" dirty="0">
                         <a:latin typeface="Aptos" charset="0"/>
                         <a:ea typeface="Aptos" charset="0"/>
                         <a:cs typeface="Aptos" charset="0"/>
@@ -8890,7 +9844,7 @@
                         <a:buNone/>
                       </a:pPr>
                       <a:r>
-                        <a:rPr lang="en-US" sz="900" dirty="0">
+                        <a:rPr lang="en-US" sz="850" dirty="0">
                           <a:solidFill>
                             <a:srgbClr val="000000"/>
                           </a:solidFill>
@@ -8900,7 +9854,7 @@
                         </a:rPr>
                         <a:t>Excluding 2020</a:t>
                       </a:r>
-                      <a:endParaRPr lang="en-US" sz="900" dirty="0">
+                      <a:endParaRPr lang="en-US" sz="850" dirty="0">
                         <a:latin typeface="Aptos" charset="0"/>
                         <a:ea typeface="Aptos" charset="0"/>
                         <a:cs typeface="Aptos" charset="0"/>
@@ -8958,7 +9912,7 @@
                         <a:buNone/>
                       </a:pPr>
                       <a:r>
-                        <a:rPr lang="en-US" sz="900" dirty="0">
+                        <a:rPr lang="en-US" sz="850" dirty="0">
                           <a:solidFill>
                             <a:srgbClr val="000000"/>
                           </a:solidFill>
@@ -8968,7 +9922,7 @@
                         </a:rPr>
                         <a:t>–109.19</a:t>
                       </a:r>
-                      <a:endParaRPr lang="en-US" sz="900" dirty="0">
+                      <a:endParaRPr lang="en-US" sz="850" dirty="0">
                         <a:latin typeface="Aptos" charset="0"/>
                         <a:ea typeface="Aptos" charset="0"/>
                         <a:cs typeface="Aptos" charset="0"/>
@@ -9026,7 +9980,7 @@
                         <a:buNone/>
                       </a:pPr>
                       <a:r>
-                        <a:rPr lang="en-US" sz="900" dirty="0">
+                        <a:rPr lang="en-US" sz="850" dirty="0">
                           <a:solidFill>
                             <a:srgbClr val="000000"/>
                           </a:solidFill>
@@ -9036,7 +9990,7 @@
                         </a:rPr>
                         <a:t>72.22</a:t>
                       </a:r>
-                      <a:endParaRPr lang="en-US" sz="900" dirty="0">
+                      <a:endParaRPr lang="en-US" sz="850" dirty="0">
                         <a:latin typeface="Aptos" charset="0"/>
                         <a:ea typeface="Aptos" charset="0"/>
                         <a:cs typeface="Aptos" charset="0"/>
@@ -9094,7 +10048,7 @@
                         <a:buNone/>
                       </a:pPr>
                       <a:r>
-                        <a:rPr lang="en-US" sz="900" dirty="0">
+                        <a:rPr lang="en-US" sz="850" dirty="0">
                           <a:solidFill>
                             <a:srgbClr val="000000"/>
                           </a:solidFill>
@@ -9104,7 +10058,7 @@
                         </a:rPr>
                         <a:t>0.1305</a:t>
                       </a:r>
-                      <a:endParaRPr lang="en-US" sz="900" dirty="0">
+                      <a:endParaRPr lang="en-US" sz="850" dirty="0">
                         <a:latin typeface="Aptos" charset="0"/>
                         <a:ea typeface="Aptos" charset="0"/>
                         <a:cs typeface="Aptos" charset="0"/>
@@ -9162,7 +10116,7 @@
                         <a:buNone/>
                       </a:pPr>
                       <a:r>
-                        <a:rPr lang="en-US" sz="900" dirty="0">
+                        <a:rPr lang="en-US" sz="850" dirty="0">
                           <a:solidFill>
                             <a:srgbClr val="000000"/>
                           </a:solidFill>
@@ -9172,7 +10126,7 @@
                         </a:rPr>
                         <a:t>1,911</a:t>
                       </a:r>
-                      <a:endParaRPr lang="en-US" sz="900" dirty="0">
+                      <a:endParaRPr lang="en-US" sz="850" dirty="0">
                         <a:latin typeface="Aptos" charset="0"/>
                         <a:ea typeface="Aptos" charset="0"/>
                         <a:cs typeface="Aptos" charset="0"/>
@@ -9232,7 +10186,7 @@
                         <a:buNone/>
                       </a:pPr>
                       <a:r>
-                        <a:rPr lang="en-US" sz="900" dirty="0">
+                        <a:rPr lang="en-US" sz="850" dirty="0">
                           <a:solidFill>
                             <a:srgbClr val="000000"/>
                           </a:solidFill>
@@ -9242,7 +10196,7 @@
                         </a:rPr>
                         <a:t>Small Firms</a:t>
                       </a:r>
-                      <a:endParaRPr lang="en-US" sz="900" dirty="0">
+                      <a:endParaRPr lang="en-US" sz="850" dirty="0">
                         <a:latin typeface="Aptos" charset="0"/>
                         <a:ea typeface="Aptos" charset="0"/>
                         <a:cs typeface="Aptos" charset="0"/>
@@ -9300,7 +10254,7 @@
                         <a:buNone/>
                       </a:pPr>
                       <a:r>
-                        <a:rPr lang="en-US" sz="900" dirty="0">
+                        <a:rPr lang="en-US" sz="850" dirty="0">
                           <a:solidFill>
                             <a:srgbClr val="000000"/>
                           </a:solidFill>
@@ -9310,7 +10264,7 @@
                         </a:rPr>
                         <a:t>–5,753.85</a:t>
                       </a:r>
-                      <a:endParaRPr lang="en-US" sz="900" dirty="0">
+                      <a:endParaRPr lang="en-US" sz="850" dirty="0">
                         <a:latin typeface="Aptos" charset="0"/>
                         <a:ea typeface="Aptos" charset="0"/>
                         <a:cs typeface="Aptos" charset="0"/>
@@ -9368,7 +10322,7 @@
                         <a:buNone/>
                       </a:pPr>
                       <a:r>
-                        <a:rPr lang="en-US" sz="900" dirty="0">
+                        <a:rPr lang="en-US" sz="850" dirty="0">
                           <a:solidFill>
                             <a:srgbClr val="000000"/>
                           </a:solidFill>
@@ -9378,7 +10332,7 @@
                         </a:rPr>
                         <a:t>4,059.05</a:t>
                       </a:r>
-                      <a:endParaRPr lang="en-US" sz="900" dirty="0">
+                      <a:endParaRPr lang="en-US" sz="850" dirty="0">
                         <a:latin typeface="Aptos" charset="0"/>
                         <a:ea typeface="Aptos" charset="0"/>
                         <a:cs typeface="Aptos" charset="0"/>
@@ -9436,7 +10390,7 @@
                         <a:buNone/>
                       </a:pPr>
                       <a:r>
-                        <a:rPr lang="en-US" sz="900" dirty="0">
+                        <a:rPr lang="en-US" sz="850" dirty="0">
                           <a:solidFill>
                             <a:srgbClr val="000000"/>
                           </a:solidFill>
@@ -9446,7 +10400,7 @@
                         </a:rPr>
                         <a:t>0.1563</a:t>
                       </a:r>
-                      <a:endParaRPr lang="en-US" sz="900" dirty="0">
+                      <a:endParaRPr lang="en-US" sz="850" dirty="0">
                         <a:latin typeface="Aptos" charset="0"/>
                         <a:ea typeface="Aptos" charset="0"/>
                         <a:cs typeface="Aptos" charset="0"/>
@@ -9504,7 +10458,7 @@
                         <a:buNone/>
                       </a:pPr>
                       <a:r>
-                        <a:rPr lang="en-US" sz="900" dirty="0">
+                        <a:rPr lang="en-US" sz="850" dirty="0">
                           <a:solidFill>
                             <a:srgbClr val="000000"/>
                           </a:solidFill>
@@ -9514,7 +10468,7 @@
                         </a:rPr>
                         <a:t>671</a:t>
                       </a:r>
-                      <a:endParaRPr lang="en-US" sz="900" dirty="0">
+                      <a:endParaRPr lang="en-US" sz="850" dirty="0">
                         <a:latin typeface="Aptos" charset="0"/>
                         <a:ea typeface="Aptos" charset="0"/>
                         <a:cs typeface="Aptos" charset="0"/>
@@ -9574,7 +10528,7 @@
                         <a:buNone/>
                       </a:pPr>
                       <a:r>
-                        <a:rPr lang="en-US" sz="900" dirty="0">
+                        <a:rPr lang="en-US" sz="850" dirty="0">
                           <a:solidFill>
                             <a:srgbClr val="000000"/>
                           </a:solidFill>
@@ -9584,7 +10538,7 @@
                         </a:rPr>
                         <a:t>Large Firms</a:t>
                       </a:r>
-                      <a:endParaRPr lang="en-US" sz="900" dirty="0">
+                      <a:endParaRPr lang="en-US" sz="850" dirty="0">
                         <a:latin typeface="Aptos" charset="0"/>
                         <a:ea typeface="Aptos" charset="0"/>
                         <a:cs typeface="Aptos" charset="0"/>
@@ -9642,7 +10596,7 @@
                         <a:buNone/>
                       </a:pPr>
                       <a:r>
-                        <a:rPr lang="en-US" sz="900" dirty="0">
+                        <a:rPr lang="en-US" sz="850" dirty="0">
                           <a:solidFill>
                             <a:srgbClr val="000000"/>
                           </a:solidFill>
@@ -9652,7 +10606,7 @@
                         </a:rPr>
                         <a:t>–24.09</a:t>
                       </a:r>
-                      <a:endParaRPr lang="en-US" sz="900" dirty="0">
+                      <a:endParaRPr lang="en-US" sz="850" dirty="0">
                         <a:latin typeface="Aptos" charset="0"/>
                         <a:ea typeface="Aptos" charset="0"/>
                         <a:cs typeface="Aptos" charset="0"/>
@@ -9710,7 +10664,7 @@
                         <a:buNone/>
                       </a:pPr>
                       <a:r>
-                        <a:rPr lang="en-US" sz="900" dirty="0">
+                        <a:rPr lang="en-US" sz="850" dirty="0">
                           <a:solidFill>
                             <a:srgbClr val="000000"/>
                           </a:solidFill>
@@ -9720,7 +10674,7 @@
                         </a:rPr>
                         <a:t>5.25</a:t>
                       </a:r>
-                      <a:endParaRPr lang="en-US" sz="900" dirty="0">
+                      <a:endParaRPr lang="en-US" sz="850" dirty="0">
                         <a:latin typeface="Aptos" charset="0"/>
                         <a:ea typeface="Aptos" charset="0"/>
                         <a:cs typeface="Aptos" charset="0"/>
@@ -9778,7 +10732,7 @@
                         <a:buNone/>
                       </a:pPr>
                       <a:r>
-                        <a:rPr lang="en-US" sz="900" dirty="0">
+                        <a:rPr lang="en-US" sz="850" dirty="0">
                           <a:solidFill>
                             <a:srgbClr val="000000"/>
                           </a:solidFill>
@@ -9788,7 +10742,7 @@
                         </a:rPr>
                         <a:t>0.0000</a:t>
                       </a:r>
-                      <a:endParaRPr lang="en-US" sz="900" dirty="0">
+                      <a:endParaRPr lang="en-US" sz="850" dirty="0">
                         <a:latin typeface="Aptos" charset="0"/>
                         <a:ea typeface="Aptos" charset="0"/>
                         <a:cs typeface="Aptos" charset="0"/>
@@ -9846,7 +10800,7 @@
                         <a:buNone/>
                       </a:pPr>
                       <a:r>
-                        <a:rPr lang="en-US" sz="900" dirty="0">
+                        <a:rPr lang="en-US" sz="850" dirty="0">
                           <a:solidFill>
                             <a:srgbClr val="000000"/>
                           </a:solidFill>
@@ -9856,7 +10810,7 @@
                         </a:rPr>
                         <a:t>1,454</a:t>
                       </a:r>
-                      <a:endParaRPr lang="en-US" sz="900" dirty="0">
+                      <a:endParaRPr lang="en-US" sz="850" dirty="0">
                         <a:latin typeface="Aptos" charset="0"/>
                         <a:ea typeface="Aptos" charset="0"/>
                         <a:cs typeface="Aptos" charset="0"/>
@@ -9912,7 +10866,7 @@
       </p:graphicFrame>
       <p:sp>
         <p:nvSpPr>
-          <p:cNvPr id="6" name="Text 3"/>
+          <p:cNvPr id="7" name="Text 4"/>
           <p:cNvSpPr/>
           <p:nvPr/>
         </p:nvSpPr>
@@ -9951,7 +10905,7 @@
       </p:sp>
       <p:sp>
         <p:nvSpPr>
-          <p:cNvPr id="7" name="Text 4"/>
+          <p:cNvPr id="8" name="Text 5"/>
           <p:cNvSpPr/>
           <p:nvPr/>
         </p:nvSpPr>
@@ -9971,10 +10925,13 @@
           <a:lstStyle/>
           <a:p>
             <a:pPr algn="l" indent="0" marL="0">
-              <a:buNone/>
-            </a:pPr>
-            <a:r>
-              <a:rPr lang="en-US" sz="950" dirty="0">
+              <a:lnSpc>
+                <a:spcPts val="1600"/>
+              </a:lnSpc>
+              <a:buNone/>
+            </a:pPr>
+            <a:r>
+              <a:rPr lang="en-US" sz="900" dirty="0">
                 <a:solidFill>
                   <a:srgbClr val="24364B"/>
                 </a:solidFill>
@@ -9984,14 +10941,17 @@
               </a:rPr>
               <a:t>• Sign consistency: Negative across lags 1–2; positive at lag 3 suggests direction instability</a:t>
             </a:r>
-            <a:endParaRPr lang="en-US" sz="950" dirty="0"/>
+            <a:endParaRPr lang="en-US" sz="900" dirty="0"/>
           </a:p>
           <a:p>
             <a:pPr algn="l" indent="0" marL="0">
-              <a:buNone/>
-            </a:pPr>
-            <a:r>
-              <a:rPr lang="en-US" sz="950" dirty="0">
+              <a:lnSpc>
+                <a:spcPts val="1600"/>
+              </a:lnSpc>
+              <a:buNone/>
+            </a:pPr>
+            <a:r>
+              <a:rPr lang="en-US" sz="900" dirty="0">
                 <a:solidFill>
                   <a:srgbClr val="24364B"/>
                 </a:solidFill>
@@ -10001,14 +10961,17 @@
               </a:rPr>
               <a:t>• Lead effect significant at p &lt; 0.10 raises reverse-causality concerns: lower profitability may prompt lobbying</a:t>
             </a:r>
-            <a:endParaRPr lang="en-US" sz="950" dirty="0"/>
+            <a:endParaRPr lang="en-US" sz="900" dirty="0"/>
           </a:p>
           <a:p>
             <a:pPr algn="l" indent="0" marL="0">
-              <a:buNone/>
-            </a:pPr>
-            <a:r>
-              <a:rPr lang="en-US" sz="950" dirty="0">
+              <a:lnSpc>
+                <a:spcPts val="1600"/>
+              </a:lnSpc>
+              <a:buNone/>
+            </a:pPr>
+            <a:r>
+              <a:rPr lang="en-US" sz="900" dirty="0">
                 <a:solidFill>
                   <a:srgbClr val="24364B"/>
                 </a:solidFill>
@@ -10018,14 +10981,17 @@
               </a:rPr>
               <a:t>• Heterogeneity: Small firms show extreme, imprecise effect; large firms show consistent, negative effect (p &lt; 0.001)</a:t>
             </a:r>
-            <a:endParaRPr lang="en-US" sz="950" dirty="0"/>
+            <a:endParaRPr lang="en-US" sz="900" dirty="0"/>
           </a:p>
           <a:p>
             <a:pPr algn="l" indent="0" marL="0">
-              <a:buNone/>
-            </a:pPr>
-            <a:r>
-              <a:rPr lang="en-US" sz="950" dirty="0">
+              <a:lnSpc>
+                <a:spcPts val="1600"/>
+              </a:lnSpc>
+              <a:buNone/>
+            </a:pPr>
+            <a:r>
+              <a:rPr lang="en-US" sz="900" dirty="0">
                 <a:solidFill>
                   <a:srgbClr val="24364B"/>
                 </a:solidFill>
@@ -10035,7 +11001,7 @@
               </a:rPr>
               <a:t>• Excluding 2020 maintains negative direction but reduces precision, suggesting COVID-19 did not drive main result</a:t>
             </a:r>
-            <a:endParaRPr lang="en-US" sz="950" dirty="0"/>
+            <a:endParaRPr lang="en-US" sz="900" dirty="0"/>
           </a:p>
         </p:txBody>
       </p:sp>
@@ -10053,7 +11019,7 @@
     <p:bg>
       <p:bgPr>
         <a:solidFill>
-          <a:srgbClr val="F3F8FD"/>
+          <a:srgbClr val="F5F8FB"/>
         </a:solidFill>
       </p:bgPr>
     </p:bg>
@@ -10080,19 +11046,19 @@
         <p:spPr>
           <a:xfrm>
             <a:off x="320040" y="182880"/>
-            <a:ext cx="914400" cy="228600"/>
+            <a:ext cx="1005840" cy="256032"/>
           </a:xfrm>
           <a:prstGeom prst="roundRect">
             <a:avLst>
-              <a:gd name="adj" fmla="val 16000"/>
+              <a:gd name="adj" fmla="val 21429"/>
             </a:avLst>
           </a:prstGeom>
           <a:solidFill>
-            <a:srgbClr val="DCEEFF"/>
+            <a:srgbClr val="0066CC"/>
           </a:solidFill>
           <a:ln w="12700">
             <a:solidFill>
-              <a:srgbClr val="DCEEFF"/>
+              <a:srgbClr val="0066CC"/>
             </a:solidFill>
             <a:prstDash val="solid"/>
           </a:ln>
@@ -10107,7 +11073,7 @@
         <p:spPr>
           <a:xfrm>
             <a:off x="320040" y="201168"/>
-            <a:ext cx="914400" cy="201168"/>
+            <a:ext cx="1005840" cy="219456"/>
           </a:xfrm>
           <a:prstGeom prst="rect">
             <a:avLst/>
@@ -10125,7 +11091,7 @@
             <a:r>
               <a:rPr lang="en-US" sz="800" b="1" dirty="0">
                 <a:solidFill>
-                  <a:srgbClr val="102A43"/>
+                  <a:srgbClr val="FFFFFF"/>
                 </a:solidFill>
                 <a:latin typeface="Trebuchet MS" pitchFamily="34" charset="0"/>
                 <a:ea typeface="Trebuchet MS" pitchFamily="34" charset="-122"/>
@@ -10139,14 +11105,34 @@
       </p:sp>
       <p:sp>
         <p:nvSpPr>
-          <p:cNvPr id="4" name="Text 2"/>
+          <p:cNvPr id="4" name="Shape 2"/>
           <p:cNvSpPr/>
           <p:nvPr/>
         </p:nvSpPr>
         <p:spPr>
           <a:xfrm>
-            <a:off x="320040" y="548640"/>
-            <a:ext cx="8503920" cy="365760"/>
+            <a:off x="320040" y="484632"/>
+            <a:ext cx="54864" cy="457200"/>
+          </a:xfrm>
+          <a:prstGeom prst="rect">
+            <a:avLst/>
+          </a:prstGeom>
+          <a:solidFill>
+            <a:srgbClr val="0066CC"/>
+          </a:solidFill>
+          <a:ln/>
+        </p:spPr>
+      </p:sp>
+      <p:sp>
+        <p:nvSpPr>
+          <p:cNvPr id="5" name="Text 3"/>
+          <p:cNvSpPr/>
+          <p:nvPr/>
+        </p:nvSpPr>
+        <p:spPr>
+          <a:xfrm>
+            <a:off x="457200" y="548640"/>
+            <a:ext cx="8366760" cy="365760"/>
           </a:xfrm>
           <a:prstGeom prst="rect">
             <a:avLst/>
@@ -10178,18 +11164,18 @@
       </p:sp>
       <p:sp>
         <p:nvSpPr>
-          <p:cNvPr id="5" name="Shape 3"/>
+          <p:cNvPr id="6" name="Shape 4"/>
           <p:cNvSpPr/>
           <p:nvPr/>
         </p:nvSpPr>
         <p:spPr>
           <a:xfrm>
             <a:off x="320040" y="1051560"/>
-            <a:ext cx="4023360" cy="5257800"/>
+            <a:ext cx="4023360" cy="5029200"/>
           </a:xfrm>
           <a:prstGeom prst="roundRect">
             <a:avLst>
-              <a:gd name="adj" fmla="val 1818"/>
+              <a:gd name="adj" fmla="val 2727"/>
             </a:avLst>
           </a:prstGeom>
           <a:solidFill>
@@ -10202,9 +11188,9 @@
             <a:prstDash val="solid"/>
           </a:ln>
           <a:effectLst>
-            <a:outerShdw sx="100000" sy="100000" kx="0" ky="0" algn="bl" rotWithShape="0" blurRad="38100" dist="50800" dir="2700000">
+            <a:outerShdw sx="100000" sy="100000" kx="0" ky="0" algn="bl" rotWithShape="0" blurRad="50800" dist="25400" dir="2700000">
               <a:srgbClr val="000000">
-                <a:alpha val="20000"/>
+                <a:alpha val="12000"/>
               </a:srgbClr>
             </a:outerShdw>
           </a:effectLst>
@@ -10212,14 +11198,34 @@
       </p:sp>
       <p:sp>
         <p:nvSpPr>
-          <p:cNvPr id="6" name="Text 4"/>
+          <p:cNvPr id="7" name="Shape 5"/>
           <p:cNvSpPr/>
           <p:nvPr/>
         </p:nvSpPr>
         <p:spPr>
           <a:xfrm>
-            <a:off x="502920" y="1234440"/>
-            <a:ext cx="3657600" cy="228600"/>
+            <a:off x="320040" y="1051560"/>
+            <a:ext cx="45720" cy="5029200"/>
+          </a:xfrm>
+          <a:prstGeom prst="rect">
+            <a:avLst/>
+          </a:prstGeom>
+          <a:solidFill>
+            <a:srgbClr val="0066CC"/>
+          </a:solidFill>
+          <a:ln/>
+        </p:spPr>
+      </p:sp>
+      <p:sp>
+        <p:nvSpPr>
+          <p:cNvPr id="8" name="Text 6"/>
+          <p:cNvSpPr/>
+          <p:nvPr/>
+        </p:nvSpPr>
+        <p:spPr>
+          <a:xfrm>
+            <a:off x="548640" y="1207008"/>
+            <a:ext cx="3657600" cy="256032"/>
           </a:xfrm>
           <a:prstGeom prst="rect">
             <a:avLst/>
@@ -10231,7 +11237,7 @@
           <a:bodyPr wrap="square" rtlCol="0" anchor="ctr"/>
           <a:lstStyle/>
           <a:p>
-            <a:pPr indent="0" marL="0">
+            <a:pPr algn="l" indent="0" marL="0">
               <a:buNone/>
             </a:pPr>
             <a:r>
@@ -10251,14 +11257,14 @@
       </p:sp>
       <p:sp>
         <p:nvSpPr>
-          <p:cNvPr id="7" name="Text 5"/>
+          <p:cNvPr id="9" name="Text 7"/>
           <p:cNvSpPr/>
           <p:nvPr/>
         </p:nvSpPr>
         <p:spPr>
           <a:xfrm>
-            <a:off x="502920" y="1508760"/>
-            <a:ext cx="3657600" cy="4114800"/>
+            <a:off x="548640" y="1508760"/>
+            <a:ext cx="3657600" cy="4389120"/>
           </a:xfrm>
           <a:prstGeom prst="rect">
             <a:avLst/>
@@ -10271,10 +11277,13 @@
           <a:lstStyle/>
           <a:p>
             <a:pPr algn="l" indent="0" marL="0">
-              <a:buNone/>
-            </a:pPr>
-            <a:r>
-              <a:rPr lang="en-US" sz="950" dirty="0">
+              <a:lnSpc>
+                <a:spcPts val="1600"/>
+              </a:lnSpc>
+              <a:buNone/>
+            </a:pPr>
+            <a:r>
+              <a:rPr lang="en-US" sz="900" dirty="0">
                 <a:solidFill>
                   <a:srgbClr val="24364B"/>
                 </a:solidFill>
@@ -10284,14 +11293,17 @@
               </a:rPr>
               <a:t>• Coefficient: β = –24.09 (SE = 5.25, p &lt; 0.001)</a:t>
             </a:r>
-            <a:endParaRPr lang="en-US" sz="950" dirty="0"/>
+            <a:endParaRPr lang="en-US" sz="900" dirty="0"/>
           </a:p>
           <a:p>
             <a:pPr algn="l" indent="0" marL="0">
-              <a:buNone/>
-            </a:pPr>
-            <a:r>
-              <a:rPr lang="en-US" sz="950" dirty="0">
+              <a:lnSpc>
+                <a:spcPts val="1600"/>
+              </a:lnSpc>
+              <a:buNone/>
+            </a:pPr>
+            <a:r>
+              <a:rPr lang="en-US" sz="900" dirty="0">
                 <a:solidFill>
                   <a:srgbClr val="24364B"/>
                 </a:solidFill>
@@ -10301,14 +11313,17 @@
               </a:rPr>
               <a:t>• Precisely estimated; statistically significant</a:t>
             </a:r>
-            <a:endParaRPr lang="en-US" sz="950" dirty="0"/>
+            <a:endParaRPr lang="en-US" sz="900" dirty="0"/>
           </a:p>
           <a:p>
             <a:pPr algn="l" indent="0" marL="0">
-              <a:buNone/>
-            </a:pPr>
-            <a:r>
-              <a:rPr lang="en-US" sz="950" dirty="0">
+              <a:lnSpc>
+                <a:spcPts val="1600"/>
+              </a:lnSpc>
+              <a:buNone/>
+            </a:pPr>
+            <a:r>
+              <a:rPr lang="en-US" sz="900" dirty="0">
                 <a:solidFill>
                   <a:srgbClr val="24364B"/>
                 </a:solidFill>
@@ -10318,14 +11333,17 @@
               </a:rPr>
               <a:t>• Small magnitude but consistent</a:t>
             </a:r>
-            <a:endParaRPr lang="en-US" sz="950" dirty="0"/>
+            <a:endParaRPr lang="en-US" sz="900" dirty="0"/>
           </a:p>
           <a:p>
             <a:pPr algn="l" indent="0" marL="0">
-              <a:buNone/>
-            </a:pPr>
-            <a:r>
-              <a:rPr lang="en-US" sz="950" dirty="0">
+              <a:lnSpc>
+                <a:spcPts val="1600"/>
+              </a:lnSpc>
+              <a:buNone/>
+            </a:pPr>
+            <a:r>
+              <a:rPr lang="en-US" sz="900" dirty="0">
                 <a:solidFill>
                   <a:srgbClr val="24364B"/>
                 </a:solidFill>
@@ -10335,24 +11353,24 @@
               </a:rPr>
               <a:t>• Interpretation: Defensive lobbying by larger, more exposed firms</a:t>
             </a:r>
-            <a:endParaRPr lang="en-US" sz="950" dirty="0"/>
+            <a:endParaRPr lang="en-US" sz="900" dirty="0"/>
           </a:p>
         </p:txBody>
       </p:sp>
       <p:sp>
         <p:nvSpPr>
-          <p:cNvPr id="8" name="Shape 6"/>
+          <p:cNvPr id="10" name="Shape 8"/>
           <p:cNvSpPr/>
           <p:nvPr/>
         </p:nvSpPr>
         <p:spPr>
           <a:xfrm>
             <a:off x="4800600" y="1051560"/>
-            <a:ext cx="4023360" cy="5257800"/>
+            <a:ext cx="4023360" cy="5029200"/>
           </a:xfrm>
           <a:prstGeom prst="roundRect">
             <a:avLst>
-              <a:gd name="adj" fmla="val 1818"/>
+              <a:gd name="adj" fmla="val 2727"/>
             </a:avLst>
           </a:prstGeom>
           <a:solidFill>
@@ -10365,9 +11383,9 @@
             <a:prstDash val="solid"/>
           </a:ln>
           <a:effectLst>
-            <a:outerShdw sx="100000" sy="100000" kx="0" ky="0" algn="bl" rotWithShape="0" blurRad="38100" dist="50800" dir="2700000">
+            <a:outerShdw sx="100000" sy="100000" kx="0" ky="0" algn="bl" rotWithShape="0" blurRad="50800" dist="25400" dir="2700000">
               <a:srgbClr val="000000">
-                <a:alpha val="20000"/>
+                <a:alpha val="12000"/>
               </a:srgbClr>
             </a:outerShdw>
           </a:effectLst>
@@ -10375,14 +11393,34 @@
       </p:sp>
       <p:sp>
         <p:nvSpPr>
-          <p:cNvPr id="9" name="Text 7"/>
+          <p:cNvPr id="11" name="Shape 9"/>
           <p:cNvSpPr/>
           <p:nvPr/>
         </p:nvSpPr>
         <p:spPr>
           <a:xfrm>
-            <a:off x="4983480" y="1234440"/>
-            <a:ext cx="3657600" cy="228600"/>
+            <a:off x="4800600" y="1051560"/>
+            <a:ext cx="45720" cy="5029200"/>
+          </a:xfrm>
+          <a:prstGeom prst="rect">
+            <a:avLst/>
+          </a:prstGeom>
+          <a:solidFill>
+            <a:srgbClr val="0066CC"/>
+          </a:solidFill>
+          <a:ln/>
+        </p:spPr>
+      </p:sp>
+      <p:sp>
+        <p:nvSpPr>
+          <p:cNvPr id="12" name="Text 10"/>
+          <p:cNvSpPr/>
+          <p:nvPr/>
+        </p:nvSpPr>
+        <p:spPr>
+          <a:xfrm>
+            <a:off x="5029200" y="1207008"/>
+            <a:ext cx="3657600" cy="256032"/>
           </a:xfrm>
           <a:prstGeom prst="rect">
             <a:avLst/>
@@ -10394,7 +11432,7 @@
           <a:bodyPr wrap="square" rtlCol="0" anchor="ctr"/>
           <a:lstStyle/>
           <a:p>
-            <a:pPr indent="0" marL="0">
+            <a:pPr algn="l" indent="0" marL="0">
               <a:buNone/>
             </a:pPr>
             <a:r>
@@ -10414,14 +11452,14 @@
       </p:sp>
       <p:sp>
         <p:nvSpPr>
-          <p:cNvPr id="10" name="Text 8"/>
+          <p:cNvPr id="13" name="Text 11"/>
           <p:cNvSpPr/>
           <p:nvPr/>
         </p:nvSpPr>
         <p:spPr>
           <a:xfrm>
-            <a:off x="4983480" y="1508760"/>
-            <a:ext cx="3657600" cy="4114800"/>
+            <a:off x="5029200" y="1508760"/>
+            <a:ext cx="3657600" cy="4389120"/>
           </a:xfrm>
           <a:prstGeom prst="rect">
             <a:avLst/>
@@ -10434,10 +11472,13 @@
           <a:lstStyle/>
           <a:p>
             <a:pPr algn="l" indent="0" marL="0">
-              <a:buNone/>
-            </a:pPr>
-            <a:r>
-              <a:rPr lang="en-US" sz="950" dirty="0">
+              <a:lnSpc>
+                <a:spcPts val="1600"/>
+              </a:lnSpc>
+              <a:buNone/>
+            </a:pPr>
+            <a:r>
+              <a:rPr lang="en-US" sz="900" dirty="0">
                 <a:solidFill>
                   <a:srgbClr val="24364B"/>
                 </a:solidFill>
@@ -10447,14 +11488,17 @@
               </a:rPr>
               <a:t>• Coefficient: β = –5,753.85 (SE = 4,059.05, p = 0.156)</a:t>
             </a:r>
-            <a:endParaRPr lang="en-US" sz="950" dirty="0"/>
+            <a:endParaRPr lang="en-US" sz="900" dirty="0"/>
           </a:p>
           <a:p>
             <a:pPr algn="l" indent="0" marL="0">
-              <a:buNone/>
-            </a:pPr>
-            <a:r>
-              <a:rPr lang="en-US" sz="950" dirty="0">
+              <a:lnSpc>
+                <a:spcPts val="1600"/>
+              </a:lnSpc>
+              <a:buNone/>
+            </a:pPr>
+            <a:r>
+              <a:rPr lang="en-US" sz="900" dirty="0">
                 <a:solidFill>
                   <a:srgbClr val="24364B"/>
                 </a:solidFill>
@@ -10464,14 +11508,17 @@
               </a:rPr>
               <a:t>• Very large magnitude but imprecise</a:t>
             </a:r>
-            <a:endParaRPr lang="en-US" sz="950" dirty="0"/>
+            <a:endParaRPr lang="en-US" sz="900" dirty="0"/>
           </a:p>
           <a:p>
             <a:pPr algn="l" indent="0" marL="0">
-              <a:buNone/>
-            </a:pPr>
-            <a:r>
-              <a:rPr lang="en-US" sz="950" dirty="0">
+              <a:lnSpc>
+                <a:spcPts val="1600"/>
+              </a:lnSpc>
+              <a:buNone/>
+            </a:pPr>
+            <a:r>
+              <a:rPr lang="en-US" sz="900" dirty="0">
                 <a:solidFill>
                   <a:srgbClr val="24364B"/>
                 </a:solidFill>
@@ -10481,14 +11528,17 @@
               </a:rPr>
               <a:t>• Not statistically significant</a:t>
             </a:r>
-            <a:endParaRPr lang="en-US" sz="950" dirty="0"/>
+            <a:endParaRPr lang="en-US" sz="900" dirty="0"/>
           </a:p>
           <a:p>
             <a:pPr algn="l" indent="0" marL="0">
-              <a:buNone/>
-            </a:pPr>
-            <a:r>
-              <a:rPr lang="en-US" sz="950" dirty="0">
+              <a:lnSpc>
+                <a:spcPts val="1600"/>
+              </a:lnSpc>
+              <a:buNone/>
+            </a:pPr>
+            <a:r>
+              <a:rPr lang="en-US" sz="900" dirty="0">
                 <a:solidFill>
                   <a:srgbClr val="24364B"/>
                 </a:solidFill>
@@ -10498,13 +11548,13 @@
               </a:rPr>
               <a:t>• Likely driven by few extreme spenders; high noise in small-firm lobbying</a:t>
             </a:r>
-            <a:endParaRPr lang="en-US" sz="950" dirty="0"/>
+            <a:endParaRPr lang="en-US" sz="900" dirty="0"/>
           </a:p>
         </p:txBody>
       </p:sp>
       <p:sp>
         <p:nvSpPr>
-          <p:cNvPr id="11" name="Text 9"/>
+          <p:cNvPr id="14" name="Text 12"/>
           <p:cNvSpPr/>
           <p:nvPr/>
         </p:nvSpPr>
@@ -10529,7 +11579,7 @@
             <a:r>
               <a:rPr lang="en-US" sz="800" i="1" dirty="0">
                 <a:solidFill>
-                  <a:srgbClr val="5F7084"/>
+                  <a:srgbClr val="7A8DA0"/>
                 </a:solidFill>
                 <a:latin typeface="Aptos" pitchFamily="34" charset="0"/>
                 <a:ea typeface="Aptos" pitchFamily="34" charset="-122"/>
@@ -10555,7 +11605,7 @@
     <p:bg>
       <p:bgPr>
         <a:solidFill>
-          <a:srgbClr val="F3F8FD"/>
+          <a:srgbClr val="F5F8FB"/>
         </a:solidFill>
       </p:bgPr>
     </p:bg>
@@ -10582,19 +11632,19 @@
         <p:spPr>
           <a:xfrm>
             <a:off x="320040" y="182880"/>
-            <a:ext cx="914400" cy="228600"/>
+            <a:ext cx="1005840" cy="256032"/>
           </a:xfrm>
           <a:prstGeom prst="roundRect">
             <a:avLst>
-              <a:gd name="adj" fmla="val 16000"/>
+              <a:gd name="adj" fmla="val 21429"/>
             </a:avLst>
           </a:prstGeom>
           <a:solidFill>
-            <a:srgbClr val="DCEEFF"/>
+            <a:srgbClr val="0066CC"/>
           </a:solidFill>
           <a:ln w="12700">
             <a:solidFill>
-              <a:srgbClr val="DCEEFF"/>
+              <a:srgbClr val="0066CC"/>
             </a:solidFill>
             <a:prstDash val="solid"/>
           </a:ln>
@@ -10609,7 +11659,7 @@
         <p:spPr>
           <a:xfrm>
             <a:off x="320040" y="201168"/>
-            <a:ext cx="914400" cy="201168"/>
+            <a:ext cx="1005840" cy="219456"/>
           </a:xfrm>
           <a:prstGeom prst="rect">
             <a:avLst/>
@@ -10627,7 +11677,7 @@
             <a:r>
               <a:rPr lang="en-US" sz="800" b="1" dirty="0">
                 <a:solidFill>
-                  <a:srgbClr val="102A43"/>
+                  <a:srgbClr val="FFFFFF"/>
                 </a:solidFill>
                 <a:latin typeface="Trebuchet MS" pitchFamily="34" charset="0"/>
                 <a:ea typeface="Trebuchet MS" pitchFamily="34" charset="-122"/>
@@ -10641,14 +11691,34 @@
       </p:sp>
       <p:sp>
         <p:nvSpPr>
-          <p:cNvPr id="4" name="Text 2"/>
+          <p:cNvPr id="4" name="Shape 2"/>
           <p:cNvSpPr/>
           <p:nvPr/>
         </p:nvSpPr>
         <p:spPr>
           <a:xfrm>
-            <a:off x="320040" y="548640"/>
-            <a:ext cx="8503920" cy="365760"/>
+            <a:off x="320040" y="484632"/>
+            <a:ext cx="54864" cy="457200"/>
+          </a:xfrm>
+          <a:prstGeom prst="rect">
+            <a:avLst/>
+          </a:prstGeom>
+          <a:solidFill>
+            <a:srgbClr val="0066CC"/>
+          </a:solidFill>
+          <a:ln/>
+        </p:spPr>
+      </p:sp>
+      <p:sp>
+        <p:nvSpPr>
+          <p:cNvPr id="5" name="Text 3"/>
+          <p:cNvSpPr/>
+          <p:nvPr/>
+        </p:nvSpPr>
+        <p:spPr>
+          <a:xfrm>
+            <a:off x="457200" y="548640"/>
+            <a:ext cx="8366760" cy="365760"/>
           </a:xfrm>
           <a:prstGeom prst="rect">
             <a:avLst/>
@@ -10680,7 +11750,7 @@
       </p:sp>
       <p:sp>
         <p:nvSpPr>
-          <p:cNvPr id="5" name="Shape 3"/>
+          <p:cNvPr id="6" name="Shape 4"/>
           <p:cNvSpPr/>
           <p:nvPr/>
         </p:nvSpPr>
@@ -10691,7 +11761,7 @@
           </a:xfrm>
           <a:prstGeom prst="roundRect">
             <a:avLst>
-              <a:gd name="adj" fmla="val 1391"/>
+              <a:gd name="adj" fmla="val 2087"/>
             </a:avLst>
           </a:prstGeom>
           <a:solidFill>
@@ -10704,9 +11774,9 @@
             <a:prstDash val="solid"/>
           </a:ln>
           <a:effectLst>
-            <a:outerShdw sx="100000" sy="100000" kx="0" ky="0" algn="bl" rotWithShape="0" blurRad="38100" dist="50800" dir="2700000">
+            <a:outerShdw sx="100000" sy="100000" kx="0" ky="0" algn="bl" rotWithShape="0" blurRad="50800" dist="25400" dir="2700000">
               <a:srgbClr val="000000">
-                <a:alpha val="20000"/>
+                <a:alpha val="12000"/>
               </a:srgbClr>
             </a:outerShdw>
           </a:effectLst>
@@ -10714,7 +11784,7 @@
       </p:sp>
       <p:sp>
         <p:nvSpPr>
-          <p:cNvPr id="6" name="Text 4"/>
+          <p:cNvPr id="7" name="Text 5"/>
           <p:cNvSpPr/>
           <p:nvPr/>
         </p:nvSpPr>
@@ -10734,10 +11804,13 @@
           <a:lstStyle/>
           <a:p>
             <a:pPr algn="l" indent="0" marL="0">
-              <a:buNone/>
-            </a:pPr>
-            <a:r>
-              <a:rPr lang="en-US" sz="1000" dirty="0">
+              <a:lnSpc>
+                <a:spcPts val="1600"/>
+              </a:lnSpc>
+              <a:buNone/>
+            </a:pPr>
+            <a:r>
+              <a:rPr lang="en-US" sz="950" dirty="0">
                 <a:solidFill>
                   <a:srgbClr val="24364B"/>
                 </a:solidFill>
@@ -10747,14 +11820,17 @@
               </a:rPr>
               <a:t>• Three-way FE with industry-by-year interactions: β = –159.48 (p = 0.367) — sign remains negative, precision similar to baseline</a:t>
             </a:r>
-            <a:endParaRPr lang="en-US" sz="1000" dirty="0"/>
+            <a:endParaRPr lang="en-US" sz="950" dirty="0"/>
           </a:p>
           <a:p>
             <a:pPr algn="l" indent="0" marL="0">
-              <a:buNone/>
-            </a:pPr>
-            <a:r>
-              <a:rPr lang="en-US" sz="1000" dirty="0">
+              <a:lnSpc>
+                <a:spcPts val="1600"/>
+              </a:lnSpc>
+              <a:buNone/>
+            </a:pPr>
+            <a:r>
+              <a:rPr lang="en-US" sz="950" dirty="0">
                 <a:solidFill>
                   <a:srgbClr val="24364B"/>
                 </a:solidFill>
@@ -10764,14 +11840,17 @@
               </a:rPr>
               <a:t>• Staggered difference-in-differences (Callaway-Sant'Anna): Average treatment effect ≈ –338.79 pp; large, negative, but uncertain</a:t>
             </a:r>
-            <a:endParaRPr lang="en-US" sz="1000" dirty="0"/>
+            <a:endParaRPr lang="en-US" sz="950" dirty="0"/>
           </a:p>
           <a:p>
             <a:pPr algn="l" indent="0" marL="0">
-              <a:buNone/>
-            </a:pPr>
-            <a:r>
-              <a:rPr lang="en-US" sz="1000" dirty="0">
+              <a:lnSpc>
+                <a:spcPts val="1600"/>
+              </a:lnSpc>
+              <a:buNone/>
+            </a:pPr>
+            <a:r>
+              <a:rPr lang="en-US" sz="950" dirty="0">
                 <a:solidFill>
                   <a:srgbClr val="24364B"/>
                 </a:solidFill>
@@ -10781,14 +11860,17 @@
               </a:rPr>
               <a:t>• Cluster bootstrap 95% CI: [–517.62, 149.65] — wide interval spans positive and negative, confirming low precision</a:t>
             </a:r>
-            <a:endParaRPr lang="en-US" sz="1000" dirty="0"/>
+            <a:endParaRPr lang="en-US" sz="950" dirty="0"/>
           </a:p>
           <a:p>
             <a:pPr algn="l" indent="0" marL="0">
-              <a:buNone/>
-            </a:pPr>
-            <a:r>
-              <a:rPr lang="en-US" sz="1000" dirty="0">
+              <a:lnSpc>
+                <a:spcPts val="1600"/>
+              </a:lnSpc>
+              <a:buNone/>
+            </a:pPr>
+            <a:r>
+              <a:rPr lang="en-US" sz="950" dirty="0">
                 <a:solidFill>
                   <a:srgbClr val="24364B"/>
                 </a:solidFill>
@@ -10798,14 +11880,17 @@
               </a:rPr>
               <a:t>• Breusch-Pagan test for heteroskedasticity: p &lt; 0.0001; justifies clustered SEs over homoskedastic OLS</a:t>
             </a:r>
-            <a:endParaRPr lang="en-US" sz="1000" dirty="0"/>
+            <a:endParaRPr lang="en-US" sz="950" dirty="0"/>
           </a:p>
           <a:p>
             <a:pPr algn="l" indent="0" marL="0">
-              <a:buNone/>
-            </a:pPr>
-            <a:r>
-              <a:rPr lang="en-US" sz="1000" dirty="0">
+              <a:lnSpc>
+                <a:spcPts val="1600"/>
+              </a:lnSpc>
+              <a:buNone/>
+            </a:pPr>
+            <a:r>
+              <a:rPr lang="en-US" sz="950" dirty="0">
                 <a:solidFill>
                   <a:srgbClr val="24364B"/>
                 </a:solidFill>
@@ -10815,14 +11900,17 @@
               </a:rPr>
               <a:t>• Variance Inflation Factors (VIF) for controls: max 2.74; multicollinearity not a concern</a:t>
             </a:r>
-            <a:endParaRPr lang="en-US" sz="1000" dirty="0"/>
+            <a:endParaRPr lang="en-US" sz="950" dirty="0"/>
           </a:p>
           <a:p>
             <a:pPr algn="l" indent="0" marL="0">
-              <a:buNone/>
-            </a:pPr>
-            <a:r>
-              <a:rPr lang="en-US" sz="1000" dirty="0">
+              <a:lnSpc>
+                <a:spcPts val="1600"/>
+              </a:lnSpc>
+              <a:buNone/>
+            </a:pPr>
+            <a:r>
+              <a:rPr lang="en-US" sz="950" dirty="0">
                 <a:solidFill>
                   <a:srgbClr val="24364B"/>
                 </a:solidFill>
@@ -10832,7 +11920,7 @@
               </a:rPr>
               <a:t>• Diagnostic plots (Q-Q, residvals-vs-fitted): suggest non-ideal residual behavior; pattern consistent with sparse, heterogeneous panel</a:t>
             </a:r>
-            <a:endParaRPr lang="en-US" sz="1000" dirty="0"/>
+            <a:endParaRPr lang="en-US" sz="950" dirty="0"/>
           </a:p>
         </p:txBody>
       </p:sp>
